--- a/docs/LLM presentation.pptx
+++ b/docs/LLM presentation.pptx
@@ -5,21 +5,22 @@
     <p:sldMasterId id="2147483648" r:id="rId1"/>
   </p:sldMasterIdLst>
   <p:notesMasterIdLst>
-    <p:notesMasterId r:id="rId14"/>
+    <p:notesMasterId r:id="rId15"/>
   </p:notesMasterIdLst>
   <p:sldIdLst>
-    <p:sldId id="267" r:id="rId2"/>
-    <p:sldId id="268" r:id="rId3"/>
-    <p:sldId id="259" r:id="rId4"/>
-    <p:sldId id="258" r:id="rId5"/>
-    <p:sldId id="272" r:id="rId6"/>
-    <p:sldId id="274" r:id="rId7"/>
-    <p:sldId id="275" r:id="rId8"/>
-    <p:sldId id="276" r:id="rId9"/>
-    <p:sldId id="277" r:id="rId10"/>
-    <p:sldId id="273" r:id="rId11"/>
-    <p:sldId id="278" r:id="rId12"/>
-    <p:sldId id="279" r:id="rId13"/>
+    <p:sldId id="280" r:id="rId2"/>
+    <p:sldId id="267" r:id="rId3"/>
+    <p:sldId id="268" r:id="rId4"/>
+    <p:sldId id="259" r:id="rId5"/>
+    <p:sldId id="258" r:id="rId6"/>
+    <p:sldId id="272" r:id="rId7"/>
+    <p:sldId id="274" r:id="rId8"/>
+    <p:sldId id="275" r:id="rId9"/>
+    <p:sldId id="276" r:id="rId10"/>
+    <p:sldId id="277" r:id="rId11"/>
+    <p:sldId id="273" r:id="rId12"/>
+    <p:sldId id="278" r:id="rId13"/>
+    <p:sldId id="279" r:id="rId14"/>
   </p:sldIdLst>
   <p:sldSz cx="12192000" cy="6858000"/>
   <p:notesSz cx="6858000" cy="9144000"/>
@@ -123,6 +124,7 @@
       <p14:sectionLst xmlns:p14="http://schemas.microsoft.com/office/powerpoint/2010/main">
         <p14:section name="Overview" id="{AE1B260A-45DB-A244-B81D-6E6D4F8E27ED}">
           <p14:sldIdLst>
+            <p14:sldId id="280"/>
             <p14:sldId id="267"/>
             <p14:sldId id="268"/>
             <p14:sldId id="259"/>
@@ -232,7 +234,7 @@
           <a:p>
             <a:fld id="{755C9F4E-E920-4D44-949A-A478FAE3130F}" type="datetimeFigureOut">
               <a:rPr lang="en-US" smtClean="0"/>
-              <a:t>6/26/25</a:t>
+              <a:t>7/6/25</a:t>
             </a:fld>
             <a:endParaRPr lang="en-US"/>
           </a:p>
@@ -646,7 +648,7 @@
           <a:p>
             <a:fld id="{F1275B78-02F6-4B47-B918-CE7AA020551C}" type="datetimeFigureOut">
               <a:rPr lang="en-US" smtClean="0"/>
-              <a:t>6/26/25</a:t>
+              <a:t>7/6/25</a:t>
             </a:fld>
             <a:endParaRPr lang="en-US"/>
           </a:p>
@@ -844,7 +846,7 @@
           <a:p>
             <a:fld id="{F1275B78-02F6-4B47-B918-CE7AA020551C}" type="datetimeFigureOut">
               <a:rPr lang="en-US" smtClean="0"/>
-              <a:t>6/26/25</a:t>
+              <a:t>7/6/25</a:t>
             </a:fld>
             <a:endParaRPr lang="en-US"/>
           </a:p>
@@ -1052,7 +1054,7 @@
           <a:p>
             <a:fld id="{F1275B78-02F6-4B47-B918-CE7AA020551C}" type="datetimeFigureOut">
               <a:rPr lang="en-US" smtClean="0"/>
-              <a:t>6/26/25</a:t>
+              <a:t>7/6/25</a:t>
             </a:fld>
             <a:endParaRPr lang="en-US"/>
           </a:p>
@@ -1250,7 +1252,7 @@
           <a:p>
             <a:fld id="{F1275B78-02F6-4B47-B918-CE7AA020551C}" type="datetimeFigureOut">
               <a:rPr lang="en-US" smtClean="0"/>
-              <a:t>6/26/25</a:t>
+              <a:t>7/6/25</a:t>
             </a:fld>
             <a:endParaRPr lang="en-US"/>
           </a:p>
@@ -1525,7 +1527,7 @@
           <a:p>
             <a:fld id="{F1275B78-02F6-4B47-B918-CE7AA020551C}" type="datetimeFigureOut">
               <a:rPr lang="en-US" smtClean="0"/>
-              <a:t>6/26/25</a:t>
+              <a:t>7/6/25</a:t>
             </a:fld>
             <a:endParaRPr lang="en-US"/>
           </a:p>
@@ -1790,7 +1792,7 @@
           <a:p>
             <a:fld id="{F1275B78-02F6-4B47-B918-CE7AA020551C}" type="datetimeFigureOut">
               <a:rPr lang="en-US" smtClean="0"/>
-              <a:t>6/26/25</a:t>
+              <a:t>7/6/25</a:t>
             </a:fld>
             <a:endParaRPr lang="en-US"/>
           </a:p>
@@ -2202,7 +2204,7 @@
           <a:p>
             <a:fld id="{F1275B78-02F6-4B47-B918-CE7AA020551C}" type="datetimeFigureOut">
               <a:rPr lang="en-US" smtClean="0"/>
-              <a:t>6/26/25</a:t>
+              <a:t>7/6/25</a:t>
             </a:fld>
             <a:endParaRPr lang="en-US"/>
           </a:p>
@@ -2343,7 +2345,7 @@
           <a:p>
             <a:fld id="{F1275B78-02F6-4B47-B918-CE7AA020551C}" type="datetimeFigureOut">
               <a:rPr lang="en-US" smtClean="0"/>
-              <a:t>6/26/25</a:t>
+              <a:t>7/6/25</a:t>
             </a:fld>
             <a:endParaRPr lang="en-US"/>
           </a:p>
@@ -2456,7 +2458,7 @@
           <a:p>
             <a:fld id="{F1275B78-02F6-4B47-B918-CE7AA020551C}" type="datetimeFigureOut">
               <a:rPr lang="en-US" smtClean="0"/>
-              <a:t>6/26/25</a:t>
+              <a:t>7/6/25</a:t>
             </a:fld>
             <a:endParaRPr lang="en-US"/>
           </a:p>
@@ -2767,7 +2769,7 @@
           <a:p>
             <a:fld id="{F1275B78-02F6-4B47-B918-CE7AA020551C}" type="datetimeFigureOut">
               <a:rPr lang="en-US" smtClean="0"/>
-              <a:t>6/26/25</a:t>
+              <a:t>7/6/25</a:t>
             </a:fld>
             <a:endParaRPr lang="en-US"/>
           </a:p>
@@ -3055,7 +3057,7 @@
           <a:p>
             <a:fld id="{F1275B78-02F6-4B47-B918-CE7AA020551C}" type="datetimeFigureOut">
               <a:rPr lang="en-US" smtClean="0"/>
-              <a:t>6/26/25</a:t>
+              <a:t>7/6/25</a:t>
             </a:fld>
             <a:endParaRPr lang="en-US"/>
           </a:p>
@@ -3296,7 +3298,7 @@
           <a:p>
             <a:fld id="{F1275B78-02F6-4B47-B918-CE7AA020551C}" type="datetimeFigureOut">
               <a:rPr lang="en-US" smtClean="0"/>
-              <a:t>6/26/25</a:t>
+              <a:t>7/6/25</a:t>
             </a:fld>
             <a:endParaRPr lang="en-US"/>
           </a:p>
@@ -3718,7 +3720,7 @@
           <p:cNvPr id="2" name="Title 1">
             <a:extLst>
               <a:ext uri="{FF2B5EF4-FFF2-40B4-BE49-F238E27FC236}">
-                <a16:creationId xmlns:a16="http://schemas.microsoft.com/office/drawing/2014/main" id="{1E72551B-B6FA-4385-7168-0CE79509FCAF}"/>
+                <a16:creationId xmlns:a16="http://schemas.microsoft.com/office/drawing/2014/main" id="{478C21FE-75D0-ED40-5F97-492E20539C85}"/>
               </a:ext>
             </a:extLst>
           </p:cNvPr>
@@ -3726,7 +3728,7 @@
             <a:spLocks noGrp="1"/>
           </p:cNvSpPr>
           <p:nvPr>
-            <p:ph type="title"/>
+            <p:ph type="ctrTitle"/>
           </p:nvPr>
         </p:nvSpPr>
         <p:spPr/>
@@ -3736,17 +3738,17 @@
           <a:p>
             <a:r>
               <a:rPr lang="en-US" dirty="0"/>
-              <a:t>Brief History</a:t>
-            </a:r>
-          </a:p>
-        </p:txBody>
-      </p:sp>
-      <p:sp>
-        <p:nvSpPr>
-          <p:cNvPr id="3" name="Content Placeholder 2">
-            <a:extLst>
-              <a:ext uri="{FF2B5EF4-FFF2-40B4-BE49-F238E27FC236}">
-                <a16:creationId xmlns:a16="http://schemas.microsoft.com/office/drawing/2014/main" id="{C681E477-B696-7565-A8AD-C45966B05818}"/>
+              <a:t>Introduction to RAG</a:t>
+            </a:r>
+          </a:p>
+        </p:txBody>
+      </p:sp>
+      <p:sp>
+        <p:nvSpPr>
+          <p:cNvPr id="3" name="Subtitle 2">
+            <a:extLst>
+              <a:ext uri="{FF2B5EF4-FFF2-40B4-BE49-F238E27FC236}">
+                <a16:creationId xmlns:a16="http://schemas.microsoft.com/office/drawing/2014/main" id="{DFE1D866-0E81-9EE3-1116-C82532AC8AEE}"/>
               </a:ext>
             </a:extLst>
           </p:cNvPr>
@@ -3754,124 +3756,37 @@
             <a:spLocks noGrp="1"/>
           </p:cNvSpPr>
           <p:nvPr>
-            <p:ph idx="1"/>
+            <p:ph type="subTitle" idx="1"/>
           </p:nvPr>
         </p:nvSpPr>
         <p:spPr/>
         <p:txBody>
-          <a:bodyPr>
-            <a:normAutofit/>
-          </a:bodyPr>
+          <a:bodyPr/>
           <a:lstStyle/>
           <a:p>
-            <a:pPr marL="0" indent="0">
-              <a:buNone/>
-            </a:pPr>
-            <a:r>
-              <a:rPr lang="en-US" sz="2400" i="1" dirty="0"/>
-              <a:t>2018-2020</a:t>
-            </a:r>
-            <a:r>
-              <a:rPr lang="en-US" sz="2400" dirty="0"/>
-              <a:t> Foundation Models</a:t>
-            </a:r>
-          </a:p>
-          <a:p>
-            <a:pPr lvl="1"/>
-            <a:r>
-              <a:rPr lang="en-US" sz="2000" dirty="0"/>
-              <a:t>GPT-2 , Bert, T5 </a:t>
-            </a:r>
-          </a:p>
-          <a:p>
-            <a:pPr lvl="1"/>
-            <a:r>
-              <a:rPr lang="en-US" sz="2000" dirty="0"/>
-              <a:t>No instruction-following, limited practical use</a:t>
-            </a:r>
-          </a:p>
-          <a:p>
-            <a:pPr marL="0" indent="0">
-              <a:buNone/>
-            </a:pPr>
-            <a:r>
-              <a:rPr lang="en-US" sz="2400" i="1" dirty="0"/>
-              <a:t>2021-2022</a:t>
-            </a:r>
-            <a:r>
-              <a:rPr lang="en-US" sz="2400" dirty="0"/>
-              <a:t> Instruction Tuning and Finetuning</a:t>
-            </a:r>
-          </a:p>
-          <a:p>
-            <a:pPr lvl="1"/>
-            <a:r>
-              <a:rPr lang="en-US" sz="2000" dirty="0"/>
-              <a:t>GPT-3, </a:t>
-            </a:r>
-            <a:r>
-              <a:rPr lang="en-US" sz="2000" dirty="0" err="1"/>
-              <a:t>InstructGPT</a:t>
-            </a:r>
-            <a:r>
-              <a:rPr lang="en-US" sz="2000" dirty="0"/>
-              <a:t>, FLAN</a:t>
-            </a:r>
-          </a:p>
-          <a:p>
-            <a:pPr lvl="1"/>
-            <a:r>
-              <a:rPr lang="en-US" sz="2000" dirty="0"/>
-              <a:t>Finetuned to follow user instructions and complete specific tasks</a:t>
-            </a:r>
-          </a:p>
-          <a:p>
-            <a:pPr lvl="1"/>
-            <a:r>
-              <a:rPr lang="en-US" sz="2000" dirty="0"/>
-              <a:t>Specialized models (e.g., legal, medical, finance)</a:t>
-            </a:r>
-            <a:endParaRPr lang="en-US" sz="2400" dirty="0"/>
-          </a:p>
-          <a:p>
-            <a:pPr marL="0" indent="0">
-              <a:buNone/>
-            </a:pPr>
-            <a:r>
-              <a:rPr lang="en-US" sz="2400" i="1" dirty="0"/>
-              <a:t>2022-2023</a:t>
-            </a:r>
-            <a:r>
-              <a:rPr lang="en-US" sz="2400" dirty="0"/>
-              <a:t> RAG</a:t>
-            </a:r>
-          </a:p>
-          <a:p>
-            <a:pPr lvl="1"/>
-            <a:r>
-              <a:rPr lang="en-US" sz="2000" dirty="0"/>
-              <a:t>Combine LLMs with external knowledge via vector search</a:t>
-            </a:r>
-          </a:p>
-          <a:p>
-            <a:pPr lvl="1"/>
-            <a:r>
-              <a:rPr lang="en-US" sz="2000" dirty="0"/>
-              <a:t>Popular for document QA, search, internal knowledge bots</a:t>
-            </a:r>
-          </a:p>
-          <a:p>
-            <a:pPr marL="0" indent="0">
-              <a:buNone/>
-            </a:pPr>
-            <a:endParaRPr lang="en-US" sz="2400" dirty="0"/>
+            <a:r>
+              <a:rPr lang="en-US" dirty="0"/>
+              <a:t>By Carlo Teufel </a:t>
+            </a:r>
+            <a:r>
+              <a:rPr lang="en-US" i="1" dirty="0"/>
+              <a:t>(</a:t>
+            </a:r>
+            <a:r>
+              <a:rPr lang="en-US" i="1" dirty="0" err="1"/>
+              <a:t>cteufel@ethz.ch</a:t>
+            </a:r>
+            <a:r>
+              <a:rPr lang="en-US" i="1" dirty="0"/>
+              <a:t>)</a:t>
+            </a:r>
           </a:p>
         </p:txBody>
       </p:sp>
     </p:spTree>
     <p:extLst>
       <p:ext uri="{BB962C8B-B14F-4D97-AF65-F5344CB8AC3E}">
-        <p14:creationId xmlns:p14="http://schemas.microsoft.com/office/powerpoint/2010/main" val="3497965053"/>
+        <p14:creationId xmlns:p14="http://schemas.microsoft.com/office/powerpoint/2010/main" val="244992565"/>
       </p:ext>
     </p:extLst>
   </p:cSld>
@@ -3903,7 +3818,7 @@
           <p:cNvPr id="2" name="Title 1">
             <a:extLst>
               <a:ext uri="{FF2B5EF4-FFF2-40B4-BE49-F238E27FC236}">
-                <a16:creationId xmlns:a16="http://schemas.microsoft.com/office/drawing/2014/main" id="{8128A51C-D667-1A58-AA5B-A6CE24D4DDC5}"/>
+                <a16:creationId xmlns:a16="http://schemas.microsoft.com/office/drawing/2014/main" id="{E58283A6-E586-C914-D037-267EF326983E}"/>
               </a:ext>
             </a:extLst>
           </p:cNvPr>
@@ -3921,7 +3836,7 @@
           <a:p>
             <a:r>
               <a:rPr lang="en-US" dirty="0"/>
-              <a:t>RAG Pipeline</a:t>
+              <a:t>Data Preparation</a:t>
             </a:r>
           </a:p>
         </p:txBody>
@@ -3931,7 +3846,7 @@
           <p:cNvPr id="4" name="Title 1">
             <a:extLst>
               <a:ext uri="{FF2B5EF4-FFF2-40B4-BE49-F238E27FC236}">
-                <a16:creationId xmlns:a16="http://schemas.microsoft.com/office/drawing/2014/main" id="{BDDDD17F-14FA-36F1-E821-003A90C25272}"/>
+                <a16:creationId xmlns:a16="http://schemas.microsoft.com/office/drawing/2014/main" id="{CA56A5F5-0F8C-3D24-9D35-74828C8593D0}"/>
               </a:ext>
             </a:extLst>
           </p:cNvPr>
@@ -3978,17 +3893,233 @@
           <a:p>
             <a:r>
               <a:rPr lang="en-US" sz="2800" i="1" dirty="0"/>
-              <a:t>Query Embedding</a:t>
-            </a:r>
-          </a:p>
-        </p:txBody>
-      </p:sp>
-      <p:sp>
-        <p:nvSpPr>
-          <p:cNvPr id="5" name="Rectangle 4">
-            <a:extLst>
-              <a:ext uri="{FF2B5EF4-FFF2-40B4-BE49-F238E27FC236}">
-                <a16:creationId xmlns:a16="http://schemas.microsoft.com/office/drawing/2014/main" id="{EC67C630-E44D-7C9D-76CD-14A79114EAD5}"/>
+              <a:t>Vector Store</a:t>
+            </a:r>
+          </a:p>
+        </p:txBody>
+      </p:sp>
+      <p:pic>
+        <p:nvPicPr>
+          <p:cNvPr id="6" name="Graphic 5">
+            <a:extLst>
+              <a:ext uri="{FF2B5EF4-FFF2-40B4-BE49-F238E27FC236}">
+                <a16:creationId xmlns:a16="http://schemas.microsoft.com/office/drawing/2014/main" id="{CFA3D0FE-856B-6EC8-9883-905A52DE11D4}"/>
+              </a:ext>
+            </a:extLst>
+          </p:cNvPr>
+          <p:cNvPicPr>
+            <a:picLocks noChangeAspect="1"/>
+          </p:cNvPicPr>
+          <p:nvPr/>
+        </p:nvPicPr>
+        <p:blipFill>
+          <a:blip r:embed="rId2">
+            <a:extLst>
+              <a:ext uri="{96DAC541-7B7A-43D3-8B79-37D633B846F1}">
+                <asvg:svgBlip xmlns:asvg="http://schemas.microsoft.com/office/drawing/2016/SVG/main" r:embed="rId3"/>
+              </a:ext>
+            </a:extLst>
+          </a:blip>
+          <a:stretch>
+            <a:fillRect/>
+          </a:stretch>
+        </p:blipFill>
+        <p:spPr>
+          <a:xfrm>
+            <a:off x="1060622" y="2144528"/>
+            <a:ext cx="1071155" cy="914400"/>
+          </a:xfrm>
+          <a:prstGeom prst="rect">
+            <a:avLst/>
+          </a:prstGeom>
+        </p:spPr>
+      </p:pic>
+      <p:pic>
+        <p:nvPicPr>
+          <p:cNvPr id="7" name="Graphic 6" descr="Image outline">
+            <a:extLst>
+              <a:ext uri="{FF2B5EF4-FFF2-40B4-BE49-F238E27FC236}">
+                <a16:creationId xmlns:a16="http://schemas.microsoft.com/office/drawing/2014/main" id="{B35E60F2-6A35-49FA-C51B-30BFC3C391A7}"/>
+              </a:ext>
+            </a:extLst>
+          </p:cNvPr>
+          <p:cNvPicPr>
+            <a:picLocks noChangeAspect="1"/>
+          </p:cNvPicPr>
+          <p:nvPr/>
+        </p:nvPicPr>
+        <p:blipFill>
+          <a:blip r:embed="rId4">
+            <a:extLst>
+              <a:ext uri="{96DAC541-7B7A-43D3-8B79-37D633B846F1}">
+                <asvg:svgBlip xmlns:asvg="http://schemas.microsoft.com/office/drawing/2016/SVG/main" r:embed="rId5"/>
+              </a:ext>
+            </a:extLst>
+          </a:blip>
+          <a:stretch>
+            <a:fillRect/>
+          </a:stretch>
+        </p:blipFill>
+        <p:spPr>
+          <a:xfrm>
+            <a:off x="2158614" y="2170881"/>
+            <a:ext cx="814451" cy="814451"/>
+          </a:xfrm>
+          <a:prstGeom prst="rect">
+            <a:avLst/>
+          </a:prstGeom>
+        </p:spPr>
+      </p:pic>
+      <p:pic>
+        <p:nvPicPr>
+          <p:cNvPr id="8" name="Graphic 7">
+            <a:extLst>
+              <a:ext uri="{FF2B5EF4-FFF2-40B4-BE49-F238E27FC236}">
+                <a16:creationId xmlns:a16="http://schemas.microsoft.com/office/drawing/2014/main" id="{7F6249D2-458B-3982-F012-9F84A172BCB6}"/>
+              </a:ext>
+            </a:extLst>
+          </p:cNvPr>
+          <p:cNvPicPr>
+            <a:picLocks noChangeAspect="1"/>
+          </p:cNvPicPr>
+          <p:nvPr/>
+        </p:nvPicPr>
+        <p:blipFill>
+          <a:blip r:embed="rId2">
+            <a:extLst>
+              <a:ext uri="{96DAC541-7B7A-43D3-8B79-37D633B846F1}">
+                <asvg:svgBlip xmlns:asvg="http://schemas.microsoft.com/office/drawing/2016/SVG/main" r:embed="rId3"/>
+              </a:ext>
+            </a:extLst>
+          </a:blip>
+          <a:stretch>
+            <a:fillRect/>
+          </a:stretch>
+        </p:blipFill>
+        <p:spPr>
+          <a:xfrm>
+            <a:off x="1060621" y="3341873"/>
+            <a:ext cx="1071155" cy="914400"/>
+          </a:xfrm>
+          <a:prstGeom prst="rect">
+            <a:avLst/>
+          </a:prstGeom>
+        </p:spPr>
+      </p:pic>
+      <p:pic>
+        <p:nvPicPr>
+          <p:cNvPr id="9" name="Graphic 8" descr="Document outline">
+            <a:extLst>
+              <a:ext uri="{FF2B5EF4-FFF2-40B4-BE49-F238E27FC236}">
+                <a16:creationId xmlns:a16="http://schemas.microsoft.com/office/drawing/2014/main" id="{4DCBA162-F3DF-2850-91B6-1A6024445917}"/>
+              </a:ext>
+            </a:extLst>
+          </p:cNvPr>
+          <p:cNvPicPr>
+            <a:picLocks noChangeAspect="1"/>
+          </p:cNvPicPr>
+          <p:nvPr/>
+        </p:nvPicPr>
+        <p:blipFill>
+          <a:blip r:embed="rId6">
+            <a:extLst>
+              <a:ext uri="{96DAC541-7B7A-43D3-8B79-37D633B846F1}">
+                <asvg:svgBlip xmlns:asvg="http://schemas.microsoft.com/office/drawing/2016/SVG/main" r:embed="rId7"/>
+              </a:ext>
+            </a:extLst>
+          </a:blip>
+          <a:stretch>
+            <a:fillRect/>
+          </a:stretch>
+        </p:blipFill>
+        <p:spPr>
+          <a:xfrm>
+            <a:off x="2241875" y="3434549"/>
+            <a:ext cx="694204" cy="694204"/>
+          </a:xfrm>
+          <a:prstGeom prst="rect">
+            <a:avLst/>
+          </a:prstGeom>
+        </p:spPr>
+      </p:pic>
+      <p:pic>
+        <p:nvPicPr>
+          <p:cNvPr id="10" name="Graphic 9">
+            <a:extLst>
+              <a:ext uri="{FF2B5EF4-FFF2-40B4-BE49-F238E27FC236}">
+                <a16:creationId xmlns:a16="http://schemas.microsoft.com/office/drawing/2014/main" id="{A205A68F-245C-A48A-3947-DE7F1C10CFDA}"/>
+              </a:ext>
+            </a:extLst>
+          </p:cNvPr>
+          <p:cNvPicPr>
+            <a:picLocks noChangeAspect="1"/>
+          </p:cNvPicPr>
+          <p:nvPr/>
+        </p:nvPicPr>
+        <p:blipFill>
+          <a:blip r:embed="rId2">
+            <a:extLst>
+              <a:ext uri="{96DAC541-7B7A-43D3-8B79-37D633B846F1}">
+                <asvg:svgBlip xmlns:asvg="http://schemas.microsoft.com/office/drawing/2016/SVG/main" r:embed="rId3"/>
+              </a:ext>
+            </a:extLst>
+          </a:blip>
+          <a:stretch>
+            <a:fillRect/>
+          </a:stretch>
+        </p:blipFill>
+        <p:spPr>
+          <a:xfrm>
+            <a:off x="1060620" y="4644712"/>
+            <a:ext cx="1071155" cy="914400"/>
+          </a:xfrm>
+          <a:prstGeom prst="rect">
+            <a:avLst/>
+          </a:prstGeom>
+        </p:spPr>
+      </p:pic>
+      <p:pic>
+        <p:nvPicPr>
+          <p:cNvPr id="11" name="Graphic 10" descr="Table outline">
+            <a:extLst>
+              <a:ext uri="{FF2B5EF4-FFF2-40B4-BE49-F238E27FC236}">
+                <a16:creationId xmlns:a16="http://schemas.microsoft.com/office/drawing/2014/main" id="{EE9D0FA8-3BE9-44E5-D9C4-5E5BFF1F456C}"/>
+              </a:ext>
+            </a:extLst>
+          </p:cNvPr>
+          <p:cNvPicPr>
+            <a:picLocks noChangeAspect="1"/>
+          </p:cNvPicPr>
+          <p:nvPr/>
+        </p:nvPicPr>
+        <p:blipFill>
+          <a:blip r:embed="rId8">
+            <a:extLst>
+              <a:ext uri="{96DAC541-7B7A-43D3-8B79-37D633B846F1}">
+                <asvg:svgBlip xmlns:asvg="http://schemas.microsoft.com/office/drawing/2016/SVG/main" r:embed="rId9"/>
+              </a:ext>
+            </a:extLst>
+          </a:blip>
+          <a:stretch>
+            <a:fillRect/>
+          </a:stretch>
+        </p:blipFill>
+        <p:spPr>
+          <a:xfrm>
+            <a:off x="2158614" y="4657863"/>
+            <a:ext cx="842711" cy="842711"/>
+          </a:xfrm>
+          <a:prstGeom prst="rect">
+            <a:avLst/>
+          </a:prstGeom>
+        </p:spPr>
+      </p:pic>
+      <p:sp>
+        <p:nvSpPr>
+          <p:cNvPr id="12" name="Rectangle 11">
+            <a:extLst>
+              <a:ext uri="{FF2B5EF4-FFF2-40B4-BE49-F238E27FC236}">
+                <a16:creationId xmlns:a16="http://schemas.microsoft.com/office/drawing/2014/main" id="{FA68802D-1051-AEFE-CE14-87D9A47AD38D}"/>
               </a:ext>
             </a:extLst>
           </p:cNvPr>
@@ -3997,8 +4128,8 @@
         </p:nvSpPr>
         <p:spPr>
           <a:xfrm>
-            <a:off x="1332471" y="3084689"/>
-            <a:ext cx="1781432" cy="704337"/>
+            <a:off x="4579240" y="2107399"/>
+            <a:ext cx="3390868" cy="3348504"/>
           </a:xfrm>
           <a:prstGeom prst="rect">
             <a:avLst/>
@@ -4027,62 +4158,24 @@
           </a:fontRef>
         </p:style>
         <p:txBody>
-          <a:bodyPr lIns="274320" rIns="274320" rtlCol="0" anchor="ctr"/>
+          <a:bodyPr rtlCol="0" anchor="ctr"/>
           <a:lstStyle/>
-          <a:p>
-            <a:pPr lvl="1" algn="ctr"/>
-            <a:r>
-              <a:rPr lang="en-US" dirty="0">
-                <a:solidFill>
-                  <a:sysClr val="windowText" lastClr="000000"/>
-                </a:solidFill>
-              </a:rPr>
-              <a:t>     </a:t>
-            </a:r>
-          </a:p>
           <a:p>
             <a:pPr algn="r"/>
             <a:endParaRPr lang="en-US" dirty="0">
               <a:solidFill>
-                <a:sysClr val="windowText" lastClr="000000"/>
+                <a:schemeClr val="tx1"/>
               </a:solidFill>
             </a:endParaRPr>
           </a:p>
-          <a:p>
-            <a:pPr algn="r"/>
-            <a:r>
-              <a:rPr lang="en-US" dirty="0">
-                <a:solidFill>
-                  <a:sysClr val="windowText" lastClr="000000"/>
-                </a:solidFill>
-              </a:rPr>
-              <a:t>Query </a:t>
-            </a:r>
-          </a:p>
-          <a:p>
-            <a:pPr algn="r"/>
-            <a:endParaRPr lang="en-US" dirty="0">
-              <a:solidFill>
-                <a:sysClr val="windowText" lastClr="000000"/>
-              </a:solidFill>
-            </a:endParaRPr>
-          </a:p>
-          <a:p>
-            <a:pPr algn="r"/>
-            <a:endParaRPr lang="en-US" dirty="0">
-              <a:solidFill>
-                <a:sysClr val="windowText" lastClr="000000"/>
-              </a:solidFill>
-            </a:endParaRPr>
-          </a:p>
         </p:txBody>
       </p:sp>
       <p:pic>
         <p:nvPicPr>
-          <p:cNvPr id="6" name="Graphic 5" descr="Questions with solid fill">
-            <a:extLst>
-              <a:ext uri="{FF2B5EF4-FFF2-40B4-BE49-F238E27FC236}">
-                <a16:creationId xmlns:a16="http://schemas.microsoft.com/office/drawing/2014/main" id="{71CD7EB0-AF0F-940A-23B4-98BE7A0E3E96}"/>
+          <p:cNvPr id="13" name="Picture 12">
+            <a:extLst>
+              <a:ext uri="{FF2B5EF4-FFF2-40B4-BE49-F238E27FC236}">
+                <a16:creationId xmlns:a16="http://schemas.microsoft.com/office/drawing/2014/main" id="{FA7CF11A-B0C0-2831-639D-B8CB79F6BAEB}"/>
               </a:ext>
             </a:extLst>
           </p:cNvPr>
@@ -4092,21 +4185,16 @@
           <p:nvPr/>
         </p:nvPicPr>
         <p:blipFill>
-          <a:blip r:embed="rId2">
-            <a:extLst>
-              <a:ext uri="{96DAC541-7B7A-43D3-8B79-37D633B846F1}">
-                <asvg:svgBlip xmlns:asvg="http://schemas.microsoft.com/office/drawing/2016/SVG/main" r:embed="rId3"/>
-              </a:ext>
-            </a:extLst>
-          </a:blip>
+          <a:blip r:embed="rId10"/>
+          <a:srcRect b="12576"/>
           <a:stretch>
             <a:fillRect/>
           </a:stretch>
         </p:blipFill>
         <p:spPr>
           <a:xfrm>
-            <a:off x="1332471" y="3084689"/>
-            <a:ext cx="720648" cy="720648"/>
+            <a:off x="4737470" y="2279527"/>
+            <a:ext cx="683058" cy="597158"/>
           </a:xfrm>
           <a:prstGeom prst="rect">
             <a:avLst/>
@@ -4115,22 +4203,22 @@
       </p:pic>
       <p:cxnSp>
         <p:nvCxnSpPr>
-          <p:cNvPr id="8" name="Straight Arrow Connector 7">
-            <a:extLst>
-              <a:ext uri="{FF2B5EF4-FFF2-40B4-BE49-F238E27FC236}">
-                <a16:creationId xmlns:a16="http://schemas.microsoft.com/office/drawing/2014/main" id="{FA3F2EDB-07B8-F060-C61C-B0ABD2C1AD99}"/>
+          <p:cNvPr id="14" name="Straight Arrow Connector 13">
+            <a:extLst>
+              <a:ext uri="{FF2B5EF4-FFF2-40B4-BE49-F238E27FC236}">
+                <a16:creationId xmlns:a16="http://schemas.microsoft.com/office/drawing/2014/main" id="{59D35FC8-304D-7422-57DA-01C838487DBD}"/>
               </a:ext>
             </a:extLst>
           </p:cNvPr>
           <p:cNvCxnSpPr>
-            <a:stCxn id="5" idx="3"/>
+            <a:cxnSpLocks/>
           </p:cNvCxnSpPr>
           <p:nvPr/>
         </p:nvCxnSpPr>
         <p:spPr>
           <a:xfrm>
-            <a:off x="3113903" y="3436858"/>
-            <a:ext cx="1235676" cy="8155"/>
+            <a:off x="2991077" y="2582562"/>
+            <a:ext cx="1588163" cy="0"/>
           </a:xfrm>
           <a:prstGeom prst="straightConnector1">
             <a:avLst/>
@@ -4154,109 +4242,24 @@
           </a:fontRef>
         </p:style>
       </p:cxnSp>
-      <p:sp>
-        <p:nvSpPr>
-          <p:cNvPr id="9" name="Rectangle 8">
-            <a:extLst>
-              <a:ext uri="{FF2B5EF4-FFF2-40B4-BE49-F238E27FC236}">
-                <a16:creationId xmlns:a16="http://schemas.microsoft.com/office/drawing/2014/main" id="{316C147A-9F5E-4A26-35F9-4EF025213D92}"/>
-              </a:ext>
-            </a:extLst>
-          </p:cNvPr>
-          <p:cNvSpPr/>
-          <p:nvPr/>
-        </p:nvSpPr>
-        <p:spPr>
-          <a:xfrm>
-            <a:off x="4349579" y="2710223"/>
-            <a:ext cx="2634676" cy="1586017"/>
-          </a:xfrm>
-          <a:prstGeom prst="rect">
-            <a:avLst/>
-          </a:prstGeom>
-          <a:noFill/>
-          <a:ln w="28575">
-            <a:solidFill>
-              <a:schemeClr val="tx1"/>
-            </a:solidFill>
-          </a:ln>
-        </p:spPr>
-        <p:style>
-          <a:lnRef idx="2">
-            <a:schemeClr val="accent1">
-              <a:shade val="15000"/>
-            </a:schemeClr>
-          </a:lnRef>
-          <a:fillRef idx="1">
-            <a:schemeClr val="accent1"/>
-          </a:fillRef>
-          <a:effectRef idx="0">
-            <a:schemeClr val="accent1"/>
-          </a:effectRef>
-          <a:fontRef idx="minor">
-            <a:schemeClr val="lt1"/>
-          </a:fontRef>
-        </p:style>
-        <p:txBody>
-          <a:bodyPr rtlCol="0" anchor="ctr"/>
-          <a:lstStyle/>
-          <a:p>
-            <a:pPr algn="r"/>
-            <a:endParaRPr lang="en-US" sz="1600" dirty="0">
-              <a:solidFill>
-                <a:sysClr val="windowText" lastClr="000000"/>
-              </a:solidFill>
-            </a:endParaRPr>
-          </a:p>
-        </p:txBody>
-      </p:sp>
-      <p:pic>
-        <p:nvPicPr>
-          <p:cNvPr id="10" name="Picture 9">
-            <a:extLst>
-              <a:ext uri="{FF2B5EF4-FFF2-40B4-BE49-F238E27FC236}">
-                <a16:creationId xmlns:a16="http://schemas.microsoft.com/office/drawing/2014/main" id="{607D7CC9-952E-6BE5-2129-F2E97C8DA4C1}"/>
-              </a:ext>
-            </a:extLst>
-          </p:cNvPr>
-          <p:cNvPicPr>
-            <a:picLocks noChangeAspect="1"/>
-          </p:cNvPicPr>
-          <p:nvPr/>
-        </p:nvPicPr>
-        <p:blipFill>
-          <a:blip r:embed="rId4"/>
-          <a:srcRect b="13873"/>
-          <a:stretch>
-            <a:fillRect/>
-          </a:stretch>
-        </p:blipFill>
-        <p:spPr>
-          <a:xfrm>
-            <a:off x="4528605" y="2839771"/>
-            <a:ext cx="702732" cy="605242"/>
-          </a:xfrm>
-          <a:prstGeom prst="rect">
-            <a:avLst/>
-          </a:prstGeom>
-        </p:spPr>
-      </p:pic>
       <p:cxnSp>
         <p:nvCxnSpPr>
-          <p:cNvPr id="11" name="Straight Arrow Connector 10">
-            <a:extLst>
-              <a:ext uri="{FF2B5EF4-FFF2-40B4-BE49-F238E27FC236}">
-                <a16:creationId xmlns:a16="http://schemas.microsoft.com/office/drawing/2014/main" id="{8B6A9AE1-F6CB-A0DE-564A-65B7708A6923}"/>
-              </a:ext>
-            </a:extLst>
-          </p:cNvPr>
-          <p:cNvCxnSpPr/>
+          <p:cNvPr id="19" name="Straight Arrow Connector 18">
+            <a:extLst>
+              <a:ext uri="{FF2B5EF4-FFF2-40B4-BE49-F238E27FC236}">
+                <a16:creationId xmlns:a16="http://schemas.microsoft.com/office/drawing/2014/main" id="{338F00EA-8FB9-8C9F-9DED-D6DA39F898B2}"/>
+              </a:ext>
+            </a:extLst>
+          </p:cNvPr>
+          <p:cNvCxnSpPr>
+            <a:cxnSpLocks/>
+          </p:cNvCxnSpPr>
           <p:nvPr/>
         </p:nvCxnSpPr>
         <p:spPr>
           <a:xfrm>
-            <a:off x="6984255" y="3445013"/>
-            <a:ext cx="1235676" cy="8155"/>
+            <a:off x="2991077" y="3797643"/>
+            <a:ext cx="1588163" cy="0"/>
           </a:xfrm>
           <a:prstGeom prst="straightConnector1">
             <a:avLst/>
@@ -4280,48 +4283,53 @@
           </a:fontRef>
         </p:style>
       </p:cxnSp>
-      <p:pic>
-        <p:nvPicPr>
-          <p:cNvPr id="12" name="Graphic 11">
-            <a:extLst>
-              <a:ext uri="{FF2B5EF4-FFF2-40B4-BE49-F238E27FC236}">
-                <a16:creationId xmlns:a16="http://schemas.microsoft.com/office/drawing/2014/main" id="{DC540DCD-AB7C-00B1-4324-1BB4B7991E7A}"/>
-              </a:ext>
-            </a:extLst>
-          </p:cNvPr>
-          <p:cNvPicPr>
-            <a:picLocks noChangeAspect="1"/>
-          </p:cNvPicPr>
-          <p:nvPr/>
-        </p:nvPicPr>
-        <p:blipFill>
-          <a:blip r:embed="rId5">
-            <a:extLst>
-              <a:ext uri="{96DAC541-7B7A-43D3-8B79-37D633B846F1}">
-                <asvg:svgBlip xmlns:asvg="http://schemas.microsoft.com/office/drawing/2016/SVG/main" r:embed="rId6"/>
-              </a:ext>
-            </a:extLst>
-          </a:blip>
-          <a:stretch>
-            <a:fillRect/>
-          </a:stretch>
-        </p:blipFill>
-        <p:spPr>
-          <a:xfrm>
-            <a:off x="8434232" y="2512217"/>
-            <a:ext cx="2204514" cy="1881902"/>
-          </a:xfrm>
-          <a:prstGeom prst="rect">
-            <a:avLst/>
-          </a:prstGeom>
-        </p:spPr>
-      </p:pic>
-      <p:sp>
-        <p:nvSpPr>
-          <p:cNvPr id="14" name="TextBox 13">
-            <a:extLst>
-              <a:ext uri="{FF2B5EF4-FFF2-40B4-BE49-F238E27FC236}">
-                <a16:creationId xmlns:a16="http://schemas.microsoft.com/office/drawing/2014/main" id="{4E94A8D2-4DAA-CFB4-E46F-AFD37AE4E522}"/>
+      <p:cxnSp>
+        <p:nvCxnSpPr>
+          <p:cNvPr id="20" name="Straight Arrow Connector 19">
+            <a:extLst>
+              <a:ext uri="{FF2B5EF4-FFF2-40B4-BE49-F238E27FC236}">
+                <a16:creationId xmlns:a16="http://schemas.microsoft.com/office/drawing/2014/main" id="{E2A104A2-0754-CC3A-9B1E-317749407ABE}"/>
+              </a:ext>
+            </a:extLst>
+          </p:cNvPr>
+          <p:cNvCxnSpPr>
+            <a:cxnSpLocks/>
+          </p:cNvCxnSpPr>
+          <p:nvPr/>
+        </p:nvCxnSpPr>
+        <p:spPr>
+          <a:xfrm>
+            <a:off x="2991077" y="5070389"/>
+            <a:ext cx="1588163" cy="0"/>
+          </a:xfrm>
+          <a:prstGeom prst="straightConnector1">
+            <a:avLst/>
+          </a:prstGeom>
+          <a:ln w="38100">
+            <a:tailEnd type="triangle"/>
+          </a:ln>
+        </p:spPr>
+        <p:style>
+          <a:lnRef idx="2">
+            <a:schemeClr val="accent1"/>
+          </a:lnRef>
+          <a:fillRef idx="0">
+            <a:schemeClr val="accent1"/>
+          </a:fillRef>
+          <a:effectRef idx="1">
+            <a:schemeClr val="accent1"/>
+          </a:effectRef>
+          <a:fontRef idx="minor">
+            <a:schemeClr val="tx1"/>
+          </a:fontRef>
+        </p:style>
+      </p:cxnSp>
+      <p:sp>
+        <p:nvSpPr>
+          <p:cNvPr id="21" name="TextBox 20">
+            <a:extLst>
+              <a:ext uri="{FF2B5EF4-FFF2-40B4-BE49-F238E27FC236}">
+                <a16:creationId xmlns:a16="http://schemas.microsoft.com/office/drawing/2014/main" id="{DD2FAA2C-7A02-42F9-3FAF-2196553023B7}"/>
               </a:ext>
             </a:extLst>
           </p:cNvPr>
@@ -4330,8 +4338,8 @@
         </p:nvSpPr>
         <p:spPr>
           <a:xfrm>
-            <a:off x="5410363" y="2987157"/>
-            <a:ext cx="1781432" cy="338554"/>
+            <a:off x="5420528" y="2358977"/>
+            <a:ext cx="1881466" cy="369332"/>
           </a:xfrm>
           <a:prstGeom prst="rect">
             <a:avLst/>
@@ -4345,23 +4353,18 @@
           <a:lstStyle/>
           <a:p>
             <a:r>
-              <a:rPr lang="en-US" sz="1600" dirty="0">
-                <a:solidFill>
-                  <a:sysClr val="windowText" lastClr="000000"/>
-                </a:solidFill>
-              </a:rPr>
-              <a:t>Embedding</a:t>
-            </a:r>
-            <a:endParaRPr lang="en-US" sz="1600" dirty="0"/>
-          </a:p>
-        </p:txBody>
-      </p:sp>
-      <p:sp>
-        <p:nvSpPr>
-          <p:cNvPr id="15" name="TextBox 14">
-            <a:extLst>
-              <a:ext uri="{FF2B5EF4-FFF2-40B4-BE49-F238E27FC236}">
-                <a16:creationId xmlns:a16="http://schemas.microsoft.com/office/drawing/2014/main" id="{614E8484-17F3-5BD6-C2A4-08513F30C0FC}"/>
+              <a:rPr lang="en-US" dirty="0"/>
+              <a:t>Vector Store</a:t>
+            </a:r>
+          </a:p>
+        </p:txBody>
+      </p:sp>
+      <p:sp>
+        <p:nvSpPr>
+          <p:cNvPr id="22" name="TextBox 21">
+            <a:extLst>
+              <a:ext uri="{FF2B5EF4-FFF2-40B4-BE49-F238E27FC236}">
+                <a16:creationId xmlns:a16="http://schemas.microsoft.com/office/drawing/2014/main" id="{811A20ED-E927-AC66-4CBA-4C38694E1E5B}"/>
               </a:ext>
             </a:extLst>
           </p:cNvPr>
@@ -4370,8 +4373,8 @@
         </p:nvSpPr>
         <p:spPr>
           <a:xfrm>
-            <a:off x="4417649" y="3530607"/>
-            <a:ext cx="2484164" cy="646331"/>
+            <a:off x="4737470" y="3058928"/>
+            <a:ext cx="3232638" cy="1754326"/>
           </a:xfrm>
           <a:prstGeom prst="rect">
             <a:avLst/>
@@ -4390,7 +4393,93 @@
             </a:pPr>
             <a:r>
               <a:rPr lang="en-US" dirty="0"/>
-              <a:t>Brings query into same space as Data</a:t>
+              <a:t>Stores vectors with corresponding content in database</a:t>
+            </a:r>
+          </a:p>
+          <a:p>
+            <a:pPr marL="285750" indent="-285750">
+              <a:buFont typeface="Arial" panose="020B0604020202020204" pitchFamily="34" charset="0"/>
+              <a:buChar char="•"/>
+            </a:pPr>
+            <a:r>
+              <a:rPr lang="en-US" dirty="0"/>
+              <a:t>Allows for Efficient Similarity Search (looks for closest neighbors) </a:t>
+            </a:r>
+          </a:p>
+        </p:txBody>
+      </p:sp>
+      <p:cxnSp>
+        <p:nvCxnSpPr>
+          <p:cNvPr id="25" name="Straight Arrow Connector 24">
+            <a:extLst>
+              <a:ext uri="{FF2B5EF4-FFF2-40B4-BE49-F238E27FC236}">
+                <a16:creationId xmlns:a16="http://schemas.microsoft.com/office/drawing/2014/main" id="{6FA5399D-1482-1D6B-3194-21B6AACCFD49}"/>
+              </a:ext>
+            </a:extLst>
+          </p:cNvPr>
+          <p:cNvCxnSpPr>
+            <a:cxnSpLocks/>
+          </p:cNvCxnSpPr>
+          <p:nvPr/>
+        </p:nvCxnSpPr>
+        <p:spPr>
+          <a:xfrm>
+            <a:off x="7970108" y="3768810"/>
+            <a:ext cx="1588163" cy="0"/>
+          </a:xfrm>
+          <a:prstGeom prst="straightConnector1">
+            <a:avLst/>
+          </a:prstGeom>
+          <a:ln w="38100">
+            <a:tailEnd type="triangle"/>
+          </a:ln>
+        </p:spPr>
+        <p:style>
+          <a:lnRef idx="2">
+            <a:schemeClr val="accent1"/>
+          </a:lnRef>
+          <a:fillRef idx="0">
+            <a:schemeClr val="accent1"/>
+          </a:fillRef>
+          <a:effectRef idx="1">
+            <a:schemeClr val="accent1"/>
+          </a:effectRef>
+          <a:fontRef idx="minor">
+            <a:schemeClr val="tx1"/>
+          </a:fontRef>
+        </p:style>
+      </p:cxnSp>
+      <p:sp>
+        <p:nvSpPr>
+          <p:cNvPr id="26" name="TextBox 25">
+            <a:extLst>
+              <a:ext uri="{FF2B5EF4-FFF2-40B4-BE49-F238E27FC236}">
+                <a16:creationId xmlns:a16="http://schemas.microsoft.com/office/drawing/2014/main" id="{B511F4C6-27B0-149D-0D17-6E0F59F59505}"/>
+              </a:ext>
+            </a:extLst>
+          </p:cNvPr>
+          <p:cNvSpPr txBox="1"/>
+          <p:nvPr/>
+        </p:nvSpPr>
+        <p:spPr>
+          <a:xfrm>
+            <a:off x="9613269" y="3341873"/>
+            <a:ext cx="2582563" cy="830997"/>
+          </a:xfrm>
+          <a:prstGeom prst="rect">
+            <a:avLst/>
+          </a:prstGeom>
+          <a:noFill/>
+        </p:spPr>
+        <p:txBody>
+          <a:bodyPr wrap="square" rtlCol="0">
+            <a:spAutoFit/>
+          </a:bodyPr>
+          <a:lstStyle/>
+          <a:p>
+            <a:r>
+              <a:rPr lang="en-US" sz="2400" dirty="0"/>
+              <a:t>Data preparation complete!</a:t>
             </a:r>
           </a:p>
         </p:txBody>
@@ -4398,7 +4487,7 @@
     </p:spTree>
     <p:extLst>
       <p:ext uri="{BB962C8B-B14F-4D97-AF65-F5344CB8AC3E}">
-        <p14:creationId xmlns:p14="http://schemas.microsoft.com/office/powerpoint/2010/main" val="4109154087"/>
+        <p14:creationId xmlns:p14="http://schemas.microsoft.com/office/powerpoint/2010/main" val="285337273"/>
       </p:ext>
     </p:extLst>
   </p:cSld>
@@ -4430,7 +4519,7 @@
           <p:cNvPr id="2" name="Title 1">
             <a:extLst>
               <a:ext uri="{FF2B5EF4-FFF2-40B4-BE49-F238E27FC236}">
-                <a16:creationId xmlns:a16="http://schemas.microsoft.com/office/drawing/2014/main" id="{2BE24D65-CA9D-FACC-8801-567627CC1A54}"/>
+                <a16:creationId xmlns:a16="http://schemas.microsoft.com/office/drawing/2014/main" id="{8128A51C-D667-1A58-AA5B-A6CE24D4DDC5}"/>
               </a:ext>
             </a:extLst>
           </p:cNvPr>
@@ -4458,7 +4547,7 @@
           <p:cNvPr id="4" name="Title 1">
             <a:extLst>
               <a:ext uri="{FF2B5EF4-FFF2-40B4-BE49-F238E27FC236}">
-                <a16:creationId xmlns:a16="http://schemas.microsoft.com/office/drawing/2014/main" id="{EF92CDC1-8A9C-1529-C6B2-24B821AACB62}"/>
+                <a16:creationId xmlns:a16="http://schemas.microsoft.com/office/drawing/2014/main" id="{BDDDD17F-14FA-36F1-E821-003A90C25272}"/>
               </a:ext>
             </a:extLst>
           </p:cNvPr>
@@ -4505,6 +4594,533 @@
           <a:p>
             <a:r>
               <a:rPr lang="en-US" sz="2800" i="1" dirty="0"/>
+              <a:t>Query Embedding</a:t>
+            </a:r>
+          </a:p>
+        </p:txBody>
+      </p:sp>
+      <p:sp>
+        <p:nvSpPr>
+          <p:cNvPr id="5" name="Rectangle 4">
+            <a:extLst>
+              <a:ext uri="{FF2B5EF4-FFF2-40B4-BE49-F238E27FC236}">
+                <a16:creationId xmlns:a16="http://schemas.microsoft.com/office/drawing/2014/main" id="{EC67C630-E44D-7C9D-76CD-14A79114EAD5}"/>
+              </a:ext>
+            </a:extLst>
+          </p:cNvPr>
+          <p:cNvSpPr/>
+          <p:nvPr/>
+        </p:nvSpPr>
+        <p:spPr>
+          <a:xfrm>
+            <a:off x="1332471" y="3084689"/>
+            <a:ext cx="1781432" cy="704337"/>
+          </a:xfrm>
+          <a:prstGeom prst="rect">
+            <a:avLst/>
+          </a:prstGeom>
+          <a:noFill/>
+          <a:ln w="28575">
+            <a:solidFill>
+              <a:schemeClr val="tx1"/>
+            </a:solidFill>
+          </a:ln>
+        </p:spPr>
+        <p:style>
+          <a:lnRef idx="2">
+            <a:schemeClr val="accent1">
+              <a:shade val="15000"/>
+            </a:schemeClr>
+          </a:lnRef>
+          <a:fillRef idx="1">
+            <a:schemeClr val="accent1"/>
+          </a:fillRef>
+          <a:effectRef idx="0">
+            <a:schemeClr val="accent1"/>
+          </a:effectRef>
+          <a:fontRef idx="minor">
+            <a:schemeClr val="lt1"/>
+          </a:fontRef>
+        </p:style>
+        <p:txBody>
+          <a:bodyPr lIns="274320" rIns="274320" rtlCol="0" anchor="ctr"/>
+          <a:lstStyle/>
+          <a:p>
+            <a:pPr lvl="1" algn="ctr"/>
+            <a:r>
+              <a:rPr lang="en-US" dirty="0">
+                <a:solidFill>
+                  <a:sysClr val="windowText" lastClr="000000"/>
+                </a:solidFill>
+              </a:rPr>
+              <a:t>     </a:t>
+            </a:r>
+          </a:p>
+          <a:p>
+            <a:pPr algn="r"/>
+            <a:endParaRPr lang="en-US" dirty="0">
+              <a:solidFill>
+                <a:sysClr val="windowText" lastClr="000000"/>
+              </a:solidFill>
+            </a:endParaRPr>
+          </a:p>
+          <a:p>
+            <a:pPr algn="r"/>
+            <a:r>
+              <a:rPr lang="en-US" dirty="0">
+                <a:solidFill>
+                  <a:sysClr val="windowText" lastClr="000000"/>
+                </a:solidFill>
+              </a:rPr>
+              <a:t>Query </a:t>
+            </a:r>
+          </a:p>
+          <a:p>
+            <a:pPr algn="r"/>
+            <a:endParaRPr lang="en-US" dirty="0">
+              <a:solidFill>
+                <a:sysClr val="windowText" lastClr="000000"/>
+              </a:solidFill>
+            </a:endParaRPr>
+          </a:p>
+          <a:p>
+            <a:pPr algn="r"/>
+            <a:endParaRPr lang="en-US" dirty="0">
+              <a:solidFill>
+                <a:sysClr val="windowText" lastClr="000000"/>
+              </a:solidFill>
+            </a:endParaRPr>
+          </a:p>
+        </p:txBody>
+      </p:sp>
+      <p:pic>
+        <p:nvPicPr>
+          <p:cNvPr id="6" name="Graphic 5" descr="Questions with solid fill">
+            <a:extLst>
+              <a:ext uri="{FF2B5EF4-FFF2-40B4-BE49-F238E27FC236}">
+                <a16:creationId xmlns:a16="http://schemas.microsoft.com/office/drawing/2014/main" id="{71CD7EB0-AF0F-940A-23B4-98BE7A0E3E96}"/>
+              </a:ext>
+            </a:extLst>
+          </p:cNvPr>
+          <p:cNvPicPr>
+            <a:picLocks noChangeAspect="1"/>
+          </p:cNvPicPr>
+          <p:nvPr/>
+        </p:nvPicPr>
+        <p:blipFill>
+          <a:blip r:embed="rId2">
+            <a:extLst>
+              <a:ext uri="{96DAC541-7B7A-43D3-8B79-37D633B846F1}">
+                <asvg:svgBlip xmlns:asvg="http://schemas.microsoft.com/office/drawing/2016/SVG/main" r:embed="rId3"/>
+              </a:ext>
+            </a:extLst>
+          </a:blip>
+          <a:stretch>
+            <a:fillRect/>
+          </a:stretch>
+        </p:blipFill>
+        <p:spPr>
+          <a:xfrm>
+            <a:off x="1332471" y="3084689"/>
+            <a:ext cx="720648" cy="720648"/>
+          </a:xfrm>
+          <a:prstGeom prst="rect">
+            <a:avLst/>
+          </a:prstGeom>
+        </p:spPr>
+      </p:pic>
+      <p:cxnSp>
+        <p:nvCxnSpPr>
+          <p:cNvPr id="8" name="Straight Arrow Connector 7">
+            <a:extLst>
+              <a:ext uri="{FF2B5EF4-FFF2-40B4-BE49-F238E27FC236}">
+                <a16:creationId xmlns:a16="http://schemas.microsoft.com/office/drawing/2014/main" id="{FA3F2EDB-07B8-F060-C61C-B0ABD2C1AD99}"/>
+              </a:ext>
+            </a:extLst>
+          </p:cNvPr>
+          <p:cNvCxnSpPr>
+            <a:stCxn id="5" idx="3"/>
+          </p:cNvCxnSpPr>
+          <p:nvPr/>
+        </p:nvCxnSpPr>
+        <p:spPr>
+          <a:xfrm>
+            <a:off x="3113903" y="3436858"/>
+            <a:ext cx="1235676" cy="8155"/>
+          </a:xfrm>
+          <a:prstGeom prst="straightConnector1">
+            <a:avLst/>
+          </a:prstGeom>
+          <a:ln w="38100">
+            <a:tailEnd type="triangle"/>
+          </a:ln>
+        </p:spPr>
+        <p:style>
+          <a:lnRef idx="2">
+            <a:schemeClr val="accent1"/>
+          </a:lnRef>
+          <a:fillRef idx="0">
+            <a:schemeClr val="accent1"/>
+          </a:fillRef>
+          <a:effectRef idx="1">
+            <a:schemeClr val="accent1"/>
+          </a:effectRef>
+          <a:fontRef idx="minor">
+            <a:schemeClr val="tx1"/>
+          </a:fontRef>
+        </p:style>
+      </p:cxnSp>
+      <p:sp>
+        <p:nvSpPr>
+          <p:cNvPr id="9" name="Rectangle 8">
+            <a:extLst>
+              <a:ext uri="{FF2B5EF4-FFF2-40B4-BE49-F238E27FC236}">
+                <a16:creationId xmlns:a16="http://schemas.microsoft.com/office/drawing/2014/main" id="{316C147A-9F5E-4A26-35F9-4EF025213D92}"/>
+              </a:ext>
+            </a:extLst>
+          </p:cNvPr>
+          <p:cNvSpPr/>
+          <p:nvPr/>
+        </p:nvSpPr>
+        <p:spPr>
+          <a:xfrm>
+            <a:off x="4349579" y="2710223"/>
+            <a:ext cx="2634676" cy="1586017"/>
+          </a:xfrm>
+          <a:prstGeom prst="rect">
+            <a:avLst/>
+          </a:prstGeom>
+          <a:noFill/>
+          <a:ln w="28575">
+            <a:solidFill>
+              <a:schemeClr val="tx1"/>
+            </a:solidFill>
+          </a:ln>
+        </p:spPr>
+        <p:style>
+          <a:lnRef idx="2">
+            <a:schemeClr val="accent1">
+              <a:shade val="15000"/>
+            </a:schemeClr>
+          </a:lnRef>
+          <a:fillRef idx="1">
+            <a:schemeClr val="accent1"/>
+          </a:fillRef>
+          <a:effectRef idx="0">
+            <a:schemeClr val="accent1"/>
+          </a:effectRef>
+          <a:fontRef idx="minor">
+            <a:schemeClr val="lt1"/>
+          </a:fontRef>
+        </p:style>
+        <p:txBody>
+          <a:bodyPr rtlCol="0" anchor="ctr"/>
+          <a:lstStyle/>
+          <a:p>
+            <a:pPr algn="r"/>
+            <a:endParaRPr lang="en-US" sz="1600" dirty="0">
+              <a:solidFill>
+                <a:sysClr val="windowText" lastClr="000000"/>
+              </a:solidFill>
+            </a:endParaRPr>
+          </a:p>
+        </p:txBody>
+      </p:sp>
+      <p:pic>
+        <p:nvPicPr>
+          <p:cNvPr id="10" name="Picture 9">
+            <a:extLst>
+              <a:ext uri="{FF2B5EF4-FFF2-40B4-BE49-F238E27FC236}">
+                <a16:creationId xmlns:a16="http://schemas.microsoft.com/office/drawing/2014/main" id="{607D7CC9-952E-6BE5-2129-F2E97C8DA4C1}"/>
+              </a:ext>
+            </a:extLst>
+          </p:cNvPr>
+          <p:cNvPicPr>
+            <a:picLocks noChangeAspect="1"/>
+          </p:cNvPicPr>
+          <p:nvPr/>
+        </p:nvPicPr>
+        <p:blipFill>
+          <a:blip r:embed="rId4"/>
+          <a:srcRect b="13873"/>
+          <a:stretch>
+            <a:fillRect/>
+          </a:stretch>
+        </p:blipFill>
+        <p:spPr>
+          <a:xfrm>
+            <a:off x="4528605" y="2839771"/>
+            <a:ext cx="702732" cy="605242"/>
+          </a:xfrm>
+          <a:prstGeom prst="rect">
+            <a:avLst/>
+          </a:prstGeom>
+        </p:spPr>
+      </p:pic>
+      <p:cxnSp>
+        <p:nvCxnSpPr>
+          <p:cNvPr id="11" name="Straight Arrow Connector 10">
+            <a:extLst>
+              <a:ext uri="{FF2B5EF4-FFF2-40B4-BE49-F238E27FC236}">
+                <a16:creationId xmlns:a16="http://schemas.microsoft.com/office/drawing/2014/main" id="{8B6A9AE1-F6CB-A0DE-564A-65B7708A6923}"/>
+              </a:ext>
+            </a:extLst>
+          </p:cNvPr>
+          <p:cNvCxnSpPr/>
+          <p:nvPr/>
+        </p:nvCxnSpPr>
+        <p:spPr>
+          <a:xfrm>
+            <a:off x="6984255" y="3445013"/>
+            <a:ext cx="1235676" cy="8155"/>
+          </a:xfrm>
+          <a:prstGeom prst="straightConnector1">
+            <a:avLst/>
+          </a:prstGeom>
+          <a:ln w="38100">
+            <a:tailEnd type="triangle"/>
+          </a:ln>
+        </p:spPr>
+        <p:style>
+          <a:lnRef idx="2">
+            <a:schemeClr val="accent1"/>
+          </a:lnRef>
+          <a:fillRef idx="0">
+            <a:schemeClr val="accent1"/>
+          </a:fillRef>
+          <a:effectRef idx="1">
+            <a:schemeClr val="accent1"/>
+          </a:effectRef>
+          <a:fontRef idx="minor">
+            <a:schemeClr val="tx1"/>
+          </a:fontRef>
+        </p:style>
+      </p:cxnSp>
+      <p:pic>
+        <p:nvPicPr>
+          <p:cNvPr id="12" name="Graphic 11">
+            <a:extLst>
+              <a:ext uri="{FF2B5EF4-FFF2-40B4-BE49-F238E27FC236}">
+                <a16:creationId xmlns:a16="http://schemas.microsoft.com/office/drawing/2014/main" id="{DC540DCD-AB7C-00B1-4324-1BB4B7991E7A}"/>
+              </a:ext>
+            </a:extLst>
+          </p:cNvPr>
+          <p:cNvPicPr>
+            <a:picLocks noChangeAspect="1"/>
+          </p:cNvPicPr>
+          <p:nvPr/>
+        </p:nvPicPr>
+        <p:blipFill>
+          <a:blip r:embed="rId5">
+            <a:extLst>
+              <a:ext uri="{96DAC541-7B7A-43D3-8B79-37D633B846F1}">
+                <asvg:svgBlip xmlns:asvg="http://schemas.microsoft.com/office/drawing/2016/SVG/main" r:embed="rId6"/>
+              </a:ext>
+            </a:extLst>
+          </a:blip>
+          <a:stretch>
+            <a:fillRect/>
+          </a:stretch>
+        </p:blipFill>
+        <p:spPr>
+          <a:xfrm>
+            <a:off x="8434232" y="2512217"/>
+            <a:ext cx="2204514" cy="1881902"/>
+          </a:xfrm>
+          <a:prstGeom prst="rect">
+            <a:avLst/>
+          </a:prstGeom>
+        </p:spPr>
+      </p:pic>
+      <p:sp>
+        <p:nvSpPr>
+          <p:cNvPr id="14" name="TextBox 13">
+            <a:extLst>
+              <a:ext uri="{FF2B5EF4-FFF2-40B4-BE49-F238E27FC236}">
+                <a16:creationId xmlns:a16="http://schemas.microsoft.com/office/drawing/2014/main" id="{4E94A8D2-4DAA-CFB4-E46F-AFD37AE4E522}"/>
+              </a:ext>
+            </a:extLst>
+          </p:cNvPr>
+          <p:cNvSpPr txBox="1"/>
+          <p:nvPr/>
+        </p:nvSpPr>
+        <p:spPr>
+          <a:xfrm>
+            <a:off x="5410363" y="2987157"/>
+            <a:ext cx="1781432" cy="338554"/>
+          </a:xfrm>
+          <a:prstGeom prst="rect">
+            <a:avLst/>
+          </a:prstGeom>
+          <a:noFill/>
+        </p:spPr>
+        <p:txBody>
+          <a:bodyPr wrap="square" rtlCol="0">
+            <a:spAutoFit/>
+          </a:bodyPr>
+          <a:lstStyle/>
+          <a:p>
+            <a:r>
+              <a:rPr lang="en-US" sz="1600" dirty="0">
+                <a:solidFill>
+                  <a:sysClr val="windowText" lastClr="000000"/>
+                </a:solidFill>
+              </a:rPr>
+              <a:t>Embedding</a:t>
+            </a:r>
+            <a:endParaRPr lang="en-US" sz="1600" dirty="0"/>
+          </a:p>
+        </p:txBody>
+      </p:sp>
+      <p:sp>
+        <p:nvSpPr>
+          <p:cNvPr id="15" name="TextBox 14">
+            <a:extLst>
+              <a:ext uri="{FF2B5EF4-FFF2-40B4-BE49-F238E27FC236}">
+                <a16:creationId xmlns:a16="http://schemas.microsoft.com/office/drawing/2014/main" id="{614E8484-17F3-5BD6-C2A4-08513F30C0FC}"/>
+              </a:ext>
+            </a:extLst>
+          </p:cNvPr>
+          <p:cNvSpPr txBox="1"/>
+          <p:nvPr/>
+        </p:nvSpPr>
+        <p:spPr>
+          <a:xfrm>
+            <a:off x="4417649" y="3530607"/>
+            <a:ext cx="2484164" cy="646331"/>
+          </a:xfrm>
+          <a:prstGeom prst="rect">
+            <a:avLst/>
+          </a:prstGeom>
+          <a:noFill/>
+        </p:spPr>
+        <p:txBody>
+          <a:bodyPr wrap="square" rtlCol="0">
+            <a:spAutoFit/>
+          </a:bodyPr>
+          <a:lstStyle/>
+          <a:p>
+            <a:pPr marL="285750" indent="-285750">
+              <a:buFont typeface="Arial" panose="020B0604020202020204" pitchFamily="34" charset="0"/>
+              <a:buChar char="•"/>
+            </a:pPr>
+            <a:r>
+              <a:rPr lang="en-US" dirty="0"/>
+              <a:t>Brings query into same space as Data</a:t>
+            </a:r>
+          </a:p>
+        </p:txBody>
+      </p:sp>
+    </p:spTree>
+    <p:extLst>
+      <p:ext uri="{BB962C8B-B14F-4D97-AF65-F5344CB8AC3E}">
+        <p14:creationId xmlns:p14="http://schemas.microsoft.com/office/powerpoint/2010/main" val="4109154087"/>
+      </p:ext>
+    </p:extLst>
+  </p:cSld>
+  <p:clrMapOvr>
+    <a:masterClrMapping/>
+  </p:clrMapOvr>
+</p:sld>
+</file>
+
+<file path=ppt/slides/slide12.xml><?xml version="1.0" encoding="utf-8"?>
+<p:sld xmlns:a="http://schemas.openxmlformats.org/drawingml/2006/main" xmlns:r="http://schemas.openxmlformats.org/officeDocument/2006/relationships" xmlns:p="http://schemas.openxmlformats.org/presentationml/2006/main">
+  <p:cSld>
+    <p:spTree>
+      <p:nvGrpSpPr>
+        <p:cNvPr id="1" name=""/>
+        <p:cNvGrpSpPr/>
+        <p:nvPr/>
+      </p:nvGrpSpPr>
+      <p:grpSpPr>
+        <a:xfrm>
+          <a:off x="0" y="0"/>
+          <a:ext cx="0" cy="0"/>
+          <a:chOff x="0" y="0"/>
+          <a:chExt cx="0" cy="0"/>
+        </a:xfrm>
+      </p:grpSpPr>
+      <p:sp>
+        <p:nvSpPr>
+          <p:cNvPr id="2" name="Title 1">
+            <a:extLst>
+              <a:ext uri="{FF2B5EF4-FFF2-40B4-BE49-F238E27FC236}">
+                <a16:creationId xmlns:a16="http://schemas.microsoft.com/office/drawing/2014/main" id="{2BE24D65-CA9D-FACC-8801-567627CC1A54}"/>
+              </a:ext>
+            </a:extLst>
+          </p:cNvPr>
+          <p:cNvSpPr>
+            <a:spLocks noGrp="1"/>
+          </p:cNvSpPr>
+          <p:nvPr>
+            <p:ph type="title"/>
+          </p:nvPr>
+        </p:nvSpPr>
+        <p:spPr/>
+        <p:txBody>
+          <a:bodyPr/>
+          <a:lstStyle/>
+          <a:p>
+            <a:r>
+              <a:rPr lang="en-US" dirty="0"/>
+              <a:t>RAG Pipeline</a:t>
+            </a:r>
+          </a:p>
+        </p:txBody>
+      </p:sp>
+      <p:sp>
+        <p:nvSpPr>
+          <p:cNvPr id="4" name="Title 1">
+            <a:extLst>
+              <a:ext uri="{FF2B5EF4-FFF2-40B4-BE49-F238E27FC236}">
+                <a16:creationId xmlns:a16="http://schemas.microsoft.com/office/drawing/2014/main" id="{EF92CDC1-8A9C-1529-C6B2-24B821AACB62}"/>
+              </a:ext>
+            </a:extLst>
+          </p:cNvPr>
+          <p:cNvSpPr txBox="1">
+            <a:spLocks/>
+          </p:cNvSpPr>
+          <p:nvPr/>
+        </p:nvSpPr>
+        <p:spPr>
+          <a:xfrm>
+            <a:off x="838200" y="874575"/>
+            <a:ext cx="10515600" cy="1325563"/>
+          </a:xfrm>
+          <a:prstGeom prst="rect">
+            <a:avLst/>
+          </a:prstGeom>
+          <a:ln>
+            <a:noFill/>
+          </a:ln>
+        </p:spPr>
+        <p:txBody>
+          <a:bodyPr vert="horz" lIns="91440" tIns="45720" rIns="91440" bIns="45720" rtlCol="0" anchor="ctr">
+            <a:normAutofit/>
+          </a:bodyPr>
+          <a:lstStyle>
+            <a:lvl1pPr algn="l" defTabSz="914400" rtl="0" eaLnBrk="1" latinLnBrk="0" hangingPunct="1">
+              <a:lnSpc>
+                <a:spcPct val="90000"/>
+              </a:lnSpc>
+              <a:spcBef>
+                <a:spcPct val="0"/>
+              </a:spcBef>
+              <a:buNone/>
+              <a:defRPr sz="4400" kern="1200">
+                <a:solidFill>
+                  <a:schemeClr val="tx1"/>
+                </a:solidFill>
+                <a:latin typeface="+mj-lt"/>
+                <a:ea typeface="+mj-ea"/>
+                <a:cs typeface="+mj-cs"/>
+              </a:defRPr>
+            </a:lvl1pPr>
+          </a:lstStyle>
+          <a:p>
+            <a:r>
+              <a:rPr lang="en-US" sz="2800" i="1" dirty="0"/>
               <a:t>Retrieval</a:t>
             </a:r>
           </a:p>
@@ -5163,7 +5779,7 @@
 </p:sld>
 </file>
 
-<file path=ppt/slides/slide12.xml><?xml version="1.0" encoding="utf-8"?>
+<file path=ppt/slides/slide13.xml><?xml version="1.0" encoding="utf-8"?>
 <p:sld xmlns:a="http://schemas.openxmlformats.org/drawingml/2006/main" xmlns:r="http://schemas.openxmlformats.org/officeDocument/2006/relationships" xmlns:p="http://schemas.openxmlformats.org/presentationml/2006/main">
   <p:cSld>
     <p:spTree>
@@ -6085,7 +6701,7 @@
           <p:cNvPr id="2" name="Title 1">
             <a:extLst>
               <a:ext uri="{FF2B5EF4-FFF2-40B4-BE49-F238E27FC236}">
-                <a16:creationId xmlns:a16="http://schemas.microsoft.com/office/drawing/2014/main" id="{007A5CDF-0A67-7CFD-EE19-FB41A3539446}"/>
+                <a16:creationId xmlns:a16="http://schemas.microsoft.com/office/drawing/2014/main" id="{1E72551B-B6FA-4385-7168-0CE79509FCAF}"/>
               </a:ext>
             </a:extLst>
           </p:cNvPr>
@@ -6113,7 +6729,7 @@
           <p:cNvPr id="3" name="Content Placeholder 2">
             <a:extLst>
               <a:ext uri="{FF2B5EF4-FFF2-40B4-BE49-F238E27FC236}">
-                <a16:creationId xmlns:a16="http://schemas.microsoft.com/office/drawing/2014/main" id="{49A83AFE-8451-B5F1-3660-B7EA8C8E2700}"/>
+                <a16:creationId xmlns:a16="http://schemas.microsoft.com/office/drawing/2014/main" id="{C681E477-B696-7565-A8AD-C45966B05818}"/>
               </a:ext>
             </a:extLst>
           </p:cNvPr>
@@ -6136,37 +6752,95 @@
             </a:pPr>
             <a:r>
               <a:rPr lang="en-US" sz="2400" i="1" dirty="0"/>
-              <a:t>2023-2024</a:t>
+              <a:t>2018-2020</a:t>
             </a:r>
             <a:r>
               <a:rPr lang="en-US" sz="2400" dirty="0"/>
-              <a:t> Tool Use &amp; Function Calling</a:t>
+              <a:t> Foundation Models</a:t>
             </a:r>
           </a:p>
           <a:p>
             <a:pPr lvl="1"/>
             <a:r>
               <a:rPr lang="en-US" sz="2000" dirty="0"/>
-              <a:t>LLMs can call APIs, run code, search web, access databases</a:t>
+              <a:t>GPT-2 , Bert, T5 </a:t>
             </a:r>
           </a:p>
           <a:p>
             <a:pPr lvl="1"/>
             <a:r>
+              <a:rPr lang="en-US" sz="2000" dirty="0"/>
+              <a:t>No instruction-following, limited practical use</a:t>
+            </a:r>
+          </a:p>
+          <a:p>
+            <a:pPr marL="0" indent="0">
+              <a:buNone/>
+            </a:pPr>
+            <a:r>
+              <a:rPr lang="en-US" sz="2400" i="1" dirty="0"/>
+              <a:t>2021-2022</a:t>
+            </a:r>
+            <a:r>
+              <a:rPr lang="en-US" sz="2400" dirty="0"/>
+              <a:t> Instruction Tuning and Finetuning</a:t>
+            </a:r>
+          </a:p>
+          <a:p>
+            <a:pPr lvl="1"/>
+            <a:r>
+              <a:rPr lang="en-US" sz="2000" dirty="0"/>
+              <a:t>GPT-3, </a:t>
+            </a:r>
+            <a:r>
               <a:rPr lang="en-US" sz="2000" dirty="0" err="1"/>
-              <a:t>ReAct</a:t>
+              <a:t>InstructGPT</a:t>
             </a:r>
             <a:r>
               <a:rPr lang="en-US" sz="2000" dirty="0"/>
-              <a:t>, </a:t>
-            </a:r>
-            <a:r>
-              <a:rPr lang="en-US" sz="2000" dirty="0" err="1"/>
-              <a:t>LangChain</a:t>
-            </a:r>
+              <a:t>, FLAN</a:t>
+            </a:r>
+          </a:p>
+          <a:p>
+            <a:pPr lvl="1"/>
             <a:r>
               <a:rPr lang="en-US" sz="2000" dirty="0"/>
-              <a:t>, OpenAI tools enable multi-modal actions</a:t>
+              <a:t>Finetuned to follow user instructions and complete specific tasks</a:t>
+            </a:r>
+          </a:p>
+          <a:p>
+            <a:pPr lvl="1"/>
+            <a:r>
+              <a:rPr lang="en-US" sz="2000" dirty="0"/>
+              <a:t>Specialized models (e.g., legal, medical, finance)</a:t>
+            </a:r>
+            <a:endParaRPr lang="en-US" sz="2400" dirty="0"/>
+          </a:p>
+          <a:p>
+            <a:pPr marL="0" indent="0">
+              <a:buNone/>
+            </a:pPr>
+            <a:r>
+              <a:rPr lang="en-US" sz="2400" i="1" dirty="0"/>
+              <a:t>2022-2023</a:t>
+            </a:r>
+            <a:r>
+              <a:rPr lang="en-US" sz="2400" dirty="0"/>
+              <a:t> RAG</a:t>
+            </a:r>
+          </a:p>
+          <a:p>
+            <a:pPr lvl="1"/>
+            <a:r>
+              <a:rPr lang="en-US" sz="2000" dirty="0"/>
+              <a:t>Combine LLMs with external knowledge via vector search</a:t>
+            </a:r>
+          </a:p>
+          <a:p>
+            <a:pPr lvl="1"/>
+            <a:r>
+              <a:rPr lang="en-US" sz="2000" dirty="0"/>
+              <a:t>Popular for document QA, search, internal knowledge bots</a:t>
             </a:r>
           </a:p>
           <a:p>
@@ -6175,73 +6849,12 @@
             </a:pPr>
             <a:endParaRPr lang="en-US" sz="2400" dirty="0"/>
           </a:p>
-          <a:p>
-            <a:pPr marL="0" indent="0">
-              <a:buNone/>
-            </a:pPr>
-            <a:r>
-              <a:rPr lang="en-US" sz="2400" i="1" dirty="0"/>
-              <a:t>2024-Present</a:t>
-            </a:r>
-            <a:r>
-              <a:rPr lang="en-US" sz="2400" dirty="0"/>
-              <a:t> Agentic AI</a:t>
-            </a:r>
-          </a:p>
-          <a:p>
-            <a:pPr lvl="1"/>
-            <a:r>
-              <a:rPr lang="en-US" sz="2000" dirty="0"/>
-              <a:t>LLMs as autonomous agents with planning, memory, multi-step reasoning</a:t>
-            </a:r>
-          </a:p>
-          <a:p>
-            <a:pPr lvl="1"/>
-            <a:r>
-              <a:rPr lang="en-US" sz="2000" dirty="0"/>
-              <a:t>Frameworks like </a:t>
-            </a:r>
-            <a:r>
-              <a:rPr lang="en-US" sz="2000" dirty="0" err="1"/>
-              <a:t>AutoGen</a:t>
-            </a:r>
-            <a:r>
-              <a:rPr lang="en-US" sz="2000" dirty="0"/>
-              <a:t>, </a:t>
-            </a:r>
-            <a:r>
-              <a:rPr lang="en-US" sz="2000" dirty="0" err="1"/>
-              <a:t>CrewAI</a:t>
-            </a:r>
-            <a:r>
-              <a:rPr lang="en-US" sz="2000" dirty="0"/>
-              <a:t>, </a:t>
-            </a:r>
-            <a:r>
-              <a:rPr lang="en-US" sz="2000" dirty="0" err="1"/>
-              <a:t>LangGraph</a:t>
-            </a:r>
-            <a:endParaRPr lang="en-US" sz="2000" dirty="0"/>
-          </a:p>
-          <a:p>
-            <a:pPr lvl="1"/>
-            <a:r>
-              <a:rPr lang="en-US" sz="2000" dirty="0"/>
-              <a:t>Personalized assistants, workflow automation, long-context reasoning</a:t>
-            </a:r>
-          </a:p>
-          <a:p>
-            <a:pPr marL="0" indent="0">
-              <a:buNone/>
-            </a:pPr>
-            <a:endParaRPr lang="en-US" sz="2400" dirty="0"/>
-          </a:p>
         </p:txBody>
       </p:sp>
     </p:spTree>
     <p:extLst>
       <p:ext uri="{BB962C8B-B14F-4D97-AF65-F5344CB8AC3E}">
-        <p14:creationId xmlns:p14="http://schemas.microsoft.com/office/powerpoint/2010/main" val="1203026021"/>
+        <p14:creationId xmlns:p14="http://schemas.microsoft.com/office/powerpoint/2010/main" val="3497965053"/>
       </p:ext>
     </p:extLst>
   </p:cSld>
@@ -6273,7 +6886,7 @@
           <p:cNvPr id="2" name="Title 1">
             <a:extLst>
               <a:ext uri="{FF2B5EF4-FFF2-40B4-BE49-F238E27FC236}">
-                <a16:creationId xmlns:a16="http://schemas.microsoft.com/office/drawing/2014/main" id="{59D79E6C-2957-9FCE-FBD0-5B8D736453E6}"/>
+                <a16:creationId xmlns:a16="http://schemas.microsoft.com/office/drawing/2014/main" id="{007A5CDF-0A67-7CFD-EE19-FB41A3539446}"/>
               </a:ext>
             </a:extLst>
           </p:cNvPr>
@@ -6291,7 +6904,7 @@
           <a:p>
             <a:r>
               <a:rPr lang="en-US" dirty="0"/>
-              <a:t>Finetuning LLMs</a:t>
+              <a:t>Brief History</a:t>
             </a:r>
           </a:p>
         </p:txBody>
@@ -6301,7 +6914,7 @@
           <p:cNvPr id="3" name="Content Placeholder 2">
             <a:extLst>
               <a:ext uri="{FF2B5EF4-FFF2-40B4-BE49-F238E27FC236}">
-                <a16:creationId xmlns:a16="http://schemas.microsoft.com/office/drawing/2014/main" id="{01E67766-3FC4-2947-BCCB-C271EA7AFE5C}"/>
+                <a16:creationId xmlns:a16="http://schemas.microsoft.com/office/drawing/2014/main" id="{49A83AFE-8451-B5F1-3660-B7EA8C8E2700}"/>
               </a:ext>
             </a:extLst>
           </p:cNvPr>
@@ -6315,7 +6928,7 @@
         <p:spPr/>
         <p:txBody>
           <a:bodyPr>
-            <a:normAutofit fontScale="92500" lnSpcReduction="20000"/>
+            <a:normAutofit/>
           </a:bodyPr>
           <a:lstStyle/>
           <a:p>
@@ -6323,60 +6936,44 @@
               <a:buNone/>
             </a:pPr>
             <a:r>
-              <a:rPr lang="en-US" dirty="0"/>
-              <a:t>Finetuning:  </a:t>
-            </a:r>
-            <a:r>
-              <a:rPr lang="en-US" i="1" dirty="0"/>
-              <a:t>Process of adapting pretrained LLM to perform better on specific task or domain</a:t>
+              <a:rPr lang="en-US" sz="2400" i="1" dirty="0"/>
+              <a:t>2023-2024</a:t>
+            </a:r>
+            <a:r>
+              <a:rPr lang="en-US" sz="2400" dirty="0"/>
+              <a:t> Tool Use &amp; Function Calling</a:t>
+            </a:r>
+          </a:p>
+          <a:p>
+            <a:pPr lvl="1"/>
+            <a:r>
+              <a:rPr lang="en-US" sz="2000" dirty="0"/>
+              <a:t>LLMs can call APIs, run code, search web, access databases</a:t>
+            </a:r>
+          </a:p>
+          <a:p>
+            <a:pPr lvl="1"/>
+            <a:r>
+              <a:rPr lang="en-US" sz="2000" dirty="0" err="1"/>
+              <a:t>ReAct</a:t>
+            </a:r>
+            <a:r>
+              <a:rPr lang="en-US" sz="2000" dirty="0"/>
+              <a:t>, </a:t>
+            </a:r>
+            <a:r>
+              <a:rPr lang="en-US" sz="2000" dirty="0" err="1"/>
+              <a:t>LangChain</a:t>
+            </a:r>
+            <a:r>
+              <a:rPr lang="en-US" sz="2000" dirty="0"/>
+              <a:t>, OpenAI tools enable multi-modal actions</a:t>
             </a:r>
           </a:p>
           <a:p>
             <a:pPr marL="0" indent="0">
               <a:buNone/>
             </a:pPr>
-            <a:endParaRPr lang="en-US" i="1" dirty="0"/>
-          </a:p>
-          <a:p>
-            <a:r>
-              <a:rPr lang="en-US" sz="2400" dirty="0"/>
-              <a:t>Involves updating model's weights using a very large amount of labeled, task-specific data</a:t>
-            </a:r>
-          </a:p>
-          <a:p>
-            <a:r>
-              <a:rPr lang="en-US" sz="2400" dirty="0"/>
-              <a:t>Can significantly improve performance on specific, well-defined problems (Legal Contracts, Biomedical QA etc.) but with downsides:</a:t>
-            </a:r>
-          </a:p>
-          <a:p>
-            <a:pPr lvl="1"/>
-            <a:r>
-              <a:rPr lang="en-US" sz="2000" dirty="0"/>
-              <a:t>Requires significant resources</a:t>
-            </a:r>
-          </a:p>
-          <a:p>
-            <a:pPr lvl="1"/>
-            <a:r>
-              <a:rPr lang="en-US" sz="2000" dirty="0"/>
-              <a:t>Careful data preparation</a:t>
-            </a:r>
-          </a:p>
-          <a:p>
-            <a:pPr lvl="1"/>
-            <a:r>
-              <a:rPr lang="en-US" sz="2000" dirty="0"/>
-              <a:t>Expensive to maintain</a:t>
-            </a:r>
-          </a:p>
-          <a:p>
-            <a:r>
-              <a:rPr lang="en-US" sz="2400" dirty="0"/>
-              <a:t>Not ideal for document specific tasks (extracting info out of a single PDF)</a:t>
-            </a:r>
-          </a:p>
-          <a:p>
             <a:endParaRPr lang="en-US" sz="2400" dirty="0"/>
           </a:p>
           <a:p>
@@ -6384,16 +6981,68 @@
               <a:buNone/>
             </a:pPr>
             <a:r>
-              <a:rPr lang="en-US" dirty="0"/>
-              <a:t>Is there an easier way?</a:t>
-            </a:r>
+              <a:rPr lang="en-US" sz="2400" i="1" dirty="0"/>
+              <a:t>2024-Present</a:t>
+            </a:r>
+            <a:r>
+              <a:rPr lang="en-US" sz="2400" dirty="0"/>
+              <a:t> Agentic AI</a:t>
+            </a:r>
+          </a:p>
+          <a:p>
+            <a:pPr lvl="1"/>
+            <a:r>
+              <a:rPr lang="en-US" sz="2000" dirty="0"/>
+              <a:t>LLMs as autonomous agents with planning, memory, multi-step reasoning</a:t>
+            </a:r>
+          </a:p>
+          <a:p>
+            <a:pPr lvl="1"/>
+            <a:r>
+              <a:rPr lang="en-US" sz="2000" dirty="0"/>
+              <a:t>Frameworks like </a:t>
+            </a:r>
+            <a:r>
+              <a:rPr lang="en-US" sz="2000" dirty="0" err="1"/>
+              <a:t>AutoGen</a:t>
+            </a:r>
+            <a:r>
+              <a:rPr lang="en-US" sz="2000" dirty="0"/>
+              <a:t>, </a:t>
+            </a:r>
+            <a:r>
+              <a:rPr lang="en-US" sz="2000" dirty="0" err="1"/>
+              <a:t>CrewAI</a:t>
+            </a:r>
+            <a:r>
+              <a:rPr lang="en-US" sz="2000" dirty="0"/>
+              <a:t>, </a:t>
+            </a:r>
+            <a:r>
+              <a:rPr lang="en-US" sz="2000" dirty="0" err="1"/>
+              <a:t>LangGraph</a:t>
+            </a:r>
+            <a:endParaRPr lang="en-US" sz="2000" dirty="0"/>
+          </a:p>
+          <a:p>
+            <a:pPr lvl="1"/>
+            <a:r>
+              <a:rPr lang="en-US" sz="2000" dirty="0"/>
+              <a:t>Personalized assistants, workflow automation, long-context reasoning</a:t>
+            </a:r>
+          </a:p>
+          <a:p>
+            <a:pPr marL="0" indent="0">
+              <a:buNone/>
+            </a:pPr>
+            <a:endParaRPr lang="en-US" sz="2400" dirty="0"/>
           </a:p>
         </p:txBody>
       </p:sp>
     </p:spTree>
     <p:extLst>
       <p:ext uri="{BB962C8B-B14F-4D97-AF65-F5344CB8AC3E}">
-        <p14:creationId xmlns:p14="http://schemas.microsoft.com/office/powerpoint/2010/main" val="561103816"/>
+        <p14:creationId xmlns:p14="http://schemas.microsoft.com/office/powerpoint/2010/main" val="1203026021"/>
       </p:ext>
     </p:extLst>
   </p:cSld>
@@ -6425,7 +7074,7 @@
           <p:cNvPr id="2" name="Title 1">
             <a:extLst>
               <a:ext uri="{FF2B5EF4-FFF2-40B4-BE49-F238E27FC236}">
-                <a16:creationId xmlns:a16="http://schemas.microsoft.com/office/drawing/2014/main" id="{95BE6493-E509-1FFD-F875-F200446A868D}"/>
+                <a16:creationId xmlns:a16="http://schemas.microsoft.com/office/drawing/2014/main" id="{59D79E6C-2957-9FCE-FBD0-5B8D736453E6}"/>
               </a:ext>
             </a:extLst>
           </p:cNvPr>
@@ -6443,7 +7092,7 @@
           <a:p>
             <a:r>
               <a:rPr lang="en-US" dirty="0"/>
-              <a:t>RAG - ‘Retrieval Augmented Generation’</a:t>
+              <a:t>Finetuning LLMs</a:t>
             </a:r>
           </a:p>
         </p:txBody>
@@ -6453,7 +7102,7 @@
           <p:cNvPr id="3" name="Content Placeholder 2">
             <a:extLst>
               <a:ext uri="{FF2B5EF4-FFF2-40B4-BE49-F238E27FC236}">
-                <a16:creationId xmlns:a16="http://schemas.microsoft.com/office/drawing/2014/main" id="{41E5BB00-1571-D4F4-2656-4AC4AA959AA7}"/>
+                <a16:creationId xmlns:a16="http://schemas.microsoft.com/office/drawing/2014/main" id="{01E67766-3FC4-2947-BCCB-C271EA7AFE5C}"/>
               </a:ext>
             </a:extLst>
           </p:cNvPr>
@@ -6466,7 +7115,9 @@
         </p:nvSpPr>
         <p:spPr/>
         <p:txBody>
-          <a:bodyPr/>
+          <a:bodyPr>
+            <a:normAutofit fontScale="92500" lnSpcReduction="20000"/>
+          </a:bodyPr>
           <a:lstStyle/>
           <a:p>
             <a:pPr marL="0" indent="0">
@@ -6474,72 +7125,76 @@
             </a:pPr>
             <a:r>
               <a:rPr lang="en-US" dirty="0"/>
-              <a:t>RAG: Combines the Strengths of LLMs with external data sourcing</a:t>
-            </a:r>
-          </a:p>
-          <a:p>
-            <a:r>
-              <a:rPr lang="en-US" sz="2400" dirty="0"/>
-              <a:t>Instead of finetuning, RAG adds all relevant information from the documents (or databases/APIs) into the prompt.</a:t>
-            </a:r>
-          </a:p>
-          <a:p>
-            <a:r>
-              <a:rPr lang="en-US" sz="2400" dirty="0"/>
-              <a:t>Addresses key limitations of LLMs like outdated knowledge and hallucination</a:t>
+              <a:t>Finetuning:  </a:t>
+            </a:r>
+            <a:r>
+              <a:rPr lang="en-US" i="1" dirty="0"/>
+              <a:t>Process of adapting pretrained LLM to perform better on specific task or domain</a:t>
             </a:r>
           </a:p>
           <a:p>
             <a:pPr marL="0" indent="0">
               <a:buNone/>
             </a:pPr>
+            <a:endParaRPr lang="en-US" i="1" dirty="0"/>
+          </a:p>
+          <a:p>
+            <a:r>
+              <a:rPr lang="en-US" sz="2400" dirty="0"/>
+              <a:t>Involves updating model's weights using a very large amount of labeled, task-specific data</a:t>
+            </a:r>
+          </a:p>
+          <a:p>
+            <a:r>
+              <a:rPr lang="en-US" sz="2400" dirty="0"/>
+              <a:t>Can significantly improve performance on specific, well-defined problems (Legal Contracts, Biomedical QA etc.) but with downsides:</a:t>
+            </a:r>
+          </a:p>
+          <a:p>
+            <a:pPr lvl="1"/>
+            <a:r>
+              <a:rPr lang="en-US" sz="2000" dirty="0"/>
+              <a:t>Requires significant resources</a:t>
+            </a:r>
+          </a:p>
+          <a:p>
+            <a:pPr lvl="1"/>
+            <a:r>
+              <a:rPr lang="en-US" sz="2000" dirty="0"/>
+              <a:t>Careful data preparation</a:t>
+            </a:r>
+          </a:p>
+          <a:p>
+            <a:pPr lvl="1"/>
+            <a:r>
+              <a:rPr lang="en-US" sz="2000" dirty="0"/>
+              <a:t>Expensive to maintain</a:t>
+            </a:r>
+          </a:p>
+          <a:p>
+            <a:r>
+              <a:rPr lang="en-US" sz="2400" dirty="0"/>
+              <a:t>Not ideal for document specific tasks (extracting info out of a single PDF)</a:t>
+            </a:r>
+          </a:p>
+          <a:p>
             <a:endParaRPr lang="en-US" sz="2400" dirty="0"/>
-          </a:p>
-          <a:p>
-            <a:r>
-              <a:rPr lang="en-US" sz="2400" dirty="0"/>
-              <a:t>Benefits:</a:t>
-            </a:r>
-          </a:p>
-          <a:p>
-            <a:pPr lvl="1"/>
-            <a:r>
-              <a:rPr lang="en-US" sz="2000" dirty="0"/>
-              <a:t>No need for finetuning and associated costs (labeling/compute)</a:t>
-            </a:r>
-          </a:p>
-          <a:p>
-            <a:pPr lvl="1"/>
-            <a:r>
-              <a:rPr lang="en-US" sz="2000" dirty="0"/>
-              <a:t>Much faster</a:t>
-            </a:r>
-          </a:p>
-          <a:p>
-            <a:pPr lvl="1"/>
-            <a:r>
-              <a:rPr lang="en-US" sz="2000" dirty="0"/>
-              <a:t>Allows for flexibility and relevance at runtime.</a:t>
-            </a:r>
           </a:p>
           <a:p>
             <a:pPr marL="0" indent="0">
               <a:buNone/>
             </a:pPr>
-            <a:endParaRPr lang="en-US" dirty="0"/>
-          </a:p>
-          <a:p>
-            <a:pPr marL="0" indent="0">
-              <a:buNone/>
-            </a:pPr>
-            <a:endParaRPr lang="en-US" dirty="0"/>
+            <a:r>
+              <a:rPr lang="en-US" dirty="0"/>
+              <a:t>Is there an easier way?</a:t>
+            </a:r>
           </a:p>
         </p:txBody>
       </p:sp>
     </p:spTree>
     <p:extLst>
       <p:ext uri="{BB962C8B-B14F-4D97-AF65-F5344CB8AC3E}">
-        <p14:creationId xmlns:p14="http://schemas.microsoft.com/office/powerpoint/2010/main" val="1449021149"/>
+        <p14:creationId xmlns:p14="http://schemas.microsoft.com/office/powerpoint/2010/main" val="561103816"/>
       </p:ext>
     </p:extLst>
   </p:cSld>
@@ -6571,7 +7226,7 @@
           <p:cNvPr id="2" name="Title 1">
             <a:extLst>
               <a:ext uri="{FF2B5EF4-FFF2-40B4-BE49-F238E27FC236}">
-                <a16:creationId xmlns:a16="http://schemas.microsoft.com/office/drawing/2014/main" id="{2D68AB46-0E26-B99E-03D4-B720F6AD3C90}"/>
+                <a16:creationId xmlns:a16="http://schemas.microsoft.com/office/drawing/2014/main" id="{95BE6493-E509-1FFD-F875-F200446A868D}"/>
               </a:ext>
             </a:extLst>
           </p:cNvPr>
@@ -6588,1777 +7243,104 @@
           <a:lstStyle/>
           <a:p>
             <a:r>
-              <a:rPr lang="en-US" dirty="0">
-                <a:solidFill>
-                  <a:sysClr val="windowText" lastClr="000000"/>
-                </a:solidFill>
-              </a:rPr>
-              <a:t>RAG Overview:</a:t>
-            </a:r>
-          </a:p>
-        </p:txBody>
-      </p:sp>
-      <p:sp>
-        <p:nvSpPr>
-          <p:cNvPr id="4" name="Rectangle 3">
-            <a:extLst>
-              <a:ext uri="{FF2B5EF4-FFF2-40B4-BE49-F238E27FC236}">
-                <a16:creationId xmlns:a16="http://schemas.microsoft.com/office/drawing/2014/main" id="{A9580D6B-63AD-FB87-7AA2-2588F83271B2}"/>
-              </a:ext>
-            </a:extLst>
-          </p:cNvPr>
-          <p:cNvSpPr/>
-          <p:nvPr/>
-        </p:nvSpPr>
-        <p:spPr>
-          <a:xfrm>
-            <a:off x="3180742" y="5612343"/>
-            <a:ext cx="2087929" cy="440266"/>
-          </a:xfrm>
-          <a:prstGeom prst="rect">
-            <a:avLst/>
-          </a:prstGeom>
-          <a:noFill/>
-          <a:ln w="28575">
-            <a:noFill/>
-          </a:ln>
-        </p:spPr>
-        <p:style>
-          <a:lnRef idx="2">
-            <a:schemeClr val="accent1">
-              <a:shade val="15000"/>
-            </a:schemeClr>
-          </a:lnRef>
-          <a:fillRef idx="1">
-            <a:schemeClr val="accent1"/>
-          </a:fillRef>
-          <a:effectRef idx="0">
-            <a:schemeClr val="accent1"/>
-          </a:effectRef>
-          <a:fontRef idx="minor">
-            <a:schemeClr val="lt1"/>
-          </a:fontRef>
-        </p:style>
-        <p:txBody>
-          <a:bodyPr rtlCol="0" anchor="ctr"/>
+              <a:rPr lang="en-US" dirty="0"/>
+              <a:t>RAG - ‘Retrieval Augmented Generation’</a:t>
+            </a:r>
+          </a:p>
+        </p:txBody>
+      </p:sp>
+      <p:sp>
+        <p:nvSpPr>
+          <p:cNvPr id="3" name="Content Placeholder 2">
+            <a:extLst>
+              <a:ext uri="{FF2B5EF4-FFF2-40B4-BE49-F238E27FC236}">
+                <a16:creationId xmlns:a16="http://schemas.microsoft.com/office/drawing/2014/main" id="{41E5BB00-1571-D4F4-2656-4AC4AA959AA7}"/>
+              </a:ext>
+            </a:extLst>
+          </p:cNvPr>
+          <p:cNvSpPr>
+            <a:spLocks noGrp="1"/>
+          </p:cNvSpPr>
+          <p:nvPr>
+            <p:ph idx="1"/>
+          </p:nvPr>
+        </p:nvSpPr>
+        <p:spPr/>
+        <p:txBody>
+          <a:bodyPr/>
           <a:lstStyle/>
           <a:p>
-            <a:pPr algn="ctr"/>
-            <a:r>
-              <a:rPr lang="en-US" i="1" dirty="0">
-                <a:solidFill>
-                  <a:sysClr val="windowText" lastClr="000000"/>
-                </a:solidFill>
-              </a:rPr>
-              <a:t>Data Preparation</a:t>
-            </a:r>
-          </a:p>
-        </p:txBody>
-      </p:sp>
-      <p:sp>
-        <p:nvSpPr>
-          <p:cNvPr id="5" name="Rectangle 4">
-            <a:extLst>
-              <a:ext uri="{FF2B5EF4-FFF2-40B4-BE49-F238E27FC236}">
-                <a16:creationId xmlns:a16="http://schemas.microsoft.com/office/drawing/2014/main" id="{CCC61D8B-4BE5-1E62-0551-6693BB460F3C}"/>
-              </a:ext>
-            </a:extLst>
-          </p:cNvPr>
-          <p:cNvSpPr/>
-          <p:nvPr/>
-        </p:nvSpPr>
-        <p:spPr>
-          <a:xfrm>
-            <a:off x="838201" y="4736041"/>
-            <a:ext cx="1871118" cy="1006123"/>
-          </a:xfrm>
-          <a:prstGeom prst="rect">
-            <a:avLst/>
-          </a:prstGeom>
-          <a:noFill/>
-          <a:ln>
-            <a:solidFill>
-              <a:schemeClr val="tx1"/>
-            </a:solidFill>
-          </a:ln>
-        </p:spPr>
-        <p:style>
-          <a:lnRef idx="2">
-            <a:schemeClr val="accent1">
-              <a:shade val="15000"/>
-            </a:schemeClr>
-          </a:lnRef>
-          <a:fillRef idx="1">
-            <a:schemeClr val="accent1"/>
-          </a:fillRef>
-          <a:effectRef idx="0">
-            <a:schemeClr val="accent1"/>
-          </a:effectRef>
-          <a:fontRef idx="minor">
-            <a:schemeClr val="lt1"/>
-          </a:fontRef>
-        </p:style>
-        <p:txBody>
-          <a:bodyPr rtlCol="0" anchor="ctr"/>
-          <a:lstStyle/>
-          <a:p>
-            <a:pPr algn="r"/>
-            <a:r>
-              <a:rPr lang="en-US" sz="1600" dirty="0">
-                <a:solidFill>
-                  <a:sysClr val="windowText" lastClr="000000"/>
-                </a:solidFill>
-              </a:rPr>
-              <a:t>Raw Data</a:t>
-            </a:r>
-          </a:p>
-          <a:p>
-            <a:pPr algn="r"/>
-            <a:r>
-              <a:rPr lang="en-US" sz="1600" dirty="0">
-                <a:solidFill>
-                  <a:sysClr val="windowText" lastClr="000000"/>
-                </a:solidFill>
-              </a:rPr>
-              <a:t>Sources</a:t>
-            </a:r>
-          </a:p>
-        </p:txBody>
-      </p:sp>
-      <p:pic>
-        <p:nvPicPr>
-          <p:cNvPr id="1026" name="Picture 2" descr="Raw-Data Icons - Free SVG &amp; PNG Raw-Data Images - Noun Project">
-            <a:extLst>
-              <a:ext uri="{FF2B5EF4-FFF2-40B4-BE49-F238E27FC236}">
-                <a16:creationId xmlns:a16="http://schemas.microsoft.com/office/drawing/2014/main" id="{046C2B26-D1A9-9C16-DBF5-0994E33D5BA5}"/>
-              </a:ext>
-            </a:extLst>
-          </p:cNvPr>
-          <p:cNvPicPr>
-            <a:picLocks noChangeAspect="1" noChangeArrowheads="1"/>
-          </p:cNvPicPr>
-          <p:nvPr/>
-        </p:nvPicPr>
-        <p:blipFill>
-          <a:blip r:embed="rId2">
-            <a:extLst>
-              <a:ext uri="{28A0092B-C50C-407E-A947-70E740481C1C}">
-                <a14:useLocalDpi xmlns:a14="http://schemas.microsoft.com/office/drawing/2010/main" val="0"/>
-              </a:ext>
-            </a:extLst>
-          </a:blip>
-          <a:srcRect/>
-          <a:stretch>
-            <a:fillRect/>
-          </a:stretch>
-        </p:blipFill>
-        <p:spPr bwMode="auto">
-          <a:xfrm>
-            <a:off x="1077920" y="4851501"/>
-            <a:ext cx="697257" cy="697257"/>
-          </a:xfrm>
-          <a:prstGeom prst="rect">
-            <a:avLst/>
-          </a:prstGeom>
-          <a:noFill/>
-          <a:extLst>
-            <a:ext uri="{909E8E84-426E-40DD-AFC4-6F175D3DCCD1}">
-              <a14:hiddenFill xmlns:a14="http://schemas.microsoft.com/office/drawing/2010/main">
-                <a:solidFill>
-                  <a:srgbClr val="FFFFFF"/>
-                </a:solidFill>
-              </a14:hiddenFill>
-            </a:ext>
-          </a:extLst>
-        </p:spPr>
-      </p:pic>
-      <p:sp>
-        <p:nvSpPr>
-          <p:cNvPr id="20" name="Rectangle 19">
-            <a:extLst>
-              <a:ext uri="{FF2B5EF4-FFF2-40B4-BE49-F238E27FC236}">
-                <a16:creationId xmlns:a16="http://schemas.microsoft.com/office/drawing/2014/main" id="{6112AB0A-5EC1-5AC1-9BC9-52598476D634}"/>
-              </a:ext>
-            </a:extLst>
-          </p:cNvPr>
-          <p:cNvSpPr/>
-          <p:nvPr/>
-        </p:nvSpPr>
-        <p:spPr>
-          <a:xfrm>
-            <a:off x="838201" y="3343781"/>
-            <a:ext cx="1871117" cy="1081817"/>
-          </a:xfrm>
-          <a:prstGeom prst="rect">
-            <a:avLst/>
-          </a:prstGeom>
-          <a:noFill/>
-          <a:ln>
-            <a:solidFill>
-              <a:schemeClr val="tx1"/>
-            </a:solidFill>
-          </a:ln>
-        </p:spPr>
-        <p:style>
-          <a:lnRef idx="2">
-            <a:schemeClr val="accent1">
-              <a:shade val="15000"/>
-            </a:schemeClr>
-          </a:lnRef>
-          <a:fillRef idx="1">
-            <a:schemeClr val="accent1"/>
-          </a:fillRef>
-          <a:effectRef idx="0">
-            <a:schemeClr val="accent1"/>
-          </a:effectRef>
-          <a:fontRef idx="minor">
-            <a:schemeClr val="lt1"/>
-          </a:fontRef>
-        </p:style>
-        <p:txBody>
-          <a:bodyPr rtlCol="0" anchor="ctr"/>
-          <a:lstStyle/>
-          <a:p>
-            <a:pPr algn="r"/>
-            <a:r>
-              <a:rPr lang="en-US" sz="1600" dirty="0">
-                <a:solidFill>
-                  <a:sysClr val="windowText" lastClr="000000"/>
-                </a:solidFill>
-              </a:rPr>
-              <a:t>Information </a:t>
-            </a:r>
-          </a:p>
-          <a:p>
-            <a:pPr algn="r"/>
-            <a:r>
-              <a:rPr lang="en-US" sz="1600" dirty="0">
-                <a:solidFill>
-                  <a:sysClr val="windowText" lastClr="000000"/>
-                </a:solidFill>
-              </a:rPr>
-              <a:t>Extraction</a:t>
-            </a:r>
-          </a:p>
-        </p:txBody>
-      </p:sp>
-      <p:pic>
-        <p:nvPicPr>
-          <p:cNvPr id="22" name="Picture 21">
-            <a:extLst>
-              <a:ext uri="{FF2B5EF4-FFF2-40B4-BE49-F238E27FC236}">
-                <a16:creationId xmlns:a16="http://schemas.microsoft.com/office/drawing/2014/main" id="{D6849B42-8348-A3D6-C6BC-A281E3B4EF93}"/>
-              </a:ext>
-            </a:extLst>
-          </p:cNvPr>
-          <p:cNvPicPr>
-            <a:picLocks noChangeAspect="1"/>
-          </p:cNvPicPr>
-          <p:nvPr/>
-        </p:nvPicPr>
-        <p:blipFill>
-          <a:blip r:embed="rId3"/>
-          <a:srcRect l="-762" t="-5651" r="762" b="19524"/>
-          <a:stretch>
-            <a:fillRect/>
-          </a:stretch>
-        </p:blipFill>
-        <p:spPr>
-          <a:xfrm>
-            <a:off x="838200" y="3494648"/>
-            <a:ext cx="807145" cy="695170"/>
-          </a:xfrm>
-          <a:prstGeom prst="rect">
-            <a:avLst/>
-          </a:prstGeom>
-        </p:spPr>
-      </p:pic>
-      <p:cxnSp>
-        <p:nvCxnSpPr>
-          <p:cNvPr id="25" name="Straight Arrow Connector 24">
-            <a:extLst>
-              <a:ext uri="{FF2B5EF4-FFF2-40B4-BE49-F238E27FC236}">
-                <a16:creationId xmlns:a16="http://schemas.microsoft.com/office/drawing/2014/main" id="{B83C3C82-AF50-82AA-D038-05B2F7AEF3B7}"/>
-              </a:ext>
-            </a:extLst>
-          </p:cNvPr>
-          <p:cNvCxnSpPr/>
-          <p:nvPr/>
-        </p:nvCxnSpPr>
-        <p:spPr>
-          <a:xfrm flipH="1" flipV="1">
-            <a:off x="1950152" y="4425596"/>
-            <a:ext cx="1" cy="310445"/>
-          </a:xfrm>
-          <a:prstGeom prst="straightConnector1">
-            <a:avLst/>
-          </a:prstGeom>
-          <a:ln>
-            <a:tailEnd type="triangle"/>
-          </a:ln>
-        </p:spPr>
-        <p:style>
-          <a:lnRef idx="2">
-            <a:schemeClr val="accent1"/>
-          </a:lnRef>
-          <a:fillRef idx="0">
-            <a:schemeClr val="accent1"/>
-          </a:fillRef>
-          <a:effectRef idx="1">
-            <a:schemeClr val="accent1"/>
-          </a:effectRef>
-          <a:fontRef idx="minor">
-            <a:schemeClr val="tx1"/>
-          </a:fontRef>
-        </p:style>
-      </p:cxnSp>
-      <p:cxnSp>
-        <p:nvCxnSpPr>
-          <p:cNvPr id="26" name="Straight Arrow Connector 25">
-            <a:extLst>
-              <a:ext uri="{FF2B5EF4-FFF2-40B4-BE49-F238E27FC236}">
-                <a16:creationId xmlns:a16="http://schemas.microsoft.com/office/drawing/2014/main" id="{F60B01A6-1685-DE41-0EE7-6033C6277645}"/>
-              </a:ext>
-            </a:extLst>
-          </p:cNvPr>
-          <p:cNvCxnSpPr/>
-          <p:nvPr/>
-        </p:nvCxnSpPr>
-        <p:spPr>
-          <a:xfrm flipH="1" flipV="1">
-            <a:off x="1950152" y="3033844"/>
-            <a:ext cx="1" cy="310445"/>
-          </a:xfrm>
-          <a:prstGeom prst="straightConnector1">
-            <a:avLst/>
-          </a:prstGeom>
-          <a:ln>
-            <a:tailEnd type="triangle"/>
-          </a:ln>
-        </p:spPr>
-        <p:style>
-          <a:lnRef idx="2">
-            <a:schemeClr val="accent1"/>
-          </a:lnRef>
-          <a:fillRef idx="0">
-            <a:schemeClr val="accent1"/>
-          </a:fillRef>
-          <a:effectRef idx="1">
-            <a:schemeClr val="accent1"/>
-          </a:effectRef>
-          <a:fontRef idx="minor">
-            <a:schemeClr val="tx1"/>
-          </a:fontRef>
-        </p:style>
-      </p:cxnSp>
-      <p:sp>
-        <p:nvSpPr>
-          <p:cNvPr id="27" name="Rectangle 26">
-            <a:extLst>
-              <a:ext uri="{FF2B5EF4-FFF2-40B4-BE49-F238E27FC236}">
-                <a16:creationId xmlns:a16="http://schemas.microsoft.com/office/drawing/2014/main" id="{155AE0A1-2930-F2FE-D6E0-399A53D1764A}"/>
-              </a:ext>
-            </a:extLst>
-          </p:cNvPr>
-          <p:cNvSpPr/>
-          <p:nvPr/>
-        </p:nvSpPr>
-        <p:spPr>
-          <a:xfrm>
-            <a:off x="838200" y="2338166"/>
-            <a:ext cx="1871123" cy="695170"/>
-          </a:xfrm>
-          <a:prstGeom prst="rect">
-            <a:avLst/>
-          </a:prstGeom>
-          <a:noFill/>
-          <a:ln>
-            <a:solidFill>
-              <a:schemeClr val="tx1"/>
-            </a:solidFill>
-          </a:ln>
-        </p:spPr>
-        <p:style>
-          <a:lnRef idx="2">
-            <a:schemeClr val="accent1">
-              <a:shade val="15000"/>
-            </a:schemeClr>
-          </a:lnRef>
-          <a:fillRef idx="1">
-            <a:schemeClr val="accent1"/>
-          </a:fillRef>
-          <a:effectRef idx="0">
-            <a:schemeClr val="accent1"/>
-          </a:effectRef>
-          <a:fontRef idx="minor">
-            <a:schemeClr val="lt1"/>
-          </a:fontRef>
-        </p:style>
-        <p:txBody>
-          <a:bodyPr rtlCol="0" anchor="ctr"/>
-          <a:lstStyle/>
-          <a:p>
-            <a:pPr algn="r"/>
-            <a:r>
-              <a:rPr lang="en-US" sz="1600" dirty="0">
-                <a:solidFill>
-                  <a:sysClr val="windowText" lastClr="000000"/>
-                </a:solidFill>
-              </a:rPr>
-              <a:t>Chunking</a:t>
-            </a:r>
-          </a:p>
-        </p:txBody>
-      </p:sp>
-      <p:pic>
-        <p:nvPicPr>
-          <p:cNvPr id="31" name="Graphic 30" descr="Chat bubble outline">
-            <a:extLst>
-              <a:ext uri="{FF2B5EF4-FFF2-40B4-BE49-F238E27FC236}">
-                <a16:creationId xmlns:a16="http://schemas.microsoft.com/office/drawing/2014/main" id="{69714D00-7C55-BA63-B470-517D09400510}"/>
-              </a:ext>
-            </a:extLst>
-          </p:cNvPr>
-          <p:cNvPicPr>
-            <a:picLocks noChangeAspect="1"/>
-          </p:cNvPicPr>
-          <p:nvPr/>
-        </p:nvPicPr>
-        <p:blipFill>
-          <a:blip r:embed="rId4">
-            <a:extLst>
-              <a:ext uri="{96DAC541-7B7A-43D3-8B79-37D633B846F1}">
-                <asvg:svgBlip xmlns:asvg="http://schemas.microsoft.com/office/drawing/2016/SVG/main" r:embed="rId5"/>
-              </a:ext>
-            </a:extLst>
-          </a:blip>
-          <a:stretch>
-            <a:fillRect/>
-          </a:stretch>
-        </p:blipFill>
-        <p:spPr>
-          <a:xfrm>
-            <a:off x="969345" y="2306987"/>
-            <a:ext cx="805828" cy="805828"/>
-          </a:xfrm>
-          <a:prstGeom prst="rect">
-            <a:avLst/>
-          </a:prstGeom>
-        </p:spPr>
-      </p:pic>
-      <p:cxnSp>
-        <p:nvCxnSpPr>
-          <p:cNvPr id="34" name="Straight Arrow Connector 33">
-            <a:extLst>
-              <a:ext uri="{FF2B5EF4-FFF2-40B4-BE49-F238E27FC236}">
-                <a16:creationId xmlns:a16="http://schemas.microsoft.com/office/drawing/2014/main" id="{E753D5D3-C45B-ACAF-2BA6-9D052218083C}"/>
-              </a:ext>
-            </a:extLst>
-          </p:cNvPr>
-          <p:cNvCxnSpPr>
-            <a:cxnSpLocks/>
-            <a:stCxn id="27" idx="3"/>
-            <a:endCxn id="35" idx="1"/>
-          </p:cNvCxnSpPr>
-          <p:nvPr/>
-        </p:nvCxnSpPr>
-        <p:spPr>
-          <a:xfrm>
-            <a:off x="2709323" y="2685751"/>
-            <a:ext cx="405853" cy="0"/>
-          </a:xfrm>
-          <a:prstGeom prst="straightConnector1">
-            <a:avLst/>
-          </a:prstGeom>
-          <a:ln>
-            <a:tailEnd type="triangle"/>
-          </a:ln>
-        </p:spPr>
-        <p:style>
-          <a:lnRef idx="2">
-            <a:schemeClr val="accent1"/>
-          </a:lnRef>
-          <a:fillRef idx="0">
-            <a:schemeClr val="accent1"/>
-          </a:fillRef>
-          <a:effectRef idx="1">
-            <a:schemeClr val="accent1"/>
-          </a:effectRef>
-          <a:fontRef idx="minor">
-            <a:schemeClr val="tx1"/>
-          </a:fontRef>
-        </p:style>
-      </p:cxnSp>
-      <p:sp>
-        <p:nvSpPr>
-          <p:cNvPr id="35" name="Rectangle 34">
-            <a:extLst>
-              <a:ext uri="{FF2B5EF4-FFF2-40B4-BE49-F238E27FC236}">
-                <a16:creationId xmlns:a16="http://schemas.microsoft.com/office/drawing/2014/main" id="{E626CC24-D878-8A5E-83E8-F55C6F5F1E0A}"/>
-              </a:ext>
-            </a:extLst>
-          </p:cNvPr>
-          <p:cNvSpPr/>
-          <p:nvPr/>
-        </p:nvSpPr>
-        <p:spPr>
-          <a:xfrm>
-            <a:off x="3115176" y="2325427"/>
-            <a:ext cx="1909317" cy="720647"/>
-          </a:xfrm>
-          <a:prstGeom prst="rect">
-            <a:avLst/>
-          </a:prstGeom>
-          <a:noFill/>
-          <a:ln>
-            <a:solidFill>
-              <a:schemeClr val="tx1"/>
-            </a:solidFill>
-          </a:ln>
-        </p:spPr>
-        <p:style>
-          <a:lnRef idx="2">
-            <a:schemeClr val="accent1">
-              <a:shade val="15000"/>
-            </a:schemeClr>
-          </a:lnRef>
-          <a:fillRef idx="1">
-            <a:schemeClr val="accent1"/>
-          </a:fillRef>
-          <a:effectRef idx="0">
-            <a:schemeClr val="accent1"/>
-          </a:effectRef>
-          <a:fontRef idx="minor">
-            <a:schemeClr val="lt1"/>
-          </a:fontRef>
-        </p:style>
-        <p:txBody>
-          <a:bodyPr rtlCol="0" anchor="ctr"/>
-          <a:lstStyle/>
-          <a:p>
-            <a:pPr algn="r"/>
-            <a:r>
-              <a:rPr lang="en-US" sz="1600" dirty="0">
-                <a:solidFill>
-                  <a:sysClr val="windowText" lastClr="000000"/>
-                </a:solidFill>
-              </a:rPr>
-              <a:t>Embedding</a:t>
-            </a:r>
-          </a:p>
-        </p:txBody>
-      </p:sp>
-      <p:pic>
-        <p:nvPicPr>
-          <p:cNvPr id="46" name="Picture 45">
-            <a:extLst>
-              <a:ext uri="{FF2B5EF4-FFF2-40B4-BE49-F238E27FC236}">
-                <a16:creationId xmlns:a16="http://schemas.microsoft.com/office/drawing/2014/main" id="{73A0A7C0-BE42-BFC8-F908-277CDED47103}"/>
-              </a:ext>
-            </a:extLst>
-          </p:cNvPr>
-          <p:cNvPicPr>
-            <a:picLocks noChangeAspect="1"/>
-          </p:cNvPicPr>
-          <p:nvPr/>
-        </p:nvPicPr>
-        <p:blipFill>
-          <a:blip r:embed="rId6"/>
-          <a:srcRect b="13873"/>
-          <a:stretch>
-            <a:fillRect/>
-          </a:stretch>
-        </p:blipFill>
-        <p:spPr>
-          <a:xfrm>
-            <a:off x="3180742" y="2380728"/>
-            <a:ext cx="702732" cy="605242"/>
-          </a:xfrm>
-          <a:prstGeom prst="rect">
-            <a:avLst/>
-          </a:prstGeom>
-        </p:spPr>
-      </p:pic>
-      <p:cxnSp>
-        <p:nvCxnSpPr>
-          <p:cNvPr id="58" name="Straight Arrow Connector 57">
-            <a:extLst>
-              <a:ext uri="{FF2B5EF4-FFF2-40B4-BE49-F238E27FC236}">
-                <a16:creationId xmlns:a16="http://schemas.microsoft.com/office/drawing/2014/main" id="{01863FE4-12C1-2070-6515-E3CEC5CD77B0}"/>
-              </a:ext>
-            </a:extLst>
-          </p:cNvPr>
-          <p:cNvCxnSpPr>
-            <a:cxnSpLocks/>
-            <a:stCxn id="35" idx="3"/>
-            <a:endCxn id="60" idx="1"/>
-          </p:cNvCxnSpPr>
-          <p:nvPr/>
-        </p:nvCxnSpPr>
-        <p:spPr>
-          <a:xfrm flipV="1">
-            <a:off x="5024493" y="2683350"/>
-            <a:ext cx="522642" cy="2401"/>
-          </a:xfrm>
-          <a:prstGeom prst="straightConnector1">
-            <a:avLst/>
-          </a:prstGeom>
-          <a:ln>
-            <a:tailEnd type="triangle"/>
-          </a:ln>
-        </p:spPr>
-        <p:style>
-          <a:lnRef idx="2">
-            <a:schemeClr val="accent1"/>
-          </a:lnRef>
-          <a:fillRef idx="0">
-            <a:schemeClr val="accent1"/>
-          </a:fillRef>
-          <a:effectRef idx="1">
-            <a:schemeClr val="accent1"/>
-          </a:effectRef>
-          <a:fontRef idx="minor">
-            <a:schemeClr val="tx1"/>
-          </a:fontRef>
-        </p:style>
-      </p:cxnSp>
-      <p:pic>
-        <p:nvPicPr>
-          <p:cNvPr id="59" name="Picture 58">
-            <a:extLst>
-              <a:ext uri="{FF2B5EF4-FFF2-40B4-BE49-F238E27FC236}">
-                <a16:creationId xmlns:a16="http://schemas.microsoft.com/office/drawing/2014/main" id="{1208CDA2-07EA-53F3-BAD8-39EB87671453}"/>
-              </a:ext>
-            </a:extLst>
-          </p:cNvPr>
-          <p:cNvPicPr>
-            <a:picLocks noChangeAspect="1"/>
-          </p:cNvPicPr>
-          <p:nvPr/>
-        </p:nvPicPr>
-        <p:blipFill>
-          <a:blip r:embed="rId7"/>
-          <a:srcRect b="12576"/>
-          <a:stretch>
-            <a:fillRect/>
-          </a:stretch>
-        </p:blipFill>
-        <p:spPr>
-          <a:xfrm>
-            <a:off x="5590164" y="2391728"/>
-            <a:ext cx="683058" cy="597158"/>
-          </a:xfrm>
-          <a:prstGeom prst="rect">
-            <a:avLst/>
-          </a:prstGeom>
-        </p:spPr>
-      </p:pic>
-      <p:sp>
-        <p:nvSpPr>
-          <p:cNvPr id="60" name="Rectangle 59">
-            <a:extLst>
-              <a:ext uri="{FF2B5EF4-FFF2-40B4-BE49-F238E27FC236}">
-                <a16:creationId xmlns:a16="http://schemas.microsoft.com/office/drawing/2014/main" id="{5ACEBF82-C634-2DE7-5A46-085368B1B9DB}"/>
-              </a:ext>
-            </a:extLst>
-          </p:cNvPr>
-          <p:cNvSpPr/>
-          <p:nvPr/>
-        </p:nvSpPr>
-        <p:spPr>
-          <a:xfrm>
-            <a:off x="5547135" y="2323026"/>
-            <a:ext cx="2262684" cy="720647"/>
-          </a:xfrm>
-          <a:prstGeom prst="rect">
-            <a:avLst/>
-          </a:prstGeom>
-          <a:noFill/>
-          <a:ln>
-            <a:solidFill>
-              <a:schemeClr val="tx1"/>
-            </a:solidFill>
-          </a:ln>
-        </p:spPr>
-        <p:style>
-          <a:lnRef idx="2">
-            <a:schemeClr val="accent1">
-              <a:shade val="15000"/>
-            </a:schemeClr>
-          </a:lnRef>
-          <a:fillRef idx="1">
-            <a:schemeClr val="accent1"/>
-          </a:fillRef>
-          <a:effectRef idx="0">
-            <a:schemeClr val="accent1"/>
-          </a:effectRef>
-          <a:fontRef idx="minor">
-            <a:schemeClr val="lt1"/>
-          </a:fontRef>
-        </p:style>
-        <p:txBody>
-          <a:bodyPr rtlCol="0" anchor="ctr"/>
-          <a:lstStyle/>
-          <a:p>
-            <a:pPr algn="r"/>
-            <a:r>
-              <a:rPr lang="en-US" sz="1600" dirty="0">
-                <a:solidFill>
-                  <a:sysClr val="windowText" lastClr="000000"/>
-                </a:solidFill>
-              </a:rPr>
-              <a:t>Vector Database</a:t>
-            </a:r>
-          </a:p>
-        </p:txBody>
-      </p:sp>
-      <p:sp>
-        <p:nvSpPr>
-          <p:cNvPr id="63" name="Rectangle 62">
-            <a:extLst>
-              <a:ext uri="{FF2B5EF4-FFF2-40B4-BE49-F238E27FC236}">
-                <a16:creationId xmlns:a16="http://schemas.microsoft.com/office/drawing/2014/main" id="{92CB6A23-8BEB-4D31-BB1A-15790C39E608}"/>
-              </a:ext>
-            </a:extLst>
-          </p:cNvPr>
-          <p:cNvSpPr/>
-          <p:nvPr/>
-        </p:nvSpPr>
-        <p:spPr>
-          <a:xfrm>
-            <a:off x="8753907" y="747016"/>
-            <a:ext cx="1871123" cy="720647"/>
-          </a:xfrm>
-          <a:prstGeom prst="rect">
-            <a:avLst/>
-          </a:prstGeom>
-          <a:noFill/>
-          <a:ln>
-            <a:solidFill>
-              <a:schemeClr val="tx1"/>
-            </a:solidFill>
-          </a:ln>
-        </p:spPr>
-        <p:style>
-          <a:lnRef idx="2">
-            <a:schemeClr val="accent1">
-              <a:shade val="15000"/>
-            </a:schemeClr>
-          </a:lnRef>
-          <a:fillRef idx="1">
-            <a:schemeClr val="accent1"/>
-          </a:fillRef>
-          <a:effectRef idx="0">
-            <a:schemeClr val="accent1"/>
-          </a:effectRef>
-          <a:fontRef idx="minor">
-            <a:schemeClr val="lt1"/>
-          </a:fontRef>
-        </p:style>
-        <p:txBody>
-          <a:bodyPr rtlCol="0" anchor="ctr"/>
-          <a:lstStyle/>
-          <a:p>
-            <a:pPr algn="r"/>
-            <a:r>
-              <a:rPr lang="en-US" b="1" dirty="0">
-                <a:solidFill>
-                  <a:sysClr val="windowText" lastClr="000000"/>
-                </a:solidFill>
-              </a:rPr>
-              <a:t>Query</a:t>
-            </a:r>
-            <a:endParaRPr lang="en-US" sz="1600" b="1" dirty="0">
-              <a:solidFill>
-                <a:sysClr val="windowText" lastClr="000000"/>
-              </a:solidFill>
-            </a:endParaRPr>
-          </a:p>
-        </p:txBody>
-      </p:sp>
-      <p:pic>
-        <p:nvPicPr>
-          <p:cNvPr id="1025" name="Graphic 1024" descr="Questions with solid fill">
-            <a:extLst>
-              <a:ext uri="{FF2B5EF4-FFF2-40B4-BE49-F238E27FC236}">
-                <a16:creationId xmlns:a16="http://schemas.microsoft.com/office/drawing/2014/main" id="{D1BEE528-DC7A-5C08-9B50-CFC788B8E737}"/>
-              </a:ext>
-            </a:extLst>
-          </p:cNvPr>
-          <p:cNvPicPr>
-            <a:picLocks noChangeAspect="1"/>
-          </p:cNvPicPr>
-          <p:nvPr/>
-        </p:nvPicPr>
-        <p:blipFill>
-          <a:blip r:embed="rId8">
-            <a:extLst>
-              <a:ext uri="{96DAC541-7B7A-43D3-8B79-37D633B846F1}">
-                <asvg:svgBlip xmlns:asvg="http://schemas.microsoft.com/office/drawing/2016/SVG/main" r:embed="rId9"/>
-              </a:ext>
-            </a:extLst>
-          </a:blip>
-          <a:stretch>
-            <a:fillRect/>
-          </a:stretch>
-        </p:blipFill>
-        <p:spPr>
-          <a:xfrm>
-            <a:off x="8884539" y="747016"/>
-            <a:ext cx="720648" cy="720648"/>
-          </a:xfrm>
-          <a:prstGeom prst="rect">
-            <a:avLst/>
-          </a:prstGeom>
-        </p:spPr>
-      </p:pic>
-      <p:sp>
-        <p:nvSpPr>
-          <p:cNvPr id="1027" name="Rectangle 1026">
-            <a:extLst>
-              <a:ext uri="{FF2B5EF4-FFF2-40B4-BE49-F238E27FC236}">
-                <a16:creationId xmlns:a16="http://schemas.microsoft.com/office/drawing/2014/main" id="{6A733F32-5212-230D-2235-FEFDE51A64AF}"/>
-              </a:ext>
-            </a:extLst>
-          </p:cNvPr>
-          <p:cNvSpPr/>
-          <p:nvPr/>
-        </p:nvSpPr>
-        <p:spPr>
-          <a:xfrm>
-            <a:off x="5718533" y="747016"/>
-            <a:ext cx="1909317" cy="720647"/>
-          </a:xfrm>
-          <a:prstGeom prst="rect">
-            <a:avLst/>
-          </a:prstGeom>
-          <a:noFill/>
-          <a:ln>
-            <a:solidFill>
-              <a:schemeClr val="tx1"/>
-            </a:solidFill>
-          </a:ln>
-        </p:spPr>
-        <p:style>
-          <a:lnRef idx="2">
-            <a:schemeClr val="accent1">
-              <a:shade val="15000"/>
-            </a:schemeClr>
-          </a:lnRef>
-          <a:fillRef idx="1">
-            <a:schemeClr val="accent1"/>
-          </a:fillRef>
-          <a:effectRef idx="0">
-            <a:schemeClr val="accent1"/>
-          </a:effectRef>
-          <a:fontRef idx="minor">
-            <a:schemeClr val="lt1"/>
-          </a:fontRef>
-        </p:style>
-        <p:txBody>
-          <a:bodyPr rtlCol="0" anchor="ctr"/>
-          <a:lstStyle/>
-          <a:p>
-            <a:pPr algn="r"/>
-            <a:r>
-              <a:rPr lang="en-US" sz="1600" dirty="0">
-                <a:solidFill>
-                  <a:sysClr val="windowText" lastClr="000000"/>
-                </a:solidFill>
-              </a:rPr>
-              <a:t>Embedding</a:t>
-            </a:r>
-          </a:p>
-        </p:txBody>
-      </p:sp>
-      <p:pic>
-        <p:nvPicPr>
-          <p:cNvPr id="1028" name="Picture 1027">
-            <a:extLst>
-              <a:ext uri="{FF2B5EF4-FFF2-40B4-BE49-F238E27FC236}">
-                <a16:creationId xmlns:a16="http://schemas.microsoft.com/office/drawing/2014/main" id="{355D9C4D-2EB2-3744-B66A-FC784A1D40EC}"/>
-              </a:ext>
-            </a:extLst>
-          </p:cNvPr>
-          <p:cNvPicPr>
-            <a:picLocks noChangeAspect="1"/>
-          </p:cNvPicPr>
-          <p:nvPr/>
-        </p:nvPicPr>
-        <p:blipFill>
-          <a:blip r:embed="rId6"/>
-          <a:srcRect b="13873"/>
-          <a:stretch>
-            <a:fillRect/>
-          </a:stretch>
-        </p:blipFill>
-        <p:spPr>
-          <a:xfrm>
-            <a:off x="5793582" y="810219"/>
-            <a:ext cx="702732" cy="605242"/>
-          </a:xfrm>
-          <a:prstGeom prst="rect">
-            <a:avLst/>
-          </a:prstGeom>
-        </p:spPr>
-      </p:pic>
-      <p:cxnSp>
-        <p:nvCxnSpPr>
-          <p:cNvPr id="1029" name="Straight Arrow Connector 1028">
-            <a:extLst>
-              <a:ext uri="{FF2B5EF4-FFF2-40B4-BE49-F238E27FC236}">
-                <a16:creationId xmlns:a16="http://schemas.microsoft.com/office/drawing/2014/main" id="{678433FB-CC62-BF8A-6F4F-0520252D232A}"/>
-              </a:ext>
-            </a:extLst>
-          </p:cNvPr>
-          <p:cNvCxnSpPr>
-            <a:cxnSpLocks/>
-            <a:stCxn id="63" idx="1"/>
-            <a:endCxn id="1027" idx="3"/>
-          </p:cNvCxnSpPr>
-          <p:nvPr/>
-        </p:nvCxnSpPr>
-        <p:spPr>
-          <a:xfrm flipH="1">
-            <a:off x="7627850" y="1107340"/>
-            <a:ext cx="1126057" cy="0"/>
-          </a:xfrm>
-          <a:prstGeom prst="straightConnector1">
-            <a:avLst/>
-          </a:prstGeom>
-          <a:ln>
-            <a:tailEnd type="triangle"/>
-          </a:ln>
-        </p:spPr>
-        <p:style>
-          <a:lnRef idx="2">
-            <a:schemeClr val="accent1"/>
-          </a:lnRef>
-          <a:fillRef idx="0">
-            <a:schemeClr val="accent1"/>
-          </a:fillRef>
-          <a:effectRef idx="1">
-            <a:schemeClr val="accent1"/>
-          </a:effectRef>
-          <a:fontRef idx="minor">
-            <a:schemeClr val="tx1"/>
-          </a:fontRef>
-        </p:style>
-      </p:cxnSp>
-      <p:cxnSp>
-        <p:nvCxnSpPr>
-          <p:cNvPr id="1032" name="Straight Arrow Connector 1031">
-            <a:extLst>
-              <a:ext uri="{FF2B5EF4-FFF2-40B4-BE49-F238E27FC236}">
-                <a16:creationId xmlns:a16="http://schemas.microsoft.com/office/drawing/2014/main" id="{F37FE97C-8250-F9F4-637D-FDB6948014FD}"/>
-              </a:ext>
-            </a:extLst>
-          </p:cNvPr>
-          <p:cNvCxnSpPr>
-            <a:cxnSpLocks/>
-            <a:stCxn id="1027" idx="2"/>
-            <a:endCxn id="60" idx="0"/>
-          </p:cNvCxnSpPr>
-          <p:nvPr/>
-        </p:nvCxnSpPr>
-        <p:spPr>
-          <a:xfrm>
-            <a:off x="6673192" y="1467663"/>
-            <a:ext cx="5285" cy="855363"/>
-          </a:xfrm>
-          <a:prstGeom prst="straightConnector1">
-            <a:avLst/>
-          </a:prstGeom>
-          <a:ln>
-            <a:tailEnd type="triangle"/>
-          </a:ln>
-        </p:spPr>
-        <p:style>
-          <a:lnRef idx="2">
-            <a:schemeClr val="accent1"/>
-          </a:lnRef>
-          <a:fillRef idx="0">
-            <a:schemeClr val="accent1"/>
-          </a:fillRef>
-          <a:effectRef idx="1">
-            <a:schemeClr val="accent1"/>
-          </a:effectRef>
-          <a:fontRef idx="minor">
-            <a:schemeClr val="tx1"/>
-          </a:fontRef>
-        </p:style>
-      </p:cxnSp>
-      <p:cxnSp>
-        <p:nvCxnSpPr>
-          <p:cNvPr id="1039" name="Straight Arrow Connector 1038">
-            <a:extLst>
-              <a:ext uri="{FF2B5EF4-FFF2-40B4-BE49-F238E27FC236}">
-                <a16:creationId xmlns:a16="http://schemas.microsoft.com/office/drawing/2014/main" id="{5A98596E-1839-B21C-98D4-A5A2E538B939}"/>
-              </a:ext>
-            </a:extLst>
-          </p:cNvPr>
-          <p:cNvCxnSpPr>
-            <a:stCxn id="60" idx="2"/>
-          </p:cNvCxnSpPr>
-          <p:nvPr/>
-        </p:nvCxnSpPr>
-        <p:spPr>
-          <a:xfrm>
-            <a:off x="6678477" y="3043673"/>
-            <a:ext cx="0" cy="408292"/>
-          </a:xfrm>
-          <a:prstGeom prst="straightConnector1">
-            <a:avLst/>
-          </a:prstGeom>
-          <a:ln>
-            <a:tailEnd type="triangle"/>
-          </a:ln>
-        </p:spPr>
-        <p:style>
-          <a:lnRef idx="2">
-            <a:schemeClr val="accent1"/>
-          </a:lnRef>
-          <a:fillRef idx="0">
-            <a:schemeClr val="accent1"/>
-          </a:fillRef>
-          <a:effectRef idx="1">
-            <a:schemeClr val="accent1"/>
-          </a:effectRef>
-          <a:fontRef idx="minor">
-            <a:schemeClr val="tx1"/>
-          </a:fontRef>
-        </p:style>
-      </p:cxnSp>
-      <p:sp>
-        <p:nvSpPr>
-          <p:cNvPr id="1040" name="Rectangle 1039">
-            <a:extLst>
-              <a:ext uri="{FF2B5EF4-FFF2-40B4-BE49-F238E27FC236}">
-                <a16:creationId xmlns:a16="http://schemas.microsoft.com/office/drawing/2014/main" id="{5A0B5218-F984-2FE2-AE21-51427E4A3C71}"/>
-              </a:ext>
-            </a:extLst>
-          </p:cNvPr>
-          <p:cNvSpPr/>
-          <p:nvPr/>
-        </p:nvSpPr>
-        <p:spPr>
-          <a:xfrm>
-            <a:off x="5559343" y="3438706"/>
-            <a:ext cx="2262684" cy="720647"/>
-          </a:xfrm>
-          <a:prstGeom prst="rect">
-            <a:avLst/>
-          </a:prstGeom>
-          <a:noFill/>
-          <a:ln>
-            <a:solidFill>
-              <a:schemeClr val="tx1"/>
-            </a:solidFill>
-          </a:ln>
-        </p:spPr>
-        <p:style>
-          <a:lnRef idx="2">
-            <a:schemeClr val="accent1">
-              <a:shade val="15000"/>
-            </a:schemeClr>
-          </a:lnRef>
-          <a:fillRef idx="1">
-            <a:schemeClr val="accent1"/>
-          </a:fillRef>
-          <a:effectRef idx="0">
-            <a:schemeClr val="accent1"/>
-          </a:effectRef>
-          <a:fontRef idx="minor">
-            <a:schemeClr val="lt1"/>
-          </a:fontRef>
-        </p:style>
-        <p:txBody>
-          <a:bodyPr rtlCol="0" anchor="ctr"/>
-          <a:lstStyle/>
-          <a:p>
-            <a:pPr algn="r"/>
-            <a:r>
-              <a:rPr lang="en-US" sz="1600" dirty="0">
-                <a:solidFill>
-                  <a:sysClr val="windowText" lastClr="000000"/>
-                </a:solidFill>
-              </a:rPr>
-              <a:t>Relevant Data </a:t>
-            </a:r>
-          </a:p>
-        </p:txBody>
-      </p:sp>
-      <p:pic>
-        <p:nvPicPr>
-          <p:cNvPr id="1043" name="Graphic 1042" descr="Comment Important outline">
-            <a:extLst>
-              <a:ext uri="{FF2B5EF4-FFF2-40B4-BE49-F238E27FC236}">
-                <a16:creationId xmlns:a16="http://schemas.microsoft.com/office/drawing/2014/main" id="{BD082B7A-430C-9295-5E6C-1102398D1618}"/>
-              </a:ext>
-            </a:extLst>
-          </p:cNvPr>
-          <p:cNvPicPr>
-            <a:picLocks noChangeAspect="1"/>
-          </p:cNvPicPr>
-          <p:nvPr/>
-        </p:nvPicPr>
-        <p:blipFill>
-          <a:blip r:embed="rId10">
-            <a:extLst>
-              <a:ext uri="{96DAC541-7B7A-43D3-8B79-37D633B846F1}">
-                <asvg:svgBlip xmlns:asvg="http://schemas.microsoft.com/office/drawing/2016/SVG/main" r:embed="rId11"/>
-              </a:ext>
-            </a:extLst>
-          </a:blip>
-          <a:stretch>
-            <a:fillRect/>
-          </a:stretch>
-        </p:blipFill>
-        <p:spPr>
-          <a:xfrm>
-            <a:off x="5547135" y="3438706"/>
-            <a:ext cx="788405" cy="788405"/>
-          </a:xfrm>
-          <a:prstGeom prst="rect">
-            <a:avLst/>
-          </a:prstGeom>
-        </p:spPr>
-      </p:pic>
-      <p:cxnSp>
-        <p:nvCxnSpPr>
-          <p:cNvPr id="1045" name="Straight Arrow Connector 1044">
-            <a:extLst>
-              <a:ext uri="{FF2B5EF4-FFF2-40B4-BE49-F238E27FC236}">
-                <a16:creationId xmlns:a16="http://schemas.microsoft.com/office/drawing/2014/main" id="{60400BA6-0193-F4B7-C780-50EB8F273D96}"/>
-              </a:ext>
-            </a:extLst>
-          </p:cNvPr>
-          <p:cNvCxnSpPr>
-            <a:cxnSpLocks/>
-            <a:stCxn id="1040" idx="2"/>
-            <a:endCxn id="1047" idx="0"/>
-          </p:cNvCxnSpPr>
-          <p:nvPr/>
-        </p:nvCxnSpPr>
-        <p:spPr>
-          <a:xfrm>
-            <a:off x="6690685" y="4159353"/>
-            <a:ext cx="0" cy="348376"/>
-          </a:xfrm>
-          <a:prstGeom prst="straightConnector1">
-            <a:avLst/>
-          </a:prstGeom>
-          <a:ln>
-            <a:tailEnd type="triangle"/>
-          </a:ln>
-        </p:spPr>
-        <p:style>
-          <a:lnRef idx="2">
-            <a:schemeClr val="accent1"/>
-          </a:lnRef>
-          <a:fillRef idx="0">
-            <a:schemeClr val="accent1"/>
-          </a:fillRef>
-          <a:effectRef idx="1">
-            <a:schemeClr val="accent1"/>
-          </a:effectRef>
-          <a:fontRef idx="minor">
-            <a:schemeClr val="tx1"/>
-          </a:fontRef>
-        </p:style>
-      </p:cxnSp>
-      <p:sp>
-        <p:nvSpPr>
-          <p:cNvPr id="1047" name="Rectangle 1046">
-            <a:extLst>
-              <a:ext uri="{FF2B5EF4-FFF2-40B4-BE49-F238E27FC236}">
-                <a16:creationId xmlns:a16="http://schemas.microsoft.com/office/drawing/2014/main" id="{9F70F1F4-995C-8501-6482-2DCA10CB3D79}"/>
-              </a:ext>
-            </a:extLst>
-          </p:cNvPr>
-          <p:cNvSpPr/>
-          <p:nvPr/>
-        </p:nvSpPr>
-        <p:spPr>
-          <a:xfrm>
-            <a:off x="5559343" y="4507729"/>
-            <a:ext cx="2262684" cy="720647"/>
-          </a:xfrm>
-          <a:prstGeom prst="rect">
-            <a:avLst/>
-          </a:prstGeom>
-          <a:noFill/>
-          <a:ln>
-            <a:solidFill>
-              <a:schemeClr val="tx1"/>
-            </a:solidFill>
-          </a:ln>
-        </p:spPr>
-        <p:style>
-          <a:lnRef idx="2">
-            <a:schemeClr val="accent1">
-              <a:shade val="15000"/>
-            </a:schemeClr>
-          </a:lnRef>
-          <a:fillRef idx="1">
-            <a:schemeClr val="accent1"/>
-          </a:fillRef>
-          <a:effectRef idx="0">
-            <a:schemeClr val="accent1"/>
-          </a:effectRef>
-          <a:fontRef idx="minor">
-            <a:schemeClr val="lt1"/>
-          </a:fontRef>
-        </p:style>
-        <p:txBody>
-          <a:bodyPr rtlCol="0" anchor="ctr"/>
-          <a:lstStyle/>
-          <a:p>
-            <a:pPr algn="ctr"/>
-            <a:r>
-              <a:rPr lang="en-US" sz="1600" dirty="0">
-                <a:solidFill>
-                  <a:sysClr val="windowText" lastClr="000000"/>
-                </a:solidFill>
-              </a:rPr>
-              <a:t>                          LLM(s)</a:t>
-            </a:r>
-          </a:p>
-        </p:txBody>
-      </p:sp>
-      <p:pic>
-        <p:nvPicPr>
-          <p:cNvPr id="1049" name="Picture 1048">
-            <a:extLst>
-              <a:ext uri="{FF2B5EF4-FFF2-40B4-BE49-F238E27FC236}">
-                <a16:creationId xmlns:a16="http://schemas.microsoft.com/office/drawing/2014/main" id="{6664F53B-092E-C2DF-860C-1CF4F3612A2D}"/>
-              </a:ext>
-            </a:extLst>
-          </p:cNvPr>
-          <p:cNvPicPr>
-            <a:picLocks noChangeAspect="1"/>
-          </p:cNvPicPr>
-          <p:nvPr/>
-        </p:nvPicPr>
-        <p:blipFill>
-          <a:blip r:embed="rId12"/>
-          <a:srcRect b="21641"/>
-          <a:stretch>
-            <a:fillRect/>
-          </a:stretch>
-        </p:blipFill>
-        <p:spPr>
-          <a:xfrm>
-            <a:off x="5695501" y="4497003"/>
-            <a:ext cx="919673" cy="720647"/>
-          </a:xfrm>
-          <a:prstGeom prst="rect">
-            <a:avLst/>
-          </a:prstGeom>
-        </p:spPr>
-      </p:pic>
-      <p:cxnSp>
-        <p:nvCxnSpPr>
-          <p:cNvPr id="1055" name="Straight Arrow Connector 1054">
-            <a:extLst>
-              <a:ext uri="{FF2B5EF4-FFF2-40B4-BE49-F238E27FC236}">
-                <a16:creationId xmlns:a16="http://schemas.microsoft.com/office/drawing/2014/main" id="{9A0874A6-BD38-B3F8-61D9-B26E222B7EAD}"/>
-              </a:ext>
-            </a:extLst>
-          </p:cNvPr>
-          <p:cNvCxnSpPr>
-            <a:stCxn id="1047" idx="2"/>
-          </p:cNvCxnSpPr>
-          <p:nvPr/>
-        </p:nvCxnSpPr>
-        <p:spPr>
-          <a:xfrm>
-            <a:off x="6690685" y="5228376"/>
-            <a:ext cx="0" cy="376544"/>
-          </a:xfrm>
-          <a:prstGeom prst="straightConnector1">
-            <a:avLst/>
-          </a:prstGeom>
-          <a:ln>
-            <a:tailEnd type="triangle"/>
-          </a:ln>
-        </p:spPr>
-        <p:style>
-          <a:lnRef idx="2">
-            <a:schemeClr val="accent1"/>
-          </a:lnRef>
-          <a:fillRef idx="0">
-            <a:schemeClr val="accent1"/>
-          </a:fillRef>
-          <a:effectRef idx="1">
-            <a:schemeClr val="accent1"/>
-          </a:effectRef>
-          <a:fontRef idx="minor">
-            <a:schemeClr val="tx1"/>
-          </a:fontRef>
-        </p:style>
-      </p:cxnSp>
-      <p:sp>
-        <p:nvSpPr>
-          <p:cNvPr id="1056" name="Rectangle 1055">
-            <a:extLst>
-              <a:ext uri="{FF2B5EF4-FFF2-40B4-BE49-F238E27FC236}">
-                <a16:creationId xmlns:a16="http://schemas.microsoft.com/office/drawing/2014/main" id="{CD44B478-2064-3594-8205-67939CB10AA5}"/>
-              </a:ext>
-            </a:extLst>
-          </p:cNvPr>
-          <p:cNvSpPr/>
-          <p:nvPr/>
-        </p:nvSpPr>
-        <p:spPr>
-          <a:xfrm>
-            <a:off x="5559343" y="5604920"/>
-            <a:ext cx="2262684" cy="720647"/>
-          </a:xfrm>
-          <a:prstGeom prst="rect">
-            <a:avLst/>
-          </a:prstGeom>
-          <a:noFill/>
-          <a:ln>
-            <a:solidFill>
-              <a:schemeClr val="tx1"/>
-            </a:solidFill>
-          </a:ln>
-        </p:spPr>
-        <p:style>
-          <a:lnRef idx="2">
-            <a:schemeClr val="accent1">
-              <a:shade val="15000"/>
-            </a:schemeClr>
-          </a:lnRef>
-          <a:fillRef idx="1">
-            <a:schemeClr val="accent1"/>
-          </a:fillRef>
-          <a:effectRef idx="0">
-            <a:schemeClr val="accent1"/>
-          </a:effectRef>
-          <a:fontRef idx="minor">
-            <a:schemeClr val="lt1"/>
-          </a:fontRef>
-        </p:style>
-        <p:txBody>
-          <a:bodyPr rtlCol="0" anchor="ctr"/>
-          <a:lstStyle/>
-          <a:p>
-            <a:pPr algn="r"/>
-            <a:r>
-              <a:rPr lang="en-US" b="1" dirty="0">
-                <a:solidFill>
-                  <a:sysClr val="windowText" lastClr="000000"/>
-                </a:solidFill>
-              </a:rPr>
-              <a:t>Output</a:t>
-            </a:r>
-          </a:p>
-        </p:txBody>
-      </p:sp>
-      <p:pic>
-        <p:nvPicPr>
-          <p:cNvPr id="1060" name="Graphic 1059" descr="Share outline">
-            <a:extLst>
-              <a:ext uri="{FF2B5EF4-FFF2-40B4-BE49-F238E27FC236}">
-                <a16:creationId xmlns:a16="http://schemas.microsoft.com/office/drawing/2014/main" id="{D7471D12-6974-2DF1-735B-274DFAAAF56F}"/>
-              </a:ext>
-            </a:extLst>
-          </p:cNvPr>
-          <p:cNvPicPr>
-            <a:picLocks noChangeAspect="1"/>
-          </p:cNvPicPr>
-          <p:nvPr/>
-        </p:nvPicPr>
-        <p:blipFill>
-          <a:blip r:embed="rId13">
-            <a:extLst>
-              <a:ext uri="{96DAC541-7B7A-43D3-8B79-37D633B846F1}">
-                <asvg:svgBlip xmlns:asvg="http://schemas.microsoft.com/office/drawing/2016/SVG/main" r:embed="rId14"/>
-              </a:ext>
-            </a:extLst>
-          </a:blip>
-          <a:stretch>
-            <a:fillRect/>
-          </a:stretch>
-        </p:blipFill>
-        <p:spPr>
-          <a:xfrm>
-            <a:off x="5742451" y="5668703"/>
-            <a:ext cx="593079" cy="593079"/>
-          </a:xfrm>
-          <a:prstGeom prst="rect">
-            <a:avLst/>
-          </a:prstGeom>
-        </p:spPr>
-      </p:pic>
-      <p:sp>
-        <p:nvSpPr>
-          <p:cNvPr id="1087" name="TextBox 1086">
-            <a:extLst>
-              <a:ext uri="{FF2B5EF4-FFF2-40B4-BE49-F238E27FC236}">
-                <a16:creationId xmlns:a16="http://schemas.microsoft.com/office/drawing/2014/main" id="{5F7285D1-5D72-AFA6-BD34-C6E8DDFD6986}"/>
-              </a:ext>
-            </a:extLst>
-          </p:cNvPr>
-          <p:cNvSpPr txBox="1"/>
-          <p:nvPr/>
-        </p:nvSpPr>
-        <p:spPr>
-          <a:xfrm>
-            <a:off x="7939782" y="747016"/>
-            <a:ext cx="632826" cy="369332"/>
-          </a:xfrm>
-          <a:prstGeom prst="rect">
-            <a:avLst/>
-          </a:prstGeom>
-          <a:noFill/>
-        </p:spPr>
-        <p:txBody>
-          <a:bodyPr wrap="square" rtlCol="0">
-            <a:spAutoFit/>
-          </a:bodyPr>
-          <a:lstStyle/>
-          <a:p>
+            <a:pPr marL="0" indent="0">
+              <a:buNone/>
+            </a:pPr>
             <a:r>
               <a:rPr lang="en-US" dirty="0"/>
-              <a:t>1.</a:t>
-            </a:r>
-          </a:p>
-        </p:txBody>
-      </p:sp>
-      <p:sp>
-        <p:nvSpPr>
-          <p:cNvPr id="1088" name="TextBox 1087">
-            <a:extLst>
-              <a:ext uri="{FF2B5EF4-FFF2-40B4-BE49-F238E27FC236}">
-                <a16:creationId xmlns:a16="http://schemas.microsoft.com/office/drawing/2014/main" id="{71018866-7997-6C2E-4450-D3D04C193D90}"/>
-              </a:ext>
-            </a:extLst>
-          </p:cNvPr>
-          <p:cNvSpPr txBox="1"/>
-          <p:nvPr/>
-        </p:nvSpPr>
-        <p:spPr>
-          <a:xfrm>
-            <a:off x="6690685" y="1717615"/>
-            <a:ext cx="632826" cy="369332"/>
-          </a:xfrm>
-          <a:prstGeom prst="rect">
-            <a:avLst/>
-          </a:prstGeom>
-          <a:noFill/>
-        </p:spPr>
-        <p:txBody>
-          <a:bodyPr wrap="square" rtlCol="0">
-            <a:spAutoFit/>
-          </a:bodyPr>
-          <a:lstStyle/>
-          <a:p>
-            <a:r>
-              <a:rPr lang="en-US" dirty="0"/>
-              <a:t>2.</a:t>
-            </a:r>
-          </a:p>
-        </p:txBody>
-      </p:sp>
-      <p:sp>
-        <p:nvSpPr>
-          <p:cNvPr id="1089" name="Title 1">
-            <a:extLst>
-              <a:ext uri="{FF2B5EF4-FFF2-40B4-BE49-F238E27FC236}">
-                <a16:creationId xmlns:a16="http://schemas.microsoft.com/office/drawing/2014/main" id="{CFA349ED-ACE8-1B5A-0A21-B78C12B530EA}"/>
-              </a:ext>
-            </a:extLst>
-          </p:cNvPr>
-          <p:cNvSpPr txBox="1">
-            <a:spLocks/>
-          </p:cNvSpPr>
-          <p:nvPr/>
-        </p:nvSpPr>
-        <p:spPr>
-          <a:xfrm>
-            <a:off x="838200" y="874575"/>
-            <a:ext cx="10515600" cy="1325563"/>
-          </a:xfrm>
-          <a:prstGeom prst="rect">
-            <a:avLst/>
-          </a:prstGeom>
-          <a:ln>
-            <a:noFill/>
-          </a:ln>
-        </p:spPr>
-        <p:txBody>
-          <a:bodyPr vert="horz" lIns="91440" tIns="45720" rIns="91440" bIns="45720" rtlCol="0" anchor="ctr">
-            <a:normAutofit/>
-          </a:bodyPr>
-          <a:lstStyle>
-            <a:lvl1pPr algn="l" defTabSz="914400" rtl="0" eaLnBrk="1" latinLnBrk="0" hangingPunct="1">
-              <a:lnSpc>
-                <a:spcPct val="90000"/>
-              </a:lnSpc>
-              <a:spcBef>
-                <a:spcPct val="0"/>
-              </a:spcBef>
+              <a:t>RAG: Combines the Strengths of LLMs with external data sourcing</a:t>
+            </a:r>
+          </a:p>
+          <a:p>
+            <a:r>
+              <a:rPr lang="en-US" sz="2400" dirty="0"/>
+              <a:t>Instead of finetuning, RAG adds all relevant information from the documents (or databases/APIs) into the prompt.</a:t>
+            </a:r>
+          </a:p>
+          <a:p>
+            <a:r>
+              <a:rPr lang="en-US" sz="2400" dirty="0"/>
+              <a:t>Addresses key limitations of LLMs like outdated knowledge and hallucination</a:t>
+            </a:r>
+          </a:p>
+          <a:p>
+            <a:pPr marL="0" indent="0">
               <a:buNone/>
-              <a:defRPr sz="4400" kern="1200">
-                <a:solidFill>
-                  <a:schemeClr val="tx1"/>
-                </a:solidFill>
-                <a:latin typeface="+mj-lt"/>
-                <a:ea typeface="+mj-ea"/>
-                <a:cs typeface="+mj-cs"/>
-              </a:defRPr>
-            </a:lvl1pPr>
-          </a:lstStyle>
-          <a:p>
-            <a:r>
-              <a:rPr lang="en-US" sz="2800" i="1" dirty="0"/>
-              <a:t>Full Pipeline</a:t>
-            </a:r>
-          </a:p>
-        </p:txBody>
-      </p:sp>
-      <p:sp>
-        <p:nvSpPr>
-          <p:cNvPr id="1094" name="TextBox 1093">
-            <a:extLst>
-              <a:ext uri="{FF2B5EF4-FFF2-40B4-BE49-F238E27FC236}">
-                <a16:creationId xmlns:a16="http://schemas.microsoft.com/office/drawing/2014/main" id="{DFD20E70-7EB1-4850-BBBC-AD603DFB30E2}"/>
-              </a:ext>
-            </a:extLst>
-          </p:cNvPr>
-          <p:cNvSpPr txBox="1"/>
-          <p:nvPr/>
-        </p:nvSpPr>
-        <p:spPr>
-          <a:xfrm>
-            <a:off x="6727131" y="3049962"/>
-            <a:ext cx="632826" cy="369332"/>
-          </a:xfrm>
-          <a:prstGeom prst="rect">
-            <a:avLst/>
-          </a:prstGeom>
-          <a:noFill/>
-        </p:spPr>
-        <p:txBody>
-          <a:bodyPr wrap="square" rtlCol="0">
-            <a:spAutoFit/>
-          </a:bodyPr>
-          <a:lstStyle/>
-          <a:p>
-            <a:r>
-              <a:rPr lang="en-US" dirty="0"/>
-              <a:t>3.</a:t>
-            </a:r>
-          </a:p>
-        </p:txBody>
-      </p:sp>
-      <p:sp>
-        <p:nvSpPr>
-          <p:cNvPr id="1095" name="TextBox 1094">
-            <a:extLst>
-              <a:ext uri="{FF2B5EF4-FFF2-40B4-BE49-F238E27FC236}">
-                <a16:creationId xmlns:a16="http://schemas.microsoft.com/office/drawing/2014/main" id="{0200D882-2F17-CECB-05C8-6186DAE57BD0}"/>
-              </a:ext>
-            </a:extLst>
-          </p:cNvPr>
-          <p:cNvSpPr txBox="1"/>
-          <p:nvPr/>
-        </p:nvSpPr>
-        <p:spPr>
-          <a:xfrm>
-            <a:off x="6762370" y="4135587"/>
-            <a:ext cx="632826" cy="369332"/>
-          </a:xfrm>
-          <a:prstGeom prst="rect">
-            <a:avLst/>
-          </a:prstGeom>
-          <a:noFill/>
-        </p:spPr>
-        <p:txBody>
-          <a:bodyPr wrap="square" rtlCol="0">
-            <a:spAutoFit/>
-          </a:bodyPr>
-          <a:lstStyle/>
-          <a:p>
-            <a:r>
-              <a:rPr lang="en-US" dirty="0"/>
-              <a:t>4.</a:t>
-            </a:r>
-          </a:p>
-        </p:txBody>
-      </p:sp>
-      <p:sp>
-        <p:nvSpPr>
-          <p:cNvPr id="1096" name="TextBox 1095">
-            <a:extLst>
-              <a:ext uri="{FF2B5EF4-FFF2-40B4-BE49-F238E27FC236}">
-                <a16:creationId xmlns:a16="http://schemas.microsoft.com/office/drawing/2014/main" id="{1CA7F4E5-0E20-CAB9-E7A8-5BDDB0330F6A}"/>
-              </a:ext>
-            </a:extLst>
-          </p:cNvPr>
-          <p:cNvSpPr txBox="1"/>
-          <p:nvPr/>
-        </p:nvSpPr>
-        <p:spPr>
-          <a:xfrm>
-            <a:off x="6762370" y="5239102"/>
-            <a:ext cx="632826" cy="369332"/>
-          </a:xfrm>
-          <a:prstGeom prst="rect">
-            <a:avLst/>
-          </a:prstGeom>
-          <a:noFill/>
-        </p:spPr>
-        <p:txBody>
-          <a:bodyPr wrap="square" rtlCol="0">
-            <a:spAutoFit/>
-          </a:bodyPr>
-          <a:lstStyle/>
-          <a:p>
-            <a:r>
-              <a:rPr lang="en-US" dirty="0"/>
-              <a:t>5.</a:t>
-            </a:r>
-          </a:p>
-        </p:txBody>
-      </p:sp>
-      <p:sp>
-        <p:nvSpPr>
-          <p:cNvPr id="1099" name="Rectangle 1098">
-            <a:extLst>
-              <a:ext uri="{FF2B5EF4-FFF2-40B4-BE49-F238E27FC236}">
-                <a16:creationId xmlns:a16="http://schemas.microsoft.com/office/drawing/2014/main" id="{4B3F4EFE-EA4D-5FA7-EF0A-9CD4A4EA8AA8}"/>
-              </a:ext>
-            </a:extLst>
-          </p:cNvPr>
-          <p:cNvSpPr/>
-          <p:nvPr/>
-        </p:nvSpPr>
-        <p:spPr>
-          <a:xfrm>
-            <a:off x="680936" y="2200138"/>
-            <a:ext cx="4587735" cy="3852471"/>
-          </a:xfrm>
-          <a:prstGeom prst="rect">
-            <a:avLst/>
-          </a:prstGeom>
-          <a:noFill/>
-          <a:ln w="28575">
-            <a:solidFill>
-              <a:schemeClr val="tx1"/>
-            </a:solidFill>
-          </a:ln>
-        </p:spPr>
-        <p:style>
-          <a:lnRef idx="2">
-            <a:schemeClr val="accent1">
-              <a:shade val="15000"/>
-            </a:schemeClr>
-          </a:lnRef>
-          <a:fillRef idx="1">
-            <a:schemeClr val="accent1"/>
-          </a:fillRef>
-          <a:effectRef idx="0">
-            <a:schemeClr val="accent1"/>
-          </a:effectRef>
-          <a:fontRef idx="minor">
-            <a:schemeClr val="lt1"/>
-          </a:fontRef>
-        </p:style>
-        <p:txBody>
-          <a:bodyPr rtlCol="0" anchor="ctr"/>
-          <a:lstStyle/>
-          <a:p>
-            <a:pPr algn="ctr"/>
+            </a:pPr>
+            <a:endParaRPr lang="en-US" sz="2400" dirty="0"/>
+          </a:p>
+          <a:p>
+            <a:r>
+              <a:rPr lang="en-US" sz="2400" dirty="0"/>
+              <a:t>Benefits:</a:t>
+            </a:r>
+          </a:p>
+          <a:p>
+            <a:pPr lvl="1"/>
+            <a:r>
+              <a:rPr lang="en-US" sz="2000" dirty="0"/>
+              <a:t>No need for finetuning and associated costs (labeling/compute)</a:t>
+            </a:r>
+          </a:p>
+          <a:p>
+            <a:pPr lvl="1"/>
+            <a:r>
+              <a:rPr lang="en-US" sz="2000" dirty="0"/>
+              <a:t>Much faster</a:t>
+            </a:r>
+          </a:p>
+          <a:p>
+            <a:pPr lvl="1"/>
+            <a:r>
+              <a:rPr lang="en-US" sz="2000" dirty="0"/>
+              <a:t>Allows for flexibility and relevance at runtime.</a:t>
+            </a:r>
+          </a:p>
+          <a:p>
+            <a:pPr marL="0" indent="0">
+              <a:buNone/>
+            </a:pPr>
             <a:endParaRPr lang="en-US" dirty="0"/>
           </a:p>
-        </p:txBody>
-      </p:sp>
-      <p:sp>
-        <p:nvSpPr>
-          <p:cNvPr id="1101" name="TextBox 1100">
-            <a:extLst>
-              <a:ext uri="{FF2B5EF4-FFF2-40B4-BE49-F238E27FC236}">
-                <a16:creationId xmlns:a16="http://schemas.microsoft.com/office/drawing/2014/main" id="{43E88151-4E49-56D0-D815-92B24036E97D}"/>
-              </a:ext>
-            </a:extLst>
-          </p:cNvPr>
-          <p:cNvSpPr txBox="1"/>
-          <p:nvPr/>
-        </p:nvSpPr>
-        <p:spPr>
-          <a:xfrm>
-            <a:off x="8256195" y="5490959"/>
-            <a:ext cx="3747679" cy="830997"/>
-          </a:xfrm>
-          <a:prstGeom prst="rect">
-            <a:avLst/>
-          </a:prstGeom>
-          <a:noFill/>
-        </p:spPr>
-        <p:txBody>
-          <a:bodyPr wrap="square" rtlCol="0">
-            <a:spAutoFit/>
-          </a:bodyPr>
-          <a:lstStyle/>
-          <a:p>
-            <a:r>
-              <a:rPr lang="en-US" sz="2400" i="1" dirty="0"/>
-              <a:t>Retrieval Augmented Generation </a:t>
-            </a:r>
-          </a:p>
-        </p:txBody>
-      </p:sp>
-      <p:cxnSp>
-        <p:nvCxnSpPr>
-          <p:cNvPr id="6" name="Elbow Connector 5">
-            <a:extLst>
-              <a:ext uri="{FF2B5EF4-FFF2-40B4-BE49-F238E27FC236}">
-                <a16:creationId xmlns:a16="http://schemas.microsoft.com/office/drawing/2014/main" id="{800C80CA-7C89-9700-14DE-75534396F173}"/>
-              </a:ext>
-            </a:extLst>
-          </p:cNvPr>
-          <p:cNvCxnSpPr>
-            <a:cxnSpLocks/>
-            <a:stCxn id="63" idx="2"/>
-            <a:endCxn id="1047" idx="3"/>
-          </p:cNvCxnSpPr>
-          <p:nvPr/>
-        </p:nvCxnSpPr>
-        <p:spPr>
-          <a:xfrm rot="5400000">
-            <a:off x="7055553" y="2234137"/>
-            <a:ext cx="3400390" cy="1867442"/>
-          </a:xfrm>
-          <a:prstGeom prst="bentConnector2">
-            <a:avLst/>
-          </a:prstGeom>
-          <a:ln>
-            <a:tailEnd type="triangle"/>
-          </a:ln>
-        </p:spPr>
-        <p:style>
-          <a:lnRef idx="2">
-            <a:schemeClr val="accent1"/>
-          </a:lnRef>
-          <a:fillRef idx="0">
-            <a:schemeClr val="accent1"/>
-          </a:fillRef>
-          <a:effectRef idx="1">
-            <a:schemeClr val="accent1"/>
-          </a:effectRef>
-          <a:fontRef idx="minor">
-            <a:schemeClr val="tx1"/>
-          </a:fontRef>
-        </p:style>
-      </p:cxnSp>
+          <a:p>
+            <a:pPr marL="0" indent="0">
+              <a:buNone/>
+            </a:pPr>
+            <a:endParaRPr lang="en-US" dirty="0"/>
+          </a:p>
+        </p:txBody>
+      </p:sp>
     </p:spTree>
     <p:extLst>
       <p:ext uri="{BB962C8B-B14F-4D97-AF65-F5344CB8AC3E}">
-        <p14:creationId xmlns:p14="http://schemas.microsoft.com/office/powerpoint/2010/main" val="3564316749"/>
+        <p14:creationId xmlns:p14="http://schemas.microsoft.com/office/powerpoint/2010/main" val="1449021149"/>
       </p:ext>
     </p:extLst>
   </p:cSld>
@@ -8390,7 +7372,7 @@
           <p:cNvPr id="2" name="Title 1">
             <a:extLst>
               <a:ext uri="{FF2B5EF4-FFF2-40B4-BE49-F238E27FC236}">
-                <a16:creationId xmlns:a16="http://schemas.microsoft.com/office/drawing/2014/main" id="{AFD2DD15-2DC1-CC2C-84A0-909D9EF8A523}"/>
+                <a16:creationId xmlns:a16="http://schemas.microsoft.com/office/drawing/2014/main" id="{2D68AB46-0E26-B99E-03D4-B720F6AD3C90}"/>
               </a:ext>
             </a:extLst>
           </p:cNvPr>
@@ -8407,18 +7389,1487 @@
           <a:lstStyle/>
           <a:p>
             <a:r>
+              <a:rPr lang="en-US" dirty="0">
+                <a:solidFill>
+                  <a:sysClr val="windowText" lastClr="000000"/>
+                </a:solidFill>
+              </a:rPr>
+              <a:t>RAG Overview:</a:t>
+            </a:r>
+          </a:p>
+        </p:txBody>
+      </p:sp>
+      <p:sp>
+        <p:nvSpPr>
+          <p:cNvPr id="4" name="Rectangle 3">
+            <a:extLst>
+              <a:ext uri="{FF2B5EF4-FFF2-40B4-BE49-F238E27FC236}">
+                <a16:creationId xmlns:a16="http://schemas.microsoft.com/office/drawing/2014/main" id="{A9580D6B-63AD-FB87-7AA2-2588F83271B2}"/>
+              </a:ext>
+            </a:extLst>
+          </p:cNvPr>
+          <p:cNvSpPr/>
+          <p:nvPr/>
+        </p:nvSpPr>
+        <p:spPr>
+          <a:xfrm>
+            <a:off x="3180742" y="5612343"/>
+            <a:ext cx="2087929" cy="440266"/>
+          </a:xfrm>
+          <a:prstGeom prst="rect">
+            <a:avLst/>
+          </a:prstGeom>
+          <a:noFill/>
+          <a:ln w="28575">
+            <a:noFill/>
+          </a:ln>
+        </p:spPr>
+        <p:style>
+          <a:lnRef idx="2">
+            <a:schemeClr val="accent1">
+              <a:shade val="15000"/>
+            </a:schemeClr>
+          </a:lnRef>
+          <a:fillRef idx="1">
+            <a:schemeClr val="accent1"/>
+          </a:fillRef>
+          <a:effectRef idx="0">
+            <a:schemeClr val="accent1"/>
+          </a:effectRef>
+          <a:fontRef idx="minor">
+            <a:schemeClr val="lt1"/>
+          </a:fontRef>
+        </p:style>
+        <p:txBody>
+          <a:bodyPr rtlCol="0" anchor="ctr"/>
+          <a:lstStyle/>
+          <a:p>
+            <a:pPr algn="ctr"/>
+            <a:r>
+              <a:rPr lang="en-US" i="1" dirty="0">
+                <a:solidFill>
+                  <a:sysClr val="windowText" lastClr="000000"/>
+                </a:solidFill>
+              </a:rPr>
+              <a:t>Data Preparation</a:t>
+            </a:r>
+          </a:p>
+        </p:txBody>
+      </p:sp>
+      <p:sp>
+        <p:nvSpPr>
+          <p:cNvPr id="5" name="Rectangle 4">
+            <a:extLst>
+              <a:ext uri="{FF2B5EF4-FFF2-40B4-BE49-F238E27FC236}">
+                <a16:creationId xmlns:a16="http://schemas.microsoft.com/office/drawing/2014/main" id="{CCC61D8B-4BE5-1E62-0551-6693BB460F3C}"/>
+              </a:ext>
+            </a:extLst>
+          </p:cNvPr>
+          <p:cNvSpPr/>
+          <p:nvPr/>
+        </p:nvSpPr>
+        <p:spPr>
+          <a:xfrm>
+            <a:off x="838201" y="4736041"/>
+            <a:ext cx="1871118" cy="1006123"/>
+          </a:xfrm>
+          <a:prstGeom prst="rect">
+            <a:avLst/>
+          </a:prstGeom>
+          <a:noFill/>
+          <a:ln>
+            <a:solidFill>
+              <a:schemeClr val="tx1"/>
+            </a:solidFill>
+          </a:ln>
+        </p:spPr>
+        <p:style>
+          <a:lnRef idx="2">
+            <a:schemeClr val="accent1">
+              <a:shade val="15000"/>
+            </a:schemeClr>
+          </a:lnRef>
+          <a:fillRef idx="1">
+            <a:schemeClr val="accent1"/>
+          </a:fillRef>
+          <a:effectRef idx="0">
+            <a:schemeClr val="accent1"/>
+          </a:effectRef>
+          <a:fontRef idx="minor">
+            <a:schemeClr val="lt1"/>
+          </a:fontRef>
+        </p:style>
+        <p:txBody>
+          <a:bodyPr rtlCol="0" anchor="ctr"/>
+          <a:lstStyle/>
+          <a:p>
+            <a:pPr algn="r"/>
+            <a:r>
+              <a:rPr lang="en-US" sz="1600" dirty="0">
+                <a:solidFill>
+                  <a:sysClr val="windowText" lastClr="000000"/>
+                </a:solidFill>
+              </a:rPr>
+              <a:t>Raw Data</a:t>
+            </a:r>
+          </a:p>
+          <a:p>
+            <a:pPr algn="r"/>
+            <a:r>
+              <a:rPr lang="en-US" sz="1600" dirty="0">
+                <a:solidFill>
+                  <a:sysClr val="windowText" lastClr="000000"/>
+                </a:solidFill>
+              </a:rPr>
+              <a:t>Sources</a:t>
+            </a:r>
+          </a:p>
+        </p:txBody>
+      </p:sp>
+      <p:pic>
+        <p:nvPicPr>
+          <p:cNvPr id="1026" name="Picture 2" descr="Raw-Data Icons - Free SVG &amp; PNG Raw-Data Images - Noun Project">
+            <a:extLst>
+              <a:ext uri="{FF2B5EF4-FFF2-40B4-BE49-F238E27FC236}">
+                <a16:creationId xmlns:a16="http://schemas.microsoft.com/office/drawing/2014/main" id="{046C2B26-D1A9-9C16-DBF5-0994E33D5BA5}"/>
+              </a:ext>
+            </a:extLst>
+          </p:cNvPr>
+          <p:cNvPicPr>
+            <a:picLocks noChangeAspect="1" noChangeArrowheads="1"/>
+          </p:cNvPicPr>
+          <p:nvPr/>
+        </p:nvPicPr>
+        <p:blipFill>
+          <a:blip r:embed="rId2">
+            <a:extLst>
+              <a:ext uri="{28A0092B-C50C-407E-A947-70E740481C1C}">
+                <a14:useLocalDpi xmlns:a14="http://schemas.microsoft.com/office/drawing/2010/main" val="0"/>
+              </a:ext>
+            </a:extLst>
+          </a:blip>
+          <a:srcRect/>
+          <a:stretch>
+            <a:fillRect/>
+          </a:stretch>
+        </p:blipFill>
+        <p:spPr bwMode="auto">
+          <a:xfrm>
+            <a:off x="1077920" y="4851501"/>
+            <a:ext cx="697257" cy="697257"/>
+          </a:xfrm>
+          <a:prstGeom prst="rect">
+            <a:avLst/>
+          </a:prstGeom>
+          <a:noFill/>
+          <a:extLst>
+            <a:ext uri="{909E8E84-426E-40DD-AFC4-6F175D3DCCD1}">
+              <a14:hiddenFill xmlns:a14="http://schemas.microsoft.com/office/drawing/2010/main">
+                <a:solidFill>
+                  <a:srgbClr val="FFFFFF"/>
+                </a:solidFill>
+              </a14:hiddenFill>
+            </a:ext>
+          </a:extLst>
+        </p:spPr>
+      </p:pic>
+      <p:sp>
+        <p:nvSpPr>
+          <p:cNvPr id="20" name="Rectangle 19">
+            <a:extLst>
+              <a:ext uri="{FF2B5EF4-FFF2-40B4-BE49-F238E27FC236}">
+                <a16:creationId xmlns:a16="http://schemas.microsoft.com/office/drawing/2014/main" id="{6112AB0A-5EC1-5AC1-9BC9-52598476D634}"/>
+              </a:ext>
+            </a:extLst>
+          </p:cNvPr>
+          <p:cNvSpPr/>
+          <p:nvPr/>
+        </p:nvSpPr>
+        <p:spPr>
+          <a:xfrm>
+            <a:off x="838201" y="3343781"/>
+            <a:ext cx="1871117" cy="1081817"/>
+          </a:xfrm>
+          <a:prstGeom prst="rect">
+            <a:avLst/>
+          </a:prstGeom>
+          <a:noFill/>
+          <a:ln>
+            <a:solidFill>
+              <a:schemeClr val="tx1"/>
+            </a:solidFill>
+          </a:ln>
+        </p:spPr>
+        <p:style>
+          <a:lnRef idx="2">
+            <a:schemeClr val="accent1">
+              <a:shade val="15000"/>
+            </a:schemeClr>
+          </a:lnRef>
+          <a:fillRef idx="1">
+            <a:schemeClr val="accent1"/>
+          </a:fillRef>
+          <a:effectRef idx="0">
+            <a:schemeClr val="accent1"/>
+          </a:effectRef>
+          <a:fontRef idx="minor">
+            <a:schemeClr val="lt1"/>
+          </a:fontRef>
+        </p:style>
+        <p:txBody>
+          <a:bodyPr rtlCol="0" anchor="ctr"/>
+          <a:lstStyle/>
+          <a:p>
+            <a:pPr algn="r"/>
+            <a:r>
+              <a:rPr lang="en-US" sz="1600" dirty="0">
+                <a:solidFill>
+                  <a:sysClr val="windowText" lastClr="000000"/>
+                </a:solidFill>
+              </a:rPr>
+              <a:t>Information </a:t>
+            </a:r>
+          </a:p>
+          <a:p>
+            <a:pPr algn="r"/>
+            <a:r>
+              <a:rPr lang="en-US" sz="1600" dirty="0">
+                <a:solidFill>
+                  <a:sysClr val="windowText" lastClr="000000"/>
+                </a:solidFill>
+              </a:rPr>
+              <a:t>Extraction</a:t>
+            </a:r>
+          </a:p>
+        </p:txBody>
+      </p:sp>
+      <p:pic>
+        <p:nvPicPr>
+          <p:cNvPr id="22" name="Picture 21">
+            <a:extLst>
+              <a:ext uri="{FF2B5EF4-FFF2-40B4-BE49-F238E27FC236}">
+                <a16:creationId xmlns:a16="http://schemas.microsoft.com/office/drawing/2014/main" id="{D6849B42-8348-A3D6-C6BC-A281E3B4EF93}"/>
+              </a:ext>
+            </a:extLst>
+          </p:cNvPr>
+          <p:cNvPicPr>
+            <a:picLocks noChangeAspect="1"/>
+          </p:cNvPicPr>
+          <p:nvPr/>
+        </p:nvPicPr>
+        <p:blipFill>
+          <a:blip r:embed="rId3"/>
+          <a:srcRect l="-762" t="-5651" r="762" b="19524"/>
+          <a:stretch>
+            <a:fillRect/>
+          </a:stretch>
+        </p:blipFill>
+        <p:spPr>
+          <a:xfrm>
+            <a:off x="838200" y="3494648"/>
+            <a:ext cx="807145" cy="695170"/>
+          </a:xfrm>
+          <a:prstGeom prst="rect">
+            <a:avLst/>
+          </a:prstGeom>
+        </p:spPr>
+      </p:pic>
+      <p:cxnSp>
+        <p:nvCxnSpPr>
+          <p:cNvPr id="25" name="Straight Arrow Connector 24">
+            <a:extLst>
+              <a:ext uri="{FF2B5EF4-FFF2-40B4-BE49-F238E27FC236}">
+                <a16:creationId xmlns:a16="http://schemas.microsoft.com/office/drawing/2014/main" id="{B83C3C82-AF50-82AA-D038-05B2F7AEF3B7}"/>
+              </a:ext>
+            </a:extLst>
+          </p:cNvPr>
+          <p:cNvCxnSpPr/>
+          <p:nvPr/>
+        </p:nvCxnSpPr>
+        <p:spPr>
+          <a:xfrm flipH="1" flipV="1">
+            <a:off x="1950152" y="4425596"/>
+            <a:ext cx="1" cy="310445"/>
+          </a:xfrm>
+          <a:prstGeom prst="straightConnector1">
+            <a:avLst/>
+          </a:prstGeom>
+          <a:ln>
+            <a:tailEnd type="triangle"/>
+          </a:ln>
+        </p:spPr>
+        <p:style>
+          <a:lnRef idx="2">
+            <a:schemeClr val="accent1"/>
+          </a:lnRef>
+          <a:fillRef idx="0">
+            <a:schemeClr val="accent1"/>
+          </a:fillRef>
+          <a:effectRef idx="1">
+            <a:schemeClr val="accent1"/>
+          </a:effectRef>
+          <a:fontRef idx="minor">
+            <a:schemeClr val="tx1"/>
+          </a:fontRef>
+        </p:style>
+      </p:cxnSp>
+      <p:cxnSp>
+        <p:nvCxnSpPr>
+          <p:cNvPr id="26" name="Straight Arrow Connector 25">
+            <a:extLst>
+              <a:ext uri="{FF2B5EF4-FFF2-40B4-BE49-F238E27FC236}">
+                <a16:creationId xmlns:a16="http://schemas.microsoft.com/office/drawing/2014/main" id="{F60B01A6-1685-DE41-0EE7-6033C6277645}"/>
+              </a:ext>
+            </a:extLst>
+          </p:cNvPr>
+          <p:cNvCxnSpPr/>
+          <p:nvPr/>
+        </p:nvCxnSpPr>
+        <p:spPr>
+          <a:xfrm flipH="1" flipV="1">
+            <a:off x="1950152" y="3033844"/>
+            <a:ext cx="1" cy="310445"/>
+          </a:xfrm>
+          <a:prstGeom prst="straightConnector1">
+            <a:avLst/>
+          </a:prstGeom>
+          <a:ln>
+            <a:tailEnd type="triangle"/>
+          </a:ln>
+        </p:spPr>
+        <p:style>
+          <a:lnRef idx="2">
+            <a:schemeClr val="accent1"/>
+          </a:lnRef>
+          <a:fillRef idx="0">
+            <a:schemeClr val="accent1"/>
+          </a:fillRef>
+          <a:effectRef idx="1">
+            <a:schemeClr val="accent1"/>
+          </a:effectRef>
+          <a:fontRef idx="minor">
+            <a:schemeClr val="tx1"/>
+          </a:fontRef>
+        </p:style>
+      </p:cxnSp>
+      <p:sp>
+        <p:nvSpPr>
+          <p:cNvPr id="27" name="Rectangle 26">
+            <a:extLst>
+              <a:ext uri="{FF2B5EF4-FFF2-40B4-BE49-F238E27FC236}">
+                <a16:creationId xmlns:a16="http://schemas.microsoft.com/office/drawing/2014/main" id="{155AE0A1-2930-F2FE-D6E0-399A53D1764A}"/>
+              </a:ext>
+            </a:extLst>
+          </p:cNvPr>
+          <p:cNvSpPr/>
+          <p:nvPr/>
+        </p:nvSpPr>
+        <p:spPr>
+          <a:xfrm>
+            <a:off x="838200" y="2338166"/>
+            <a:ext cx="1871123" cy="695170"/>
+          </a:xfrm>
+          <a:prstGeom prst="rect">
+            <a:avLst/>
+          </a:prstGeom>
+          <a:noFill/>
+          <a:ln>
+            <a:solidFill>
+              <a:schemeClr val="tx1"/>
+            </a:solidFill>
+          </a:ln>
+        </p:spPr>
+        <p:style>
+          <a:lnRef idx="2">
+            <a:schemeClr val="accent1">
+              <a:shade val="15000"/>
+            </a:schemeClr>
+          </a:lnRef>
+          <a:fillRef idx="1">
+            <a:schemeClr val="accent1"/>
+          </a:fillRef>
+          <a:effectRef idx="0">
+            <a:schemeClr val="accent1"/>
+          </a:effectRef>
+          <a:fontRef idx="minor">
+            <a:schemeClr val="lt1"/>
+          </a:fontRef>
+        </p:style>
+        <p:txBody>
+          <a:bodyPr rtlCol="0" anchor="ctr"/>
+          <a:lstStyle/>
+          <a:p>
+            <a:pPr algn="r"/>
+            <a:r>
+              <a:rPr lang="en-US" sz="1600" dirty="0">
+                <a:solidFill>
+                  <a:sysClr val="windowText" lastClr="000000"/>
+                </a:solidFill>
+              </a:rPr>
+              <a:t>Chunking</a:t>
+            </a:r>
+          </a:p>
+        </p:txBody>
+      </p:sp>
+      <p:pic>
+        <p:nvPicPr>
+          <p:cNvPr id="31" name="Graphic 30" descr="Chat bubble outline">
+            <a:extLst>
+              <a:ext uri="{FF2B5EF4-FFF2-40B4-BE49-F238E27FC236}">
+                <a16:creationId xmlns:a16="http://schemas.microsoft.com/office/drawing/2014/main" id="{69714D00-7C55-BA63-B470-517D09400510}"/>
+              </a:ext>
+            </a:extLst>
+          </p:cNvPr>
+          <p:cNvPicPr>
+            <a:picLocks noChangeAspect="1"/>
+          </p:cNvPicPr>
+          <p:nvPr/>
+        </p:nvPicPr>
+        <p:blipFill>
+          <a:blip r:embed="rId4">
+            <a:extLst>
+              <a:ext uri="{96DAC541-7B7A-43D3-8B79-37D633B846F1}">
+                <asvg:svgBlip xmlns:asvg="http://schemas.microsoft.com/office/drawing/2016/SVG/main" r:embed="rId5"/>
+              </a:ext>
+            </a:extLst>
+          </a:blip>
+          <a:stretch>
+            <a:fillRect/>
+          </a:stretch>
+        </p:blipFill>
+        <p:spPr>
+          <a:xfrm>
+            <a:off x="969345" y="2306987"/>
+            <a:ext cx="805828" cy="805828"/>
+          </a:xfrm>
+          <a:prstGeom prst="rect">
+            <a:avLst/>
+          </a:prstGeom>
+        </p:spPr>
+      </p:pic>
+      <p:cxnSp>
+        <p:nvCxnSpPr>
+          <p:cNvPr id="34" name="Straight Arrow Connector 33">
+            <a:extLst>
+              <a:ext uri="{FF2B5EF4-FFF2-40B4-BE49-F238E27FC236}">
+                <a16:creationId xmlns:a16="http://schemas.microsoft.com/office/drawing/2014/main" id="{E753D5D3-C45B-ACAF-2BA6-9D052218083C}"/>
+              </a:ext>
+            </a:extLst>
+          </p:cNvPr>
+          <p:cNvCxnSpPr>
+            <a:cxnSpLocks/>
+            <a:stCxn id="27" idx="3"/>
+            <a:endCxn id="35" idx="1"/>
+          </p:cNvCxnSpPr>
+          <p:nvPr/>
+        </p:nvCxnSpPr>
+        <p:spPr>
+          <a:xfrm>
+            <a:off x="2709323" y="2685751"/>
+            <a:ext cx="405853" cy="0"/>
+          </a:xfrm>
+          <a:prstGeom prst="straightConnector1">
+            <a:avLst/>
+          </a:prstGeom>
+          <a:ln>
+            <a:tailEnd type="triangle"/>
+          </a:ln>
+        </p:spPr>
+        <p:style>
+          <a:lnRef idx="2">
+            <a:schemeClr val="accent1"/>
+          </a:lnRef>
+          <a:fillRef idx="0">
+            <a:schemeClr val="accent1"/>
+          </a:fillRef>
+          <a:effectRef idx="1">
+            <a:schemeClr val="accent1"/>
+          </a:effectRef>
+          <a:fontRef idx="minor">
+            <a:schemeClr val="tx1"/>
+          </a:fontRef>
+        </p:style>
+      </p:cxnSp>
+      <p:sp>
+        <p:nvSpPr>
+          <p:cNvPr id="35" name="Rectangle 34">
+            <a:extLst>
+              <a:ext uri="{FF2B5EF4-FFF2-40B4-BE49-F238E27FC236}">
+                <a16:creationId xmlns:a16="http://schemas.microsoft.com/office/drawing/2014/main" id="{E626CC24-D878-8A5E-83E8-F55C6F5F1E0A}"/>
+              </a:ext>
+            </a:extLst>
+          </p:cNvPr>
+          <p:cNvSpPr/>
+          <p:nvPr/>
+        </p:nvSpPr>
+        <p:spPr>
+          <a:xfrm>
+            <a:off x="3115176" y="2325427"/>
+            <a:ext cx="1909317" cy="720647"/>
+          </a:xfrm>
+          <a:prstGeom prst="rect">
+            <a:avLst/>
+          </a:prstGeom>
+          <a:noFill/>
+          <a:ln>
+            <a:solidFill>
+              <a:schemeClr val="tx1"/>
+            </a:solidFill>
+          </a:ln>
+        </p:spPr>
+        <p:style>
+          <a:lnRef idx="2">
+            <a:schemeClr val="accent1">
+              <a:shade val="15000"/>
+            </a:schemeClr>
+          </a:lnRef>
+          <a:fillRef idx="1">
+            <a:schemeClr val="accent1"/>
+          </a:fillRef>
+          <a:effectRef idx="0">
+            <a:schemeClr val="accent1"/>
+          </a:effectRef>
+          <a:fontRef idx="minor">
+            <a:schemeClr val="lt1"/>
+          </a:fontRef>
+        </p:style>
+        <p:txBody>
+          <a:bodyPr rtlCol="0" anchor="ctr"/>
+          <a:lstStyle/>
+          <a:p>
+            <a:pPr algn="r"/>
+            <a:r>
+              <a:rPr lang="en-US" sz="1600" dirty="0">
+                <a:solidFill>
+                  <a:sysClr val="windowText" lastClr="000000"/>
+                </a:solidFill>
+              </a:rPr>
+              <a:t>Embedding</a:t>
+            </a:r>
+          </a:p>
+        </p:txBody>
+      </p:sp>
+      <p:pic>
+        <p:nvPicPr>
+          <p:cNvPr id="46" name="Picture 45">
+            <a:extLst>
+              <a:ext uri="{FF2B5EF4-FFF2-40B4-BE49-F238E27FC236}">
+                <a16:creationId xmlns:a16="http://schemas.microsoft.com/office/drawing/2014/main" id="{73A0A7C0-BE42-BFC8-F908-277CDED47103}"/>
+              </a:ext>
+            </a:extLst>
+          </p:cNvPr>
+          <p:cNvPicPr>
+            <a:picLocks noChangeAspect="1"/>
+          </p:cNvPicPr>
+          <p:nvPr/>
+        </p:nvPicPr>
+        <p:blipFill>
+          <a:blip r:embed="rId6"/>
+          <a:srcRect b="13873"/>
+          <a:stretch>
+            <a:fillRect/>
+          </a:stretch>
+        </p:blipFill>
+        <p:spPr>
+          <a:xfrm>
+            <a:off x="3180742" y="2380728"/>
+            <a:ext cx="702732" cy="605242"/>
+          </a:xfrm>
+          <a:prstGeom prst="rect">
+            <a:avLst/>
+          </a:prstGeom>
+        </p:spPr>
+      </p:pic>
+      <p:cxnSp>
+        <p:nvCxnSpPr>
+          <p:cNvPr id="58" name="Straight Arrow Connector 57">
+            <a:extLst>
+              <a:ext uri="{FF2B5EF4-FFF2-40B4-BE49-F238E27FC236}">
+                <a16:creationId xmlns:a16="http://schemas.microsoft.com/office/drawing/2014/main" id="{01863FE4-12C1-2070-6515-E3CEC5CD77B0}"/>
+              </a:ext>
+            </a:extLst>
+          </p:cNvPr>
+          <p:cNvCxnSpPr>
+            <a:cxnSpLocks/>
+            <a:stCxn id="35" idx="3"/>
+            <a:endCxn id="60" idx="1"/>
+          </p:cNvCxnSpPr>
+          <p:nvPr/>
+        </p:nvCxnSpPr>
+        <p:spPr>
+          <a:xfrm flipV="1">
+            <a:off x="5024493" y="2683350"/>
+            <a:ext cx="522642" cy="2401"/>
+          </a:xfrm>
+          <a:prstGeom prst="straightConnector1">
+            <a:avLst/>
+          </a:prstGeom>
+          <a:ln>
+            <a:tailEnd type="triangle"/>
+          </a:ln>
+        </p:spPr>
+        <p:style>
+          <a:lnRef idx="2">
+            <a:schemeClr val="accent1"/>
+          </a:lnRef>
+          <a:fillRef idx="0">
+            <a:schemeClr val="accent1"/>
+          </a:fillRef>
+          <a:effectRef idx="1">
+            <a:schemeClr val="accent1"/>
+          </a:effectRef>
+          <a:fontRef idx="minor">
+            <a:schemeClr val="tx1"/>
+          </a:fontRef>
+        </p:style>
+      </p:cxnSp>
+      <p:pic>
+        <p:nvPicPr>
+          <p:cNvPr id="59" name="Picture 58">
+            <a:extLst>
+              <a:ext uri="{FF2B5EF4-FFF2-40B4-BE49-F238E27FC236}">
+                <a16:creationId xmlns:a16="http://schemas.microsoft.com/office/drawing/2014/main" id="{1208CDA2-07EA-53F3-BAD8-39EB87671453}"/>
+              </a:ext>
+            </a:extLst>
+          </p:cNvPr>
+          <p:cNvPicPr>
+            <a:picLocks noChangeAspect="1"/>
+          </p:cNvPicPr>
+          <p:nvPr/>
+        </p:nvPicPr>
+        <p:blipFill>
+          <a:blip r:embed="rId7"/>
+          <a:srcRect b="12576"/>
+          <a:stretch>
+            <a:fillRect/>
+          </a:stretch>
+        </p:blipFill>
+        <p:spPr>
+          <a:xfrm>
+            <a:off x="5590164" y="2391728"/>
+            <a:ext cx="683058" cy="597158"/>
+          </a:xfrm>
+          <a:prstGeom prst="rect">
+            <a:avLst/>
+          </a:prstGeom>
+        </p:spPr>
+      </p:pic>
+      <p:sp>
+        <p:nvSpPr>
+          <p:cNvPr id="60" name="Rectangle 59">
+            <a:extLst>
+              <a:ext uri="{FF2B5EF4-FFF2-40B4-BE49-F238E27FC236}">
+                <a16:creationId xmlns:a16="http://schemas.microsoft.com/office/drawing/2014/main" id="{5ACEBF82-C634-2DE7-5A46-085368B1B9DB}"/>
+              </a:ext>
+            </a:extLst>
+          </p:cNvPr>
+          <p:cNvSpPr/>
+          <p:nvPr/>
+        </p:nvSpPr>
+        <p:spPr>
+          <a:xfrm>
+            <a:off x="5547135" y="2323026"/>
+            <a:ext cx="2262684" cy="720647"/>
+          </a:xfrm>
+          <a:prstGeom prst="rect">
+            <a:avLst/>
+          </a:prstGeom>
+          <a:noFill/>
+          <a:ln>
+            <a:solidFill>
+              <a:schemeClr val="tx1"/>
+            </a:solidFill>
+          </a:ln>
+        </p:spPr>
+        <p:style>
+          <a:lnRef idx="2">
+            <a:schemeClr val="accent1">
+              <a:shade val="15000"/>
+            </a:schemeClr>
+          </a:lnRef>
+          <a:fillRef idx="1">
+            <a:schemeClr val="accent1"/>
+          </a:fillRef>
+          <a:effectRef idx="0">
+            <a:schemeClr val="accent1"/>
+          </a:effectRef>
+          <a:fontRef idx="minor">
+            <a:schemeClr val="lt1"/>
+          </a:fontRef>
+        </p:style>
+        <p:txBody>
+          <a:bodyPr rtlCol="0" anchor="ctr"/>
+          <a:lstStyle/>
+          <a:p>
+            <a:pPr algn="r"/>
+            <a:r>
+              <a:rPr lang="en-US" sz="1600" dirty="0">
+                <a:solidFill>
+                  <a:sysClr val="windowText" lastClr="000000"/>
+                </a:solidFill>
+              </a:rPr>
+              <a:t>Vector Database</a:t>
+            </a:r>
+          </a:p>
+        </p:txBody>
+      </p:sp>
+      <p:sp>
+        <p:nvSpPr>
+          <p:cNvPr id="63" name="Rectangle 62">
+            <a:extLst>
+              <a:ext uri="{FF2B5EF4-FFF2-40B4-BE49-F238E27FC236}">
+                <a16:creationId xmlns:a16="http://schemas.microsoft.com/office/drawing/2014/main" id="{92CB6A23-8BEB-4D31-BB1A-15790C39E608}"/>
+              </a:ext>
+            </a:extLst>
+          </p:cNvPr>
+          <p:cNvSpPr/>
+          <p:nvPr/>
+        </p:nvSpPr>
+        <p:spPr>
+          <a:xfrm>
+            <a:off x="8753907" y="747016"/>
+            <a:ext cx="1871123" cy="720647"/>
+          </a:xfrm>
+          <a:prstGeom prst="rect">
+            <a:avLst/>
+          </a:prstGeom>
+          <a:noFill/>
+          <a:ln>
+            <a:solidFill>
+              <a:schemeClr val="tx1"/>
+            </a:solidFill>
+          </a:ln>
+        </p:spPr>
+        <p:style>
+          <a:lnRef idx="2">
+            <a:schemeClr val="accent1">
+              <a:shade val="15000"/>
+            </a:schemeClr>
+          </a:lnRef>
+          <a:fillRef idx="1">
+            <a:schemeClr val="accent1"/>
+          </a:fillRef>
+          <a:effectRef idx="0">
+            <a:schemeClr val="accent1"/>
+          </a:effectRef>
+          <a:fontRef idx="minor">
+            <a:schemeClr val="lt1"/>
+          </a:fontRef>
+        </p:style>
+        <p:txBody>
+          <a:bodyPr rtlCol="0" anchor="ctr"/>
+          <a:lstStyle/>
+          <a:p>
+            <a:pPr algn="r"/>
+            <a:r>
+              <a:rPr lang="en-US" b="1" dirty="0">
+                <a:solidFill>
+                  <a:sysClr val="windowText" lastClr="000000"/>
+                </a:solidFill>
+              </a:rPr>
+              <a:t>Query</a:t>
+            </a:r>
+            <a:endParaRPr lang="en-US" sz="1600" b="1" dirty="0">
+              <a:solidFill>
+                <a:sysClr val="windowText" lastClr="000000"/>
+              </a:solidFill>
+            </a:endParaRPr>
+          </a:p>
+        </p:txBody>
+      </p:sp>
+      <p:pic>
+        <p:nvPicPr>
+          <p:cNvPr id="1025" name="Graphic 1024" descr="Questions with solid fill">
+            <a:extLst>
+              <a:ext uri="{FF2B5EF4-FFF2-40B4-BE49-F238E27FC236}">
+                <a16:creationId xmlns:a16="http://schemas.microsoft.com/office/drawing/2014/main" id="{D1BEE528-DC7A-5C08-9B50-CFC788B8E737}"/>
+              </a:ext>
+            </a:extLst>
+          </p:cNvPr>
+          <p:cNvPicPr>
+            <a:picLocks noChangeAspect="1"/>
+          </p:cNvPicPr>
+          <p:nvPr/>
+        </p:nvPicPr>
+        <p:blipFill>
+          <a:blip r:embed="rId8">
+            <a:extLst>
+              <a:ext uri="{96DAC541-7B7A-43D3-8B79-37D633B846F1}">
+                <asvg:svgBlip xmlns:asvg="http://schemas.microsoft.com/office/drawing/2016/SVG/main" r:embed="rId9"/>
+              </a:ext>
+            </a:extLst>
+          </a:blip>
+          <a:stretch>
+            <a:fillRect/>
+          </a:stretch>
+        </p:blipFill>
+        <p:spPr>
+          <a:xfrm>
+            <a:off x="8884539" y="747016"/>
+            <a:ext cx="720648" cy="720648"/>
+          </a:xfrm>
+          <a:prstGeom prst="rect">
+            <a:avLst/>
+          </a:prstGeom>
+        </p:spPr>
+      </p:pic>
+      <p:sp>
+        <p:nvSpPr>
+          <p:cNvPr id="1027" name="Rectangle 1026">
+            <a:extLst>
+              <a:ext uri="{FF2B5EF4-FFF2-40B4-BE49-F238E27FC236}">
+                <a16:creationId xmlns:a16="http://schemas.microsoft.com/office/drawing/2014/main" id="{6A733F32-5212-230D-2235-FEFDE51A64AF}"/>
+              </a:ext>
+            </a:extLst>
+          </p:cNvPr>
+          <p:cNvSpPr/>
+          <p:nvPr/>
+        </p:nvSpPr>
+        <p:spPr>
+          <a:xfrm>
+            <a:off x="5718533" y="747016"/>
+            <a:ext cx="1909317" cy="720647"/>
+          </a:xfrm>
+          <a:prstGeom prst="rect">
+            <a:avLst/>
+          </a:prstGeom>
+          <a:noFill/>
+          <a:ln>
+            <a:solidFill>
+              <a:schemeClr val="tx1"/>
+            </a:solidFill>
+          </a:ln>
+        </p:spPr>
+        <p:style>
+          <a:lnRef idx="2">
+            <a:schemeClr val="accent1">
+              <a:shade val="15000"/>
+            </a:schemeClr>
+          </a:lnRef>
+          <a:fillRef idx="1">
+            <a:schemeClr val="accent1"/>
+          </a:fillRef>
+          <a:effectRef idx="0">
+            <a:schemeClr val="accent1"/>
+          </a:effectRef>
+          <a:fontRef idx="minor">
+            <a:schemeClr val="lt1"/>
+          </a:fontRef>
+        </p:style>
+        <p:txBody>
+          <a:bodyPr rtlCol="0" anchor="ctr"/>
+          <a:lstStyle/>
+          <a:p>
+            <a:pPr algn="r"/>
+            <a:r>
+              <a:rPr lang="en-US" sz="1600" dirty="0">
+                <a:solidFill>
+                  <a:sysClr val="windowText" lastClr="000000"/>
+                </a:solidFill>
+              </a:rPr>
+              <a:t>Embedding</a:t>
+            </a:r>
+          </a:p>
+        </p:txBody>
+      </p:sp>
+      <p:pic>
+        <p:nvPicPr>
+          <p:cNvPr id="1028" name="Picture 1027">
+            <a:extLst>
+              <a:ext uri="{FF2B5EF4-FFF2-40B4-BE49-F238E27FC236}">
+                <a16:creationId xmlns:a16="http://schemas.microsoft.com/office/drawing/2014/main" id="{355D9C4D-2EB2-3744-B66A-FC784A1D40EC}"/>
+              </a:ext>
+            </a:extLst>
+          </p:cNvPr>
+          <p:cNvPicPr>
+            <a:picLocks noChangeAspect="1"/>
+          </p:cNvPicPr>
+          <p:nvPr/>
+        </p:nvPicPr>
+        <p:blipFill>
+          <a:blip r:embed="rId6"/>
+          <a:srcRect b="13873"/>
+          <a:stretch>
+            <a:fillRect/>
+          </a:stretch>
+        </p:blipFill>
+        <p:spPr>
+          <a:xfrm>
+            <a:off x="5793582" y="810219"/>
+            <a:ext cx="702732" cy="605242"/>
+          </a:xfrm>
+          <a:prstGeom prst="rect">
+            <a:avLst/>
+          </a:prstGeom>
+        </p:spPr>
+      </p:pic>
+      <p:cxnSp>
+        <p:nvCxnSpPr>
+          <p:cNvPr id="1029" name="Straight Arrow Connector 1028">
+            <a:extLst>
+              <a:ext uri="{FF2B5EF4-FFF2-40B4-BE49-F238E27FC236}">
+                <a16:creationId xmlns:a16="http://schemas.microsoft.com/office/drawing/2014/main" id="{678433FB-CC62-BF8A-6F4F-0520252D232A}"/>
+              </a:ext>
+            </a:extLst>
+          </p:cNvPr>
+          <p:cNvCxnSpPr>
+            <a:cxnSpLocks/>
+            <a:stCxn id="63" idx="1"/>
+            <a:endCxn id="1027" idx="3"/>
+          </p:cNvCxnSpPr>
+          <p:nvPr/>
+        </p:nvCxnSpPr>
+        <p:spPr>
+          <a:xfrm flipH="1">
+            <a:off x="7627850" y="1107340"/>
+            <a:ext cx="1126057" cy="0"/>
+          </a:xfrm>
+          <a:prstGeom prst="straightConnector1">
+            <a:avLst/>
+          </a:prstGeom>
+          <a:ln>
+            <a:tailEnd type="triangle"/>
+          </a:ln>
+        </p:spPr>
+        <p:style>
+          <a:lnRef idx="2">
+            <a:schemeClr val="accent1"/>
+          </a:lnRef>
+          <a:fillRef idx="0">
+            <a:schemeClr val="accent1"/>
+          </a:fillRef>
+          <a:effectRef idx="1">
+            <a:schemeClr val="accent1"/>
+          </a:effectRef>
+          <a:fontRef idx="minor">
+            <a:schemeClr val="tx1"/>
+          </a:fontRef>
+        </p:style>
+      </p:cxnSp>
+      <p:cxnSp>
+        <p:nvCxnSpPr>
+          <p:cNvPr id="1032" name="Straight Arrow Connector 1031">
+            <a:extLst>
+              <a:ext uri="{FF2B5EF4-FFF2-40B4-BE49-F238E27FC236}">
+                <a16:creationId xmlns:a16="http://schemas.microsoft.com/office/drawing/2014/main" id="{F37FE97C-8250-F9F4-637D-FDB6948014FD}"/>
+              </a:ext>
+            </a:extLst>
+          </p:cNvPr>
+          <p:cNvCxnSpPr>
+            <a:cxnSpLocks/>
+            <a:stCxn id="1027" idx="2"/>
+            <a:endCxn id="60" idx="0"/>
+          </p:cNvCxnSpPr>
+          <p:nvPr/>
+        </p:nvCxnSpPr>
+        <p:spPr>
+          <a:xfrm>
+            <a:off x="6673192" y="1467663"/>
+            <a:ext cx="5285" cy="855363"/>
+          </a:xfrm>
+          <a:prstGeom prst="straightConnector1">
+            <a:avLst/>
+          </a:prstGeom>
+          <a:ln>
+            <a:tailEnd type="triangle"/>
+          </a:ln>
+        </p:spPr>
+        <p:style>
+          <a:lnRef idx="2">
+            <a:schemeClr val="accent1"/>
+          </a:lnRef>
+          <a:fillRef idx="0">
+            <a:schemeClr val="accent1"/>
+          </a:fillRef>
+          <a:effectRef idx="1">
+            <a:schemeClr val="accent1"/>
+          </a:effectRef>
+          <a:fontRef idx="minor">
+            <a:schemeClr val="tx1"/>
+          </a:fontRef>
+        </p:style>
+      </p:cxnSp>
+      <p:cxnSp>
+        <p:nvCxnSpPr>
+          <p:cNvPr id="1039" name="Straight Arrow Connector 1038">
+            <a:extLst>
+              <a:ext uri="{FF2B5EF4-FFF2-40B4-BE49-F238E27FC236}">
+                <a16:creationId xmlns:a16="http://schemas.microsoft.com/office/drawing/2014/main" id="{5A98596E-1839-B21C-98D4-A5A2E538B939}"/>
+              </a:ext>
+            </a:extLst>
+          </p:cNvPr>
+          <p:cNvCxnSpPr>
+            <a:stCxn id="60" idx="2"/>
+          </p:cNvCxnSpPr>
+          <p:nvPr/>
+        </p:nvCxnSpPr>
+        <p:spPr>
+          <a:xfrm>
+            <a:off x="6678477" y="3043673"/>
+            <a:ext cx="0" cy="408292"/>
+          </a:xfrm>
+          <a:prstGeom prst="straightConnector1">
+            <a:avLst/>
+          </a:prstGeom>
+          <a:ln>
+            <a:tailEnd type="triangle"/>
+          </a:ln>
+        </p:spPr>
+        <p:style>
+          <a:lnRef idx="2">
+            <a:schemeClr val="accent1"/>
+          </a:lnRef>
+          <a:fillRef idx="0">
+            <a:schemeClr val="accent1"/>
+          </a:fillRef>
+          <a:effectRef idx="1">
+            <a:schemeClr val="accent1"/>
+          </a:effectRef>
+          <a:fontRef idx="minor">
+            <a:schemeClr val="tx1"/>
+          </a:fontRef>
+        </p:style>
+      </p:cxnSp>
+      <p:sp>
+        <p:nvSpPr>
+          <p:cNvPr id="1040" name="Rectangle 1039">
+            <a:extLst>
+              <a:ext uri="{FF2B5EF4-FFF2-40B4-BE49-F238E27FC236}">
+                <a16:creationId xmlns:a16="http://schemas.microsoft.com/office/drawing/2014/main" id="{5A0B5218-F984-2FE2-AE21-51427E4A3C71}"/>
+              </a:ext>
+            </a:extLst>
+          </p:cNvPr>
+          <p:cNvSpPr/>
+          <p:nvPr/>
+        </p:nvSpPr>
+        <p:spPr>
+          <a:xfrm>
+            <a:off x="5559343" y="3438706"/>
+            <a:ext cx="2262684" cy="720647"/>
+          </a:xfrm>
+          <a:prstGeom prst="rect">
+            <a:avLst/>
+          </a:prstGeom>
+          <a:noFill/>
+          <a:ln>
+            <a:solidFill>
+              <a:schemeClr val="tx1"/>
+            </a:solidFill>
+          </a:ln>
+        </p:spPr>
+        <p:style>
+          <a:lnRef idx="2">
+            <a:schemeClr val="accent1">
+              <a:shade val="15000"/>
+            </a:schemeClr>
+          </a:lnRef>
+          <a:fillRef idx="1">
+            <a:schemeClr val="accent1"/>
+          </a:fillRef>
+          <a:effectRef idx="0">
+            <a:schemeClr val="accent1"/>
+          </a:effectRef>
+          <a:fontRef idx="minor">
+            <a:schemeClr val="lt1"/>
+          </a:fontRef>
+        </p:style>
+        <p:txBody>
+          <a:bodyPr rtlCol="0" anchor="ctr"/>
+          <a:lstStyle/>
+          <a:p>
+            <a:pPr algn="r"/>
+            <a:r>
+              <a:rPr lang="en-US" sz="1600" dirty="0">
+                <a:solidFill>
+                  <a:sysClr val="windowText" lastClr="000000"/>
+                </a:solidFill>
+              </a:rPr>
+              <a:t>Relevant Data </a:t>
+            </a:r>
+          </a:p>
+        </p:txBody>
+      </p:sp>
+      <p:pic>
+        <p:nvPicPr>
+          <p:cNvPr id="1043" name="Graphic 1042" descr="Comment Important outline">
+            <a:extLst>
+              <a:ext uri="{FF2B5EF4-FFF2-40B4-BE49-F238E27FC236}">
+                <a16:creationId xmlns:a16="http://schemas.microsoft.com/office/drawing/2014/main" id="{BD082B7A-430C-9295-5E6C-1102398D1618}"/>
+              </a:ext>
+            </a:extLst>
+          </p:cNvPr>
+          <p:cNvPicPr>
+            <a:picLocks noChangeAspect="1"/>
+          </p:cNvPicPr>
+          <p:nvPr/>
+        </p:nvPicPr>
+        <p:blipFill>
+          <a:blip r:embed="rId10">
+            <a:extLst>
+              <a:ext uri="{96DAC541-7B7A-43D3-8B79-37D633B846F1}">
+                <asvg:svgBlip xmlns:asvg="http://schemas.microsoft.com/office/drawing/2016/SVG/main" r:embed="rId11"/>
+              </a:ext>
+            </a:extLst>
+          </a:blip>
+          <a:stretch>
+            <a:fillRect/>
+          </a:stretch>
+        </p:blipFill>
+        <p:spPr>
+          <a:xfrm>
+            <a:off x="5547135" y="3438706"/>
+            <a:ext cx="788405" cy="788405"/>
+          </a:xfrm>
+          <a:prstGeom prst="rect">
+            <a:avLst/>
+          </a:prstGeom>
+        </p:spPr>
+      </p:pic>
+      <p:cxnSp>
+        <p:nvCxnSpPr>
+          <p:cNvPr id="1045" name="Straight Arrow Connector 1044">
+            <a:extLst>
+              <a:ext uri="{FF2B5EF4-FFF2-40B4-BE49-F238E27FC236}">
+                <a16:creationId xmlns:a16="http://schemas.microsoft.com/office/drawing/2014/main" id="{60400BA6-0193-F4B7-C780-50EB8F273D96}"/>
+              </a:ext>
+            </a:extLst>
+          </p:cNvPr>
+          <p:cNvCxnSpPr>
+            <a:cxnSpLocks/>
+            <a:stCxn id="1040" idx="2"/>
+            <a:endCxn id="1047" idx="0"/>
+          </p:cNvCxnSpPr>
+          <p:nvPr/>
+        </p:nvCxnSpPr>
+        <p:spPr>
+          <a:xfrm>
+            <a:off x="6690685" y="4159353"/>
+            <a:ext cx="0" cy="348376"/>
+          </a:xfrm>
+          <a:prstGeom prst="straightConnector1">
+            <a:avLst/>
+          </a:prstGeom>
+          <a:ln>
+            <a:tailEnd type="triangle"/>
+          </a:ln>
+        </p:spPr>
+        <p:style>
+          <a:lnRef idx="2">
+            <a:schemeClr val="accent1"/>
+          </a:lnRef>
+          <a:fillRef idx="0">
+            <a:schemeClr val="accent1"/>
+          </a:fillRef>
+          <a:effectRef idx="1">
+            <a:schemeClr val="accent1"/>
+          </a:effectRef>
+          <a:fontRef idx="minor">
+            <a:schemeClr val="tx1"/>
+          </a:fontRef>
+        </p:style>
+      </p:cxnSp>
+      <p:sp>
+        <p:nvSpPr>
+          <p:cNvPr id="1047" name="Rectangle 1046">
+            <a:extLst>
+              <a:ext uri="{FF2B5EF4-FFF2-40B4-BE49-F238E27FC236}">
+                <a16:creationId xmlns:a16="http://schemas.microsoft.com/office/drawing/2014/main" id="{9F70F1F4-995C-8501-6482-2DCA10CB3D79}"/>
+              </a:ext>
+            </a:extLst>
+          </p:cNvPr>
+          <p:cNvSpPr/>
+          <p:nvPr/>
+        </p:nvSpPr>
+        <p:spPr>
+          <a:xfrm>
+            <a:off x="5559343" y="4507729"/>
+            <a:ext cx="2262684" cy="720647"/>
+          </a:xfrm>
+          <a:prstGeom prst="rect">
+            <a:avLst/>
+          </a:prstGeom>
+          <a:noFill/>
+          <a:ln>
+            <a:solidFill>
+              <a:schemeClr val="tx1"/>
+            </a:solidFill>
+          </a:ln>
+        </p:spPr>
+        <p:style>
+          <a:lnRef idx="2">
+            <a:schemeClr val="accent1">
+              <a:shade val="15000"/>
+            </a:schemeClr>
+          </a:lnRef>
+          <a:fillRef idx="1">
+            <a:schemeClr val="accent1"/>
+          </a:fillRef>
+          <a:effectRef idx="0">
+            <a:schemeClr val="accent1"/>
+          </a:effectRef>
+          <a:fontRef idx="minor">
+            <a:schemeClr val="lt1"/>
+          </a:fontRef>
+        </p:style>
+        <p:txBody>
+          <a:bodyPr rtlCol="0" anchor="ctr"/>
+          <a:lstStyle/>
+          <a:p>
+            <a:pPr algn="ctr"/>
+            <a:r>
+              <a:rPr lang="en-US" sz="1600" dirty="0">
+                <a:solidFill>
+                  <a:sysClr val="windowText" lastClr="000000"/>
+                </a:solidFill>
+              </a:rPr>
+              <a:t>                          LLM(s)</a:t>
+            </a:r>
+          </a:p>
+        </p:txBody>
+      </p:sp>
+      <p:pic>
+        <p:nvPicPr>
+          <p:cNvPr id="1049" name="Picture 1048">
+            <a:extLst>
+              <a:ext uri="{FF2B5EF4-FFF2-40B4-BE49-F238E27FC236}">
+                <a16:creationId xmlns:a16="http://schemas.microsoft.com/office/drawing/2014/main" id="{6664F53B-092E-C2DF-860C-1CF4F3612A2D}"/>
+              </a:ext>
+            </a:extLst>
+          </p:cNvPr>
+          <p:cNvPicPr>
+            <a:picLocks noChangeAspect="1"/>
+          </p:cNvPicPr>
+          <p:nvPr/>
+        </p:nvPicPr>
+        <p:blipFill>
+          <a:blip r:embed="rId12"/>
+          <a:srcRect b="21641"/>
+          <a:stretch>
+            <a:fillRect/>
+          </a:stretch>
+        </p:blipFill>
+        <p:spPr>
+          <a:xfrm>
+            <a:off x="5695501" y="4497003"/>
+            <a:ext cx="919673" cy="720647"/>
+          </a:xfrm>
+          <a:prstGeom prst="rect">
+            <a:avLst/>
+          </a:prstGeom>
+        </p:spPr>
+      </p:pic>
+      <p:cxnSp>
+        <p:nvCxnSpPr>
+          <p:cNvPr id="1055" name="Straight Arrow Connector 1054">
+            <a:extLst>
+              <a:ext uri="{FF2B5EF4-FFF2-40B4-BE49-F238E27FC236}">
+                <a16:creationId xmlns:a16="http://schemas.microsoft.com/office/drawing/2014/main" id="{9A0874A6-BD38-B3F8-61D9-B26E222B7EAD}"/>
+              </a:ext>
+            </a:extLst>
+          </p:cNvPr>
+          <p:cNvCxnSpPr>
+            <a:stCxn id="1047" idx="2"/>
+          </p:cNvCxnSpPr>
+          <p:nvPr/>
+        </p:nvCxnSpPr>
+        <p:spPr>
+          <a:xfrm>
+            <a:off x="6690685" y="5228376"/>
+            <a:ext cx="0" cy="376544"/>
+          </a:xfrm>
+          <a:prstGeom prst="straightConnector1">
+            <a:avLst/>
+          </a:prstGeom>
+          <a:ln>
+            <a:tailEnd type="triangle"/>
+          </a:ln>
+        </p:spPr>
+        <p:style>
+          <a:lnRef idx="2">
+            <a:schemeClr val="accent1"/>
+          </a:lnRef>
+          <a:fillRef idx="0">
+            <a:schemeClr val="accent1"/>
+          </a:fillRef>
+          <a:effectRef idx="1">
+            <a:schemeClr val="accent1"/>
+          </a:effectRef>
+          <a:fontRef idx="minor">
+            <a:schemeClr val="tx1"/>
+          </a:fontRef>
+        </p:style>
+      </p:cxnSp>
+      <p:sp>
+        <p:nvSpPr>
+          <p:cNvPr id="1056" name="Rectangle 1055">
+            <a:extLst>
+              <a:ext uri="{FF2B5EF4-FFF2-40B4-BE49-F238E27FC236}">
+                <a16:creationId xmlns:a16="http://schemas.microsoft.com/office/drawing/2014/main" id="{CD44B478-2064-3594-8205-67939CB10AA5}"/>
+              </a:ext>
+            </a:extLst>
+          </p:cNvPr>
+          <p:cNvSpPr/>
+          <p:nvPr/>
+        </p:nvSpPr>
+        <p:spPr>
+          <a:xfrm>
+            <a:off x="5559343" y="5604920"/>
+            <a:ext cx="2262684" cy="720647"/>
+          </a:xfrm>
+          <a:prstGeom prst="rect">
+            <a:avLst/>
+          </a:prstGeom>
+          <a:noFill/>
+          <a:ln>
+            <a:solidFill>
+              <a:schemeClr val="tx1"/>
+            </a:solidFill>
+          </a:ln>
+        </p:spPr>
+        <p:style>
+          <a:lnRef idx="2">
+            <a:schemeClr val="accent1">
+              <a:shade val="15000"/>
+            </a:schemeClr>
+          </a:lnRef>
+          <a:fillRef idx="1">
+            <a:schemeClr val="accent1"/>
+          </a:fillRef>
+          <a:effectRef idx="0">
+            <a:schemeClr val="accent1"/>
+          </a:effectRef>
+          <a:fontRef idx="minor">
+            <a:schemeClr val="lt1"/>
+          </a:fontRef>
+        </p:style>
+        <p:txBody>
+          <a:bodyPr rtlCol="0" anchor="ctr"/>
+          <a:lstStyle/>
+          <a:p>
+            <a:pPr algn="r"/>
+            <a:r>
+              <a:rPr lang="en-US" b="1" dirty="0">
+                <a:solidFill>
+                  <a:sysClr val="windowText" lastClr="000000"/>
+                </a:solidFill>
+              </a:rPr>
+              <a:t>Output</a:t>
+            </a:r>
+          </a:p>
+        </p:txBody>
+      </p:sp>
+      <p:pic>
+        <p:nvPicPr>
+          <p:cNvPr id="1060" name="Graphic 1059" descr="Share outline">
+            <a:extLst>
+              <a:ext uri="{FF2B5EF4-FFF2-40B4-BE49-F238E27FC236}">
+                <a16:creationId xmlns:a16="http://schemas.microsoft.com/office/drawing/2014/main" id="{D7471D12-6974-2DF1-735B-274DFAAAF56F}"/>
+              </a:ext>
+            </a:extLst>
+          </p:cNvPr>
+          <p:cNvPicPr>
+            <a:picLocks noChangeAspect="1"/>
+          </p:cNvPicPr>
+          <p:nvPr/>
+        </p:nvPicPr>
+        <p:blipFill>
+          <a:blip r:embed="rId13">
+            <a:extLst>
+              <a:ext uri="{96DAC541-7B7A-43D3-8B79-37D633B846F1}">
+                <asvg:svgBlip xmlns:asvg="http://schemas.microsoft.com/office/drawing/2016/SVG/main" r:embed="rId14"/>
+              </a:ext>
+            </a:extLst>
+          </a:blip>
+          <a:stretch>
+            <a:fillRect/>
+          </a:stretch>
+        </p:blipFill>
+        <p:spPr>
+          <a:xfrm>
+            <a:off x="5742451" y="5668703"/>
+            <a:ext cx="593079" cy="593079"/>
+          </a:xfrm>
+          <a:prstGeom prst="rect">
+            <a:avLst/>
+          </a:prstGeom>
+        </p:spPr>
+      </p:pic>
+      <p:sp>
+        <p:nvSpPr>
+          <p:cNvPr id="1087" name="TextBox 1086">
+            <a:extLst>
+              <a:ext uri="{FF2B5EF4-FFF2-40B4-BE49-F238E27FC236}">
+                <a16:creationId xmlns:a16="http://schemas.microsoft.com/office/drawing/2014/main" id="{5F7285D1-5D72-AFA6-BD34-C6E8DDFD6986}"/>
+              </a:ext>
+            </a:extLst>
+          </p:cNvPr>
+          <p:cNvSpPr txBox="1"/>
+          <p:nvPr/>
+        </p:nvSpPr>
+        <p:spPr>
+          <a:xfrm>
+            <a:off x="7939782" y="747016"/>
+            <a:ext cx="632826" cy="369332"/>
+          </a:xfrm>
+          <a:prstGeom prst="rect">
+            <a:avLst/>
+          </a:prstGeom>
+          <a:noFill/>
+        </p:spPr>
+        <p:txBody>
+          <a:bodyPr wrap="square" rtlCol="0">
+            <a:spAutoFit/>
+          </a:bodyPr>
+          <a:lstStyle/>
+          <a:p>
+            <a:r>
               <a:rPr lang="en-US" dirty="0"/>
-              <a:t>Data Preparation</a:t>
-            </a:r>
-          </a:p>
-        </p:txBody>
-      </p:sp>
-      <p:sp>
-        <p:nvSpPr>
-          <p:cNvPr id="6" name="Title 1">
-            <a:extLst>
-              <a:ext uri="{FF2B5EF4-FFF2-40B4-BE49-F238E27FC236}">
-                <a16:creationId xmlns:a16="http://schemas.microsoft.com/office/drawing/2014/main" id="{7A652257-6AF1-E270-57AF-9FDA85FC0CAD}"/>
+              <a:t>1.</a:t>
+            </a:r>
+          </a:p>
+        </p:txBody>
+      </p:sp>
+      <p:sp>
+        <p:nvSpPr>
+          <p:cNvPr id="1088" name="TextBox 1087">
+            <a:extLst>
+              <a:ext uri="{FF2B5EF4-FFF2-40B4-BE49-F238E27FC236}">
+                <a16:creationId xmlns:a16="http://schemas.microsoft.com/office/drawing/2014/main" id="{71018866-7997-6C2E-4450-D3D04C193D90}"/>
+              </a:ext>
+            </a:extLst>
+          </p:cNvPr>
+          <p:cNvSpPr txBox="1"/>
+          <p:nvPr/>
+        </p:nvSpPr>
+        <p:spPr>
+          <a:xfrm>
+            <a:off x="6690685" y="1717615"/>
+            <a:ext cx="632826" cy="369332"/>
+          </a:xfrm>
+          <a:prstGeom prst="rect">
+            <a:avLst/>
+          </a:prstGeom>
+          <a:noFill/>
+        </p:spPr>
+        <p:txBody>
+          <a:bodyPr wrap="square" rtlCol="0">
+            <a:spAutoFit/>
+          </a:bodyPr>
+          <a:lstStyle/>
+          <a:p>
+            <a:r>
+              <a:rPr lang="en-US" dirty="0"/>
+              <a:t>2.</a:t>
+            </a:r>
+          </a:p>
+        </p:txBody>
+      </p:sp>
+      <p:sp>
+        <p:nvSpPr>
+          <p:cNvPr id="1089" name="Title 1">
+            <a:extLst>
+              <a:ext uri="{FF2B5EF4-FFF2-40B4-BE49-F238E27FC236}">
+                <a16:creationId xmlns:a16="http://schemas.microsoft.com/office/drawing/2014/main" id="{CFA349ED-ACE8-1B5A-0A21-B78C12B530EA}"/>
               </a:ext>
             </a:extLst>
           </p:cNvPr>
@@ -8465,17 +8916,122 @@
           <a:p>
             <a:r>
               <a:rPr lang="en-US" sz="2800" i="1" dirty="0"/>
-              <a:t>Information Extraction</a:t>
-            </a:r>
-          </a:p>
-        </p:txBody>
-      </p:sp>
-      <p:sp>
-        <p:nvSpPr>
-          <p:cNvPr id="7" name="Rectangle 6">
-            <a:extLst>
-              <a:ext uri="{FF2B5EF4-FFF2-40B4-BE49-F238E27FC236}">
-                <a16:creationId xmlns:a16="http://schemas.microsoft.com/office/drawing/2014/main" id="{5A761178-B18C-8941-79FB-08B83514DBB4}"/>
+              <a:t>Full Pipeline</a:t>
+            </a:r>
+          </a:p>
+        </p:txBody>
+      </p:sp>
+      <p:sp>
+        <p:nvSpPr>
+          <p:cNvPr id="1094" name="TextBox 1093">
+            <a:extLst>
+              <a:ext uri="{FF2B5EF4-FFF2-40B4-BE49-F238E27FC236}">
+                <a16:creationId xmlns:a16="http://schemas.microsoft.com/office/drawing/2014/main" id="{DFD20E70-7EB1-4850-BBBC-AD603DFB30E2}"/>
+              </a:ext>
+            </a:extLst>
+          </p:cNvPr>
+          <p:cNvSpPr txBox="1"/>
+          <p:nvPr/>
+        </p:nvSpPr>
+        <p:spPr>
+          <a:xfrm>
+            <a:off x="6727131" y="3049962"/>
+            <a:ext cx="632826" cy="369332"/>
+          </a:xfrm>
+          <a:prstGeom prst="rect">
+            <a:avLst/>
+          </a:prstGeom>
+          <a:noFill/>
+        </p:spPr>
+        <p:txBody>
+          <a:bodyPr wrap="square" rtlCol="0">
+            <a:spAutoFit/>
+          </a:bodyPr>
+          <a:lstStyle/>
+          <a:p>
+            <a:r>
+              <a:rPr lang="en-US" dirty="0"/>
+              <a:t>3.</a:t>
+            </a:r>
+          </a:p>
+        </p:txBody>
+      </p:sp>
+      <p:sp>
+        <p:nvSpPr>
+          <p:cNvPr id="1095" name="TextBox 1094">
+            <a:extLst>
+              <a:ext uri="{FF2B5EF4-FFF2-40B4-BE49-F238E27FC236}">
+                <a16:creationId xmlns:a16="http://schemas.microsoft.com/office/drawing/2014/main" id="{0200D882-2F17-CECB-05C8-6186DAE57BD0}"/>
+              </a:ext>
+            </a:extLst>
+          </p:cNvPr>
+          <p:cNvSpPr txBox="1"/>
+          <p:nvPr/>
+        </p:nvSpPr>
+        <p:spPr>
+          <a:xfrm>
+            <a:off x="6762370" y="4135587"/>
+            <a:ext cx="632826" cy="369332"/>
+          </a:xfrm>
+          <a:prstGeom prst="rect">
+            <a:avLst/>
+          </a:prstGeom>
+          <a:noFill/>
+        </p:spPr>
+        <p:txBody>
+          <a:bodyPr wrap="square" rtlCol="0">
+            <a:spAutoFit/>
+          </a:bodyPr>
+          <a:lstStyle/>
+          <a:p>
+            <a:r>
+              <a:rPr lang="en-US" dirty="0"/>
+              <a:t>4.</a:t>
+            </a:r>
+          </a:p>
+        </p:txBody>
+      </p:sp>
+      <p:sp>
+        <p:nvSpPr>
+          <p:cNvPr id="1096" name="TextBox 1095">
+            <a:extLst>
+              <a:ext uri="{FF2B5EF4-FFF2-40B4-BE49-F238E27FC236}">
+                <a16:creationId xmlns:a16="http://schemas.microsoft.com/office/drawing/2014/main" id="{1CA7F4E5-0E20-CAB9-E7A8-5BDDB0330F6A}"/>
+              </a:ext>
+            </a:extLst>
+          </p:cNvPr>
+          <p:cNvSpPr txBox="1"/>
+          <p:nvPr/>
+        </p:nvSpPr>
+        <p:spPr>
+          <a:xfrm>
+            <a:off x="6762370" y="5239102"/>
+            <a:ext cx="632826" cy="369332"/>
+          </a:xfrm>
+          <a:prstGeom prst="rect">
+            <a:avLst/>
+          </a:prstGeom>
+          <a:noFill/>
+        </p:spPr>
+        <p:txBody>
+          <a:bodyPr wrap="square" rtlCol="0">
+            <a:spAutoFit/>
+          </a:bodyPr>
+          <a:lstStyle/>
+          <a:p>
+            <a:r>
+              <a:rPr lang="en-US" dirty="0"/>
+              <a:t>5.</a:t>
+            </a:r>
+          </a:p>
+        </p:txBody>
+      </p:sp>
+      <p:sp>
+        <p:nvSpPr>
+          <p:cNvPr id="1099" name="Rectangle 1098">
+            <a:extLst>
+              <a:ext uri="{FF2B5EF4-FFF2-40B4-BE49-F238E27FC236}">
+                <a16:creationId xmlns:a16="http://schemas.microsoft.com/office/drawing/2014/main" id="{4B3F4EFE-EA4D-5FA7-EF0A-9CD4A4EA8AA8}"/>
               </a:ext>
             </a:extLst>
           </p:cNvPr>
@@ -8484,8 +9040,8 @@
         </p:nvSpPr>
         <p:spPr>
           <a:xfrm>
-            <a:off x="838200" y="2709587"/>
-            <a:ext cx="2289048" cy="1325563"/>
+            <a:off x="680936" y="2200138"/>
+            <a:ext cx="4587735" cy="3852471"/>
           </a:xfrm>
           <a:prstGeom prst="rect">
             <a:avLst/>
@@ -8514,104 +9070,74 @@
           </a:fontRef>
         </p:style>
         <p:txBody>
-          <a:bodyPr lIns="274320" rIns="274320" rtlCol="0" anchor="ctr"/>
+          <a:bodyPr rtlCol="0" anchor="ctr"/>
           <a:lstStyle/>
           <a:p>
-            <a:pPr algn="r"/>
-            <a:r>
-              <a:rPr lang="en-US" dirty="0">
-                <a:solidFill>
-                  <a:sysClr val="windowText" lastClr="000000"/>
-                </a:solidFill>
-              </a:rPr>
-              <a:t>Raw Data </a:t>
-            </a:r>
-          </a:p>
-          <a:p>
-            <a:pPr algn="r"/>
-            <a:r>
-              <a:rPr lang="en-US" dirty="0">
-                <a:solidFill>
-                  <a:sysClr val="windowText" lastClr="000000"/>
-                </a:solidFill>
-              </a:rPr>
-              <a:t>Sources</a:t>
-            </a:r>
-          </a:p>
-        </p:txBody>
-      </p:sp>
-      <p:pic>
-        <p:nvPicPr>
-          <p:cNvPr id="8" name="Picture 2" descr="Raw-Data Icons - Free SVG &amp; PNG Raw-Data Images - Noun Project">
-            <a:extLst>
-              <a:ext uri="{FF2B5EF4-FFF2-40B4-BE49-F238E27FC236}">
-                <a16:creationId xmlns:a16="http://schemas.microsoft.com/office/drawing/2014/main" id="{5E90B285-C1F3-6A3A-8210-53AFCE347910}"/>
-              </a:ext>
-            </a:extLst>
-          </p:cNvPr>
-          <p:cNvPicPr>
-            <a:picLocks noChangeAspect="1" noChangeArrowheads="1"/>
-          </p:cNvPicPr>
-          <p:nvPr/>
-        </p:nvPicPr>
-        <p:blipFill>
-          <a:blip r:embed="rId2">
-            <a:extLst>
-              <a:ext uri="{28A0092B-C50C-407E-A947-70E740481C1C}">
-                <a14:useLocalDpi xmlns:a14="http://schemas.microsoft.com/office/drawing/2010/main" val="0"/>
-              </a:ext>
-            </a:extLst>
-          </a:blip>
-          <a:srcRect/>
-          <a:stretch>
-            <a:fillRect/>
-          </a:stretch>
-        </p:blipFill>
-        <p:spPr bwMode="auto">
-          <a:xfrm>
-            <a:off x="994879" y="2932920"/>
-            <a:ext cx="878896" cy="878896"/>
+            <a:pPr algn="ctr"/>
+            <a:endParaRPr lang="en-US" dirty="0"/>
+          </a:p>
+        </p:txBody>
+      </p:sp>
+      <p:sp>
+        <p:nvSpPr>
+          <p:cNvPr id="1101" name="TextBox 1100">
+            <a:extLst>
+              <a:ext uri="{FF2B5EF4-FFF2-40B4-BE49-F238E27FC236}">
+                <a16:creationId xmlns:a16="http://schemas.microsoft.com/office/drawing/2014/main" id="{43E88151-4E49-56D0-D815-92B24036E97D}"/>
+              </a:ext>
+            </a:extLst>
+          </p:cNvPr>
+          <p:cNvSpPr txBox="1"/>
+          <p:nvPr/>
+        </p:nvSpPr>
+        <p:spPr>
+          <a:xfrm>
+            <a:off x="8256195" y="5490959"/>
+            <a:ext cx="3747679" cy="830997"/>
           </a:xfrm>
           <a:prstGeom prst="rect">
             <a:avLst/>
           </a:prstGeom>
           <a:noFill/>
-          <a:extLst>
-            <a:ext uri="{909E8E84-426E-40DD-AFC4-6F175D3DCCD1}">
-              <a14:hiddenFill xmlns:a14="http://schemas.microsoft.com/office/drawing/2010/main">
-                <a:solidFill>
-                  <a:srgbClr val="FFFFFF"/>
-                </a:solidFill>
-              </a14:hiddenFill>
-            </a:ext>
-          </a:extLst>
-        </p:spPr>
-      </p:pic>
+        </p:spPr>
+        <p:txBody>
+          <a:bodyPr wrap="square" rtlCol="0">
+            <a:spAutoFit/>
+          </a:bodyPr>
+          <a:lstStyle/>
+          <a:p>
+            <a:r>
+              <a:rPr lang="en-US" sz="2400" i="1" dirty="0"/>
+              <a:t>Retrieval Augmented Generation </a:t>
+            </a:r>
+          </a:p>
+        </p:txBody>
+      </p:sp>
       <p:cxnSp>
         <p:nvCxnSpPr>
-          <p:cNvPr id="11" name="Straight Arrow Connector 10">
-            <a:extLst>
-              <a:ext uri="{FF2B5EF4-FFF2-40B4-BE49-F238E27FC236}">
-                <a16:creationId xmlns:a16="http://schemas.microsoft.com/office/drawing/2014/main" id="{4E64EFA9-4ED5-0EDB-D0C1-F710F2D95BFE}"/>
+          <p:cNvPr id="6" name="Elbow Connector 5">
+            <a:extLst>
+              <a:ext uri="{FF2B5EF4-FFF2-40B4-BE49-F238E27FC236}">
+                <a16:creationId xmlns:a16="http://schemas.microsoft.com/office/drawing/2014/main" id="{800C80CA-7C89-9700-14DE-75534396F173}"/>
               </a:ext>
             </a:extLst>
           </p:cNvPr>
           <p:cNvCxnSpPr>
             <a:cxnSpLocks/>
-            <a:stCxn id="7" idx="3"/>
-            <a:endCxn id="15" idx="1"/>
+            <a:stCxn id="63" idx="2"/>
+            <a:endCxn id="1047" idx="3"/>
           </p:cNvCxnSpPr>
           <p:nvPr/>
         </p:nvCxnSpPr>
         <p:spPr>
-          <a:xfrm flipV="1">
-            <a:off x="3127248" y="3372368"/>
-            <a:ext cx="768096" cy="1"/>
-          </a:xfrm>
-          <a:prstGeom prst="straightConnector1">
-            <a:avLst/>
-          </a:prstGeom>
-          <a:ln w="38100">
+          <a:xfrm rot="5400000">
+            <a:off x="7055553" y="2234137"/>
+            <a:ext cx="3400390" cy="1867442"/>
+          </a:xfrm>
+          <a:prstGeom prst="bentConnector2">
+            <a:avLst/>
+          </a:prstGeom>
+          <a:ln>
             <a:tailEnd type="triangle"/>
           </a:ln>
         </p:spPr>
@@ -8630,582 +9156,10 @@
           </a:fontRef>
         </p:style>
       </p:cxnSp>
-      <p:sp>
-        <p:nvSpPr>
-          <p:cNvPr id="15" name="Rectangle 14">
-            <a:extLst>
-              <a:ext uri="{FF2B5EF4-FFF2-40B4-BE49-F238E27FC236}">
-                <a16:creationId xmlns:a16="http://schemas.microsoft.com/office/drawing/2014/main" id="{35D3A2E0-A62A-0312-A50E-EE9748ECC542}"/>
-              </a:ext>
-            </a:extLst>
-          </p:cNvPr>
-          <p:cNvSpPr/>
-          <p:nvPr/>
-        </p:nvSpPr>
-        <p:spPr>
-          <a:xfrm>
-            <a:off x="3895344" y="2296166"/>
-            <a:ext cx="3511296" cy="2152404"/>
-          </a:xfrm>
-          <a:prstGeom prst="rect">
-            <a:avLst/>
-          </a:prstGeom>
-          <a:noFill/>
-          <a:ln w="28575">
-            <a:solidFill>
-              <a:schemeClr val="tx1"/>
-            </a:solidFill>
-          </a:ln>
-        </p:spPr>
-        <p:style>
-          <a:lnRef idx="2">
-            <a:schemeClr val="accent1">
-              <a:shade val="15000"/>
-            </a:schemeClr>
-          </a:lnRef>
-          <a:fillRef idx="1">
-            <a:schemeClr val="accent1"/>
-          </a:fillRef>
-          <a:effectRef idx="0">
-            <a:schemeClr val="accent1"/>
-          </a:effectRef>
-          <a:fontRef idx="minor">
-            <a:schemeClr val="lt1"/>
-          </a:fontRef>
-        </p:style>
-        <p:txBody>
-          <a:bodyPr lIns="274320" rIns="274320" rtlCol="0" anchor="ctr"/>
-          <a:lstStyle/>
-          <a:p>
-            <a:pPr algn="r"/>
-            <a:r>
-              <a:rPr lang="en-US" dirty="0">
-                <a:solidFill>
-                  <a:sysClr val="windowText" lastClr="000000"/>
-                </a:solidFill>
-              </a:rPr>
-              <a:t>Information Extraction</a:t>
-            </a:r>
-          </a:p>
-          <a:p>
-            <a:pPr algn="r"/>
-            <a:endParaRPr lang="en-US" dirty="0">
-              <a:solidFill>
-                <a:sysClr val="windowText" lastClr="000000"/>
-              </a:solidFill>
-            </a:endParaRPr>
-          </a:p>
-          <a:p>
-            <a:pPr algn="r"/>
-            <a:endParaRPr lang="en-US" dirty="0">
-              <a:solidFill>
-                <a:sysClr val="windowText" lastClr="000000"/>
-              </a:solidFill>
-            </a:endParaRPr>
-          </a:p>
-          <a:p>
-            <a:pPr algn="r"/>
-            <a:endParaRPr lang="en-US" dirty="0">
-              <a:solidFill>
-                <a:sysClr val="windowText" lastClr="000000"/>
-              </a:solidFill>
-            </a:endParaRPr>
-          </a:p>
-          <a:p>
-            <a:pPr algn="r"/>
-            <a:endParaRPr lang="en-US" dirty="0">
-              <a:solidFill>
-                <a:sysClr val="windowText" lastClr="000000"/>
-              </a:solidFill>
-            </a:endParaRPr>
-          </a:p>
-        </p:txBody>
-      </p:sp>
-      <p:pic>
-        <p:nvPicPr>
-          <p:cNvPr id="18" name="Picture 17">
-            <a:extLst>
-              <a:ext uri="{FF2B5EF4-FFF2-40B4-BE49-F238E27FC236}">
-                <a16:creationId xmlns:a16="http://schemas.microsoft.com/office/drawing/2014/main" id="{5EC93294-04C4-DAE7-F8DD-07F260F98035}"/>
-              </a:ext>
-            </a:extLst>
-          </p:cNvPr>
-          <p:cNvPicPr>
-            <a:picLocks noChangeAspect="1"/>
-          </p:cNvPicPr>
-          <p:nvPr/>
-        </p:nvPicPr>
-        <p:blipFill>
-          <a:blip r:embed="rId3"/>
-          <a:srcRect l="-762" t="-5651" r="762" b="19524"/>
-          <a:stretch>
-            <a:fillRect/>
-          </a:stretch>
-        </p:blipFill>
-        <p:spPr>
-          <a:xfrm>
-            <a:off x="4123774" y="2376045"/>
-            <a:ext cx="807145" cy="695170"/>
-          </a:xfrm>
-          <a:prstGeom prst="rect">
-            <a:avLst/>
-          </a:prstGeom>
-        </p:spPr>
-      </p:pic>
-      <p:sp>
-        <p:nvSpPr>
-          <p:cNvPr id="24" name="TextBox 23">
-            <a:extLst>
-              <a:ext uri="{FF2B5EF4-FFF2-40B4-BE49-F238E27FC236}">
-                <a16:creationId xmlns:a16="http://schemas.microsoft.com/office/drawing/2014/main" id="{542D9F2B-3AEB-1A49-CF63-9CE2FB95FB64}"/>
-              </a:ext>
-            </a:extLst>
-          </p:cNvPr>
-          <p:cNvSpPr txBox="1"/>
-          <p:nvPr/>
-        </p:nvSpPr>
-        <p:spPr>
-          <a:xfrm>
-            <a:off x="4294462" y="4002226"/>
-            <a:ext cx="887138" cy="369332"/>
-          </a:xfrm>
-          <a:prstGeom prst="rect">
-            <a:avLst/>
-          </a:prstGeom>
-          <a:noFill/>
-        </p:spPr>
-        <p:txBody>
-          <a:bodyPr wrap="square" rtlCol="0">
-            <a:spAutoFit/>
-          </a:bodyPr>
-          <a:lstStyle/>
-          <a:p>
-            <a:r>
-              <a:rPr lang="en-US" dirty="0"/>
-              <a:t>Text</a:t>
-            </a:r>
-          </a:p>
-        </p:txBody>
-      </p:sp>
-      <p:sp>
-        <p:nvSpPr>
-          <p:cNvPr id="25" name="TextBox 24">
-            <a:extLst>
-              <a:ext uri="{FF2B5EF4-FFF2-40B4-BE49-F238E27FC236}">
-                <a16:creationId xmlns:a16="http://schemas.microsoft.com/office/drawing/2014/main" id="{B4D29D72-F9A8-99A0-16F7-B28196DE4BA1}"/>
-              </a:ext>
-            </a:extLst>
-          </p:cNvPr>
-          <p:cNvSpPr txBox="1"/>
-          <p:nvPr/>
-        </p:nvSpPr>
-        <p:spPr>
-          <a:xfrm>
-            <a:off x="5111223" y="4017876"/>
-            <a:ext cx="887138" cy="369332"/>
-          </a:xfrm>
-          <a:prstGeom prst="rect">
-            <a:avLst/>
-          </a:prstGeom>
-          <a:noFill/>
-        </p:spPr>
-        <p:txBody>
-          <a:bodyPr wrap="square" rtlCol="0">
-            <a:spAutoFit/>
-          </a:bodyPr>
-          <a:lstStyle/>
-          <a:p>
-            <a:r>
-              <a:rPr lang="en-US" dirty="0"/>
-              <a:t>Tables</a:t>
-            </a:r>
-          </a:p>
-        </p:txBody>
-      </p:sp>
-      <p:sp>
-        <p:nvSpPr>
-          <p:cNvPr id="26" name="TextBox 25">
-            <a:extLst>
-              <a:ext uri="{FF2B5EF4-FFF2-40B4-BE49-F238E27FC236}">
-                <a16:creationId xmlns:a16="http://schemas.microsoft.com/office/drawing/2014/main" id="{A689BDDB-58B3-16C2-202F-750523854889}"/>
-              </a:ext>
-            </a:extLst>
-          </p:cNvPr>
-          <p:cNvSpPr txBox="1"/>
-          <p:nvPr/>
-        </p:nvSpPr>
-        <p:spPr>
-          <a:xfrm>
-            <a:off x="6096000" y="4017876"/>
-            <a:ext cx="1237281" cy="369332"/>
-          </a:xfrm>
-          <a:prstGeom prst="rect">
-            <a:avLst/>
-          </a:prstGeom>
-          <a:noFill/>
-        </p:spPr>
-        <p:txBody>
-          <a:bodyPr wrap="square" rtlCol="0">
-            <a:spAutoFit/>
-          </a:bodyPr>
-          <a:lstStyle/>
-          <a:p>
-            <a:r>
-              <a:rPr lang="en-US" dirty="0"/>
-              <a:t>Images</a:t>
-            </a:r>
-          </a:p>
-        </p:txBody>
-      </p:sp>
-      <p:pic>
-        <p:nvPicPr>
-          <p:cNvPr id="30" name="Graphic 29" descr="Document outline">
-            <a:extLst>
-              <a:ext uri="{FF2B5EF4-FFF2-40B4-BE49-F238E27FC236}">
-                <a16:creationId xmlns:a16="http://schemas.microsoft.com/office/drawing/2014/main" id="{3A108A4C-C7FA-4AA2-D95D-14224DBBBD30}"/>
-              </a:ext>
-            </a:extLst>
-          </p:cNvPr>
-          <p:cNvPicPr>
-            <a:picLocks noChangeAspect="1"/>
-          </p:cNvPicPr>
-          <p:nvPr/>
-        </p:nvPicPr>
-        <p:blipFill>
-          <a:blip r:embed="rId4">
-            <a:extLst>
-              <a:ext uri="{96DAC541-7B7A-43D3-8B79-37D633B846F1}">
-                <asvg:svgBlip xmlns:asvg="http://schemas.microsoft.com/office/drawing/2016/SVG/main" r:embed="rId5"/>
-              </a:ext>
-            </a:extLst>
-          </a:blip>
-          <a:stretch>
-            <a:fillRect/>
-          </a:stretch>
-        </p:blipFill>
-        <p:spPr>
-          <a:xfrm>
-            <a:off x="4128940" y="3151094"/>
-            <a:ext cx="914400" cy="914400"/>
-          </a:xfrm>
-          <a:prstGeom prst="rect">
-            <a:avLst/>
-          </a:prstGeom>
-        </p:spPr>
-      </p:pic>
-      <p:pic>
-        <p:nvPicPr>
-          <p:cNvPr id="32" name="Graphic 31" descr="Table outline">
-            <a:extLst>
-              <a:ext uri="{FF2B5EF4-FFF2-40B4-BE49-F238E27FC236}">
-                <a16:creationId xmlns:a16="http://schemas.microsoft.com/office/drawing/2014/main" id="{9B79C71E-BD65-CFEF-6D9F-2FEADD142CB8}"/>
-              </a:ext>
-            </a:extLst>
-          </p:cNvPr>
-          <p:cNvPicPr>
-            <a:picLocks noChangeAspect="1"/>
-          </p:cNvPicPr>
-          <p:nvPr/>
-        </p:nvPicPr>
-        <p:blipFill>
-          <a:blip r:embed="rId6">
-            <a:extLst>
-              <a:ext uri="{96DAC541-7B7A-43D3-8B79-37D633B846F1}">
-                <asvg:svgBlip xmlns:asvg="http://schemas.microsoft.com/office/drawing/2016/SVG/main" r:embed="rId7"/>
-              </a:ext>
-            </a:extLst>
-          </a:blip>
-          <a:stretch>
-            <a:fillRect/>
-          </a:stretch>
-        </p:blipFill>
-        <p:spPr>
-          <a:xfrm>
-            <a:off x="5067620" y="3288142"/>
-            <a:ext cx="914400" cy="914400"/>
-          </a:xfrm>
-          <a:prstGeom prst="rect">
-            <a:avLst/>
-          </a:prstGeom>
-        </p:spPr>
-      </p:pic>
-      <p:pic>
-        <p:nvPicPr>
-          <p:cNvPr id="34" name="Graphic 33" descr="Image outline">
-            <a:extLst>
-              <a:ext uri="{FF2B5EF4-FFF2-40B4-BE49-F238E27FC236}">
-                <a16:creationId xmlns:a16="http://schemas.microsoft.com/office/drawing/2014/main" id="{F8AF69EE-D90B-472F-DFAD-7E96C42BE030}"/>
-              </a:ext>
-            </a:extLst>
-          </p:cNvPr>
-          <p:cNvPicPr>
-            <a:picLocks noChangeAspect="1"/>
-          </p:cNvPicPr>
-          <p:nvPr/>
-        </p:nvPicPr>
-        <p:blipFill>
-          <a:blip r:embed="rId8">
-            <a:extLst>
-              <a:ext uri="{96DAC541-7B7A-43D3-8B79-37D633B846F1}">
-                <asvg:svgBlip xmlns:asvg="http://schemas.microsoft.com/office/drawing/2016/SVG/main" r:embed="rId9"/>
-              </a:ext>
-            </a:extLst>
-          </a:blip>
-          <a:stretch>
-            <a:fillRect/>
-          </a:stretch>
-        </p:blipFill>
-        <p:spPr>
-          <a:xfrm>
-            <a:off x="6071720" y="3245387"/>
-            <a:ext cx="914400" cy="914400"/>
-          </a:xfrm>
-          <a:prstGeom prst="rect">
-            <a:avLst/>
-          </a:prstGeom>
-        </p:spPr>
-      </p:pic>
-      <p:cxnSp>
-        <p:nvCxnSpPr>
-          <p:cNvPr id="38" name="Straight Arrow Connector 37">
-            <a:extLst>
-              <a:ext uri="{FF2B5EF4-FFF2-40B4-BE49-F238E27FC236}">
-                <a16:creationId xmlns:a16="http://schemas.microsoft.com/office/drawing/2014/main" id="{2BC7DB9B-2F86-D095-7D6F-332A31A7033E}"/>
-              </a:ext>
-            </a:extLst>
-          </p:cNvPr>
-          <p:cNvCxnSpPr>
-            <a:cxnSpLocks/>
-            <a:stCxn id="15" idx="3"/>
-            <a:endCxn id="55" idx="1"/>
-          </p:cNvCxnSpPr>
-          <p:nvPr/>
-        </p:nvCxnSpPr>
-        <p:spPr>
-          <a:xfrm flipV="1">
-            <a:off x="7406640" y="2470416"/>
-            <a:ext cx="1682496" cy="901952"/>
-          </a:xfrm>
-          <a:prstGeom prst="straightConnector1">
-            <a:avLst/>
-          </a:prstGeom>
-          <a:ln w="38100">
-            <a:tailEnd type="triangle"/>
-          </a:ln>
-        </p:spPr>
-        <p:style>
-          <a:lnRef idx="2">
-            <a:schemeClr val="accent1"/>
-          </a:lnRef>
-          <a:fillRef idx="0">
-            <a:schemeClr val="accent1"/>
-          </a:fillRef>
-          <a:effectRef idx="1">
-            <a:schemeClr val="accent1"/>
-          </a:effectRef>
-          <a:fontRef idx="minor">
-            <a:schemeClr val="tx1"/>
-          </a:fontRef>
-        </p:style>
-      </p:cxnSp>
-      <p:cxnSp>
-        <p:nvCxnSpPr>
-          <p:cNvPr id="48" name="Straight Arrow Connector 47">
-            <a:extLst>
-              <a:ext uri="{FF2B5EF4-FFF2-40B4-BE49-F238E27FC236}">
-                <a16:creationId xmlns:a16="http://schemas.microsoft.com/office/drawing/2014/main" id="{CF6BA5AF-FBCE-04C2-F4C8-7E84EA5C8519}"/>
-              </a:ext>
-            </a:extLst>
-          </p:cNvPr>
-          <p:cNvCxnSpPr>
-            <a:cxnSpLocks/>
-            <a:stCxn id="15" idx="3"/>
-            <a:endCxn id="58" idx="1"/>
-          </p:cNvCxnSpPr>
-          <p:nvPr/>
-        </p:nvCxnSpPr>
-        <p:spPr>
-          <a:xfrm>
-            <a:off x="7406640" y="3372368"/>
-            <a:ext cx="1682496" cy="12448"/>
-          </a:xfrm>
-          <a:prstGeom prst="straightConnector1">
-            <a:avLst/>
-          </a:prstGeom>
-          <a:ln w="38100">
-            <a:tailEnd type="triangle"/>
-          </a:ln>
-        </p:spPr>
-        <p:style>
-          <a:lnRef idx="2">
-            <a:schemeClr val="accent1"/>
-          </a:lnRef>
-          <a:fillRef idx="0">
-            <a:schemeClr val="accent1"/>
-          </a:fillRef>
-          <a:effectRef idx="1">
-            <a:schemeClr val="accent1"/>
-          </a:effectRef>
-          <a:fontRef idx="minor">
-            <a:schemeClr val="tx1"/>
-          </a:fontRef>
-        </p:style>
-      </p:cxnSp>
-      <p:cxnSp>
-        <p:nvCxnSpPr>
-          <p:cNvPr id="51" name="Straight Arrow Connector 50">
-            <a:extLst>
-              <a:ext uri="{FF2B5EF4-FFF2-40B4-BE49-F238E27FC236}">
-                <a16:creationId xmlns:a16="http://schemas.microsoft.com/office/drawing/2014/main" id="{1C72BCC8-F4BA-5EE0-240C-8937EFDAC060}"/>
-              </a:ext>
-            </a:extLst>
-          </p:cNvPr>
-          <p:cNvCxnSpPr>
-            <a:cxnSpLocks/>
-            <a:stCxn id="15" idx="3"/>
-            <a:endCxn id="62" idx="1"/>
-          </p:cNvCxnSpPr>
-          <p:nvPr/>
-        </p:nvCxnSpPr>
-        <p:spPr>
-          <a:xfrm>
-            <a:off x="7406640" y="3372368"/>
-            <a:ext cx="1682496" cy="926848"/>
-          </a:xfrm>
-          <a:prstGeom prst="straightConnector1">
-            <a:avLst/>
-          </a:prstGeom>
-          <a:ln w="38100">
-            <a:tailEnd type="triangle"/>
-          </a:ln>
-        </p:spPr>
-        <p:style>
-          <a:lnRef idx="2">
-            <a:schemeClr val="accent1"/>
-          </a:lnRef>
-          <a:fillRef idx="0">
-            <a:schemeClr val="accent1"/>
-          </a:fillRef>
-          <a:effectRef idx="1">
-            <a:schemeClr val="accent1"/>
-          </a:effectRef>
-          <a:fontRef idx="minor">
-            <a:schemeClr val="tx1"/>
-          </a:fontRef>
-        </p:style>
-      </p:cxnSp>
-      <p:pic>
-        <p:nvPicPr>
-          <p:cNvPr id="55" name="Graphic 54" descr="Document outline">
-            <a:extLst>
-              <a:ext uri="{FF2B5EF4-FFF2-40B4-BE49-F238E27FC236}">
-                <a16:creationId xmlns:a16="http://schemas.microsoft.com/office/drawing/2014/main" id="{A0666293-654D-1989-D800-49A150688F9B}"/>
-              </a:ext>
-            </a:extLst>
-          </p:cNvPr>
-          <p:cNvPicPr>
-            <a:picLocks noChangeAspect="1"/>
-          </p:cNvPicPr>
-          <p:nvPr/>
-        </p:nvPicPr>
-        <p:blipFill>
-          <a:blip r:embed="rId4">
-            <a:extLst>
-              <a:ext uri="{96DAC541-7B7A-43D3-8B79-37D633B846F1}">
-                <asvg:svgBlip xmlns:asvg="http://schemas.microsoft.com/office/drawing/2016/SVG/main" r:embed="rId5"/>
-              </a:ext>
-            </a:extLst>
-          </a:blip>
-          <a:stretch>
-            <a:fillRect/>
-          </a:stretch>
-        </p:blipFill>
-        <p:spPr>
-          <a:xfrm>
-            <a:off x="9089136" y="2013216"/>
-            <a:ext cx="914400" cy="914400"/>
-          </a:xfrm>
-          <a:prstGeom prst="rect">
-            <a:avLst/>
-          </a:prstGeom>
-        </p:spPr>
-      </p:pic>
-      <p:pic>
-        <p:nvPicPr>
-          <p:cNvPr id="58" name="Graphic 57" descr="Table outline">
-            <a:extLst>
-              <a:ext uri="{FF2B5EF4-FFF2-40B4-BE49-F238E27FC236}">
-                <a16:creationId xmlns:a16="http://schemas.microsoft.com/office/drawing/2014/main" id="{40E981D2-63A3-19E6-84B9-99C25A1DD9C9}"/>
-              </a:ext>
-            </a:extLst>
-          </p:cNvPr>
-          <p:cNvPicPr>
-            <a:picLocks noChangeAspect="1"/>
-          </p:cNvPicPr>
-          <p:nvPr/>
-        </p:nvPicPr>
-        <p:blipFill>
-          <a:blip r:embed="rId6">
-            <a:extLst>
-              <a:ext uri="{96DAC541-7B7A-43D3-8B79-37D633B846F1}">
-                <asvg:svgBlip xmlns:asvg="http://schemas.microsoft.com/office/drawing/2016/SVG/main" r:embed="rId7"/>
-              </a:ext>
-            </a:extLst>
-          </a:blip>
-          <a:stretch>
-            <a:fillRect/>
-          </a:stretch>
-        </p:blipFill>
-        <p:spPr>
-          <a:xfrm>
-            <a:off x="9089136" y="2927616"/>
-            <a:ext cx="914400" cy="914400"/>
-          </a:xfrm>
-          <a:prstGeom prst="rect">
-            <a:avLst/>
-          </a:prstGeom>
-        </p:spPr>
-      </p:pic>
-      <p:pic>
-        <p:nvPicPr>
-          <p:cNvPr id="62" name="Graphic 61" descr="Image outline">
-            <a:extLst>
-              <a:ext uri="{FF2B5EF4-FFF2-40B4-BE49-F238E27FC236}">
-                <a16:creationId xmlns:a16="http://schemas.microsoft.com/office/drawing/2014/main" id="{91EED078-FCB6-20EE-60DC-D1D2A58380B0}"/>
-              </a:ext>
-            </a:extLst>
-          </p:cNvPr>
-          <p:cNvPicPr>
-            <a:picLocks noChangeAspect="1"/>
-          </p:cNvPicPr>
-          <p:nvPr/>
-        </p:nvPicPr>
-        <p:blipFill>
-          <a:blip r:embed="rId8">
-            <a:extLst>
-              <a:ext uri="{96DAC541-7B7A-43D3-8B79-37D633B846F1}">
-                <asvg:svgBlip xmlns:asvg="http://schemas.microsoft.com/office/drawing/2016/SVG/main" r:embed="rId9"/>
-              </a:ext>
-            </a:extLst>
-          </a:blip>
-          <a:stretch>
-            <a:fillRect/>
-          </a:stretch>
-        </p:blipFill>
-        <p:spPr>
-          <a:xfrm>
-            <a:off x="9089136" y="3842016"/>
-            <a:ext cx="914400" cy="914400"/>
-          </a:xfrm>
-          <a:prstGeom prst="rect">
-            <a:avLst/>
-          </a:prstGeom>
-        </p:spPr>
-      </p:pic>
     </p:spTree>
     <p:extLst>
       <p:ext uri="{BB962C8B-B14F-4D97-AF65-F5344CB8AC3E}">
-        <p14:creationId xmlns:p14="http://schemas.microsoft.com/office/powerpoint/2010/main" val="2507382561"/>
+        <p14:creationId xmlns:p14="http://schemas.microsoft.com/office/powerpoint/2010/main" val="3564316749"/>
       </p:ext>
     </p:extLst>
   </p:cSld>
@@ -9237,7 +9191,7 @@
           <p:cNvPr id="2" name="Title 1">
             <a:extLst>
               <a:ext uri="{FF2B5EF4-FFF2-40B4-BE49-F238E27FC236}">
-                <a16:creationId xmlns:a16="http://schemas.microsoft.com/office/drawing/2014/main" id="{C876565B-2008-1396-399B-5AE028B1472B}"/>
+                <a16:creationId xmlns:a16="http://schemas.microsoft.com/office/drawing/2014/main" id="{AFD2DD15-2DC1-CC2C-84A0-909D9EF8A523}"/>
               </a:ext>
             </a:extLst>
           </p:cNvPr>
@@ -9262,10 +9216,10 @@
       </p:sp>
       <p:sp>
         <p:nvSpPr>
-          <p:cNvPr id="4" name="Title 1">
-            <a:extLst>
-              <a:ext uri="{FF2B5EF4-FFF2-40B4-BE49-F238E27FC236}">
-                <a16:creationId xmlns:a16="http://schemas.microsoft.com/office/drawing/2014/main" id="{E301DBC9-2071-3E79-D94A-137D016265E5}"/>
+          <p:cNvPr id="6" name="Title 1">
+            <a:extLst>
+              <a:ext uri="{FF2B5EF4-FFF2-40B4-BE49-F238E27FC236}">
+                <a16:creationId xmlns:a16="http://schemas.microsoft.com/office/drawing/2014/main" id="{7A652257-6AF1-E270-57AF-9FDA85FC0CAD}"/>
               </a:ext>
             </a:extLst>
           </p:cNvPr>
@@ -9312,130 +9266,17 @@
           <a:p>
             <a:r>
               <a:rPr lang="en-US" sz="2800" i="1" dirty="0"/>
-              <a:t>Chunking</a:t>
-            </a:r>
-          </a:p>
-        </p:txBody>
-      </p:sp>
-      <p:pic>
-        <p:nvPicPr>
-          <p:cNvPr id="6" name="Graphic 5" descr="Document outline">
-            <a:extLst>
-              <a:ext uri="{FF2B5EF4-FFF2-40B4-BE49-F238E27FC236}">
-                <a16:creationId xmlns:a16="http://schemas.microsoft.com/office/drawing/2014/main" id="{D97DE07F-8C38-423F-29CE-2D703ABA4908}"/>
-              </a:ext>
-            </a:extLst>
-          </p:cNvPr>
-          <p:cNvPicPr>
-            <a:picLocks noChangeAspect="1"/>
-          </p:cNvPicPr>
-          <p:nvPr/>
-        </p:nvPicPr>
-        <p:blipFill>
-          <a:blip r:embed="rId2">
-            <a:extLst>
-              <a:ext uri="{96DAC541-7B7A-43D3-8B79-37D633B846F1}">
-                <asvg:svgBlip xmlns:asvg="http://schemas.microsoft.com/office/drawing/2016/SVG/main" r:embed="rId3"/>
-              </a:ext>
-            </a:extLst>
-          </a:blip>
-          <a:stretch>
-            <a:fillRect/>
-          </a:stretch>
-        </p:blipFill>
-        <p:spPr>
-          <a:xfrm>
-            <a:off x="1743251" y="2795406"/>
-            <a:ext cx="1284823" cy="1284823"/>
-          </a:xfrm>
-          <a:prstGeom prst="rect">
-            <a:avLst/>
-          </a:prstGeom>
-        </p:spPr>
-      </p:pic>
-      <p:sp>
-        <p:nvSpPr>
-          <p:cNvPr id="7" name="TextBox 6">
-            <a:extLst>
-              <a:ext uri="{FF2B5EF4-FFF2-40B4-BE49-F238E27FC236}">
-                <a16:creationId xmlns:a16="http://schemas.microsoft.com/office/drawing/2014/main" id="{38F5ECB0-970B-0E97-36FE-CFE360C8D4DD}"/>
-              </a:ext>
-            </a:extLst>
-          </p:cNvPr>
-          <p:cNvSpPr txBox="1"/>
-          <p:nvPr/>
-        </p:nvSpPr>
-        <p:spPr>
-          <a:xfrm>
-            <a:off x="2023803" y="3988160"/>
-            <a:ext cx="1552074" cy="369332"/>
-          </a:xfrm>
-          <a:prstGeom prst="rect">
-            <a:avLst/>
-          </a:prstGeom>
-          <a:noFill/>
-        </p:spPr>
-        <p:txBody>
-          <a:bodyPr wrap="square" rtlCol="0">
-            <a:spAutoFit/>
-          </a:bodyPr>
-          <a:lstStyle/>
-          <a:p>
-            <a:r>
-              <a:rPr lang="en-US" dirty="0"/>
-              <a:t>Text</a:t>
-            </a:r>
-          </a:p>
-        </p:txBody>
-      </p:sp>
-      <p:cxnSp>
-        <p:nvCxnSpPr>
-          <p:cNvPr id="8" name="Straight Arrow Connector 7">
-            <a:extLst>
-              <a:ext uri="{FF2B5EF4-FFF2-40B4-BE49-F238E27FC236}">
-                <a16:creationId xmlns:a16="http://schemas.microsoft.com/office/drawing/2014/main" id="{186D6C68-499F-56DE-7DBA-752A042D0130}"/>
-              </a:ext>
-            </a:extLst>
-          </p:cNvPr>
-          <p:cNvCxnSpPr>
-            <a:cxnSpLocks/>
-            <a:endCxn id="11" idx="1"/>
-          </p:cNvCxnSpPr>
-          <p:nvPr/>
-        </p:nvCxnSpPr>
-        <p:spPr>
-          <a:xfrm>
-            <a:off x="2871537" y="3525701"/>
-            <a:ext cx="1549734" cy="0"/>
-          </a:xfrm>
-          <a:prstGeom prst="straightConnector1">
-            <a:avLst/>
-          </a:prstGeom>
-          <a:ln w="38100">
-            <a:tailEnd type="triangle"/>
-          </a:ln>
-        </p:spPr>
-        <p:style>
-          <a:lnRef idx="2">
-            <a:schemeClr val="accent1"/>
-          </a:lnRef>
-          <a:fillRef idx="0">
-            <a:schemeClr val="accent1"/>
-          </a:fillRef>
-          <a:effectRef idx="1">
-            <a:schemeClr val="accent1"/>
-          </a:effectRef>
-          <a:fontRef idx="minor">
-            <a:schemeClr val="tx1"/>
-          </a:fontRef>
-        </p:style>
-      </p:cxnSp>
-      <p:sp>
-        <p:nvSpPr>
-          <p:cNvPr id="11" name="Rectangle 10">
-            <a:extLst>
-              <a:ext uri="{FF2B5EF4-FFF2-40B4-BE49-F238E27FC236}">
-                <a16:creationId xmlns:a16="http://schemas.microsoft.com/office/drawing/2014/main" id="{A4EFCADA-56A2-4B7E-BADE-B5C26C35DE5A}"/>
+              <a:t>Information Extraction</a:t>
+            </a:r>
+          </a:p>
+        </p:txBody>
+      </p:sp>
+      <p:sp>
+        <p:nvSpPr>
+          <p:cNvPr id="7" name="Rectangle 6">
+            <a:extLst>
+              <a:ext uri="{FF2B5EF4-FFF2-40B4-BE49-F238E27FC236}">
+                <a16:creationId xmlns:a16="http://schemas.microsoft.com/office/drawing/2014/main" id="{5A761178-B18C-8941-79FB-08B83514DBB4}"/>
               </a:ext>
             </a:extLst>
           </p:cNvPr>
@@ -9444,8 +9285,8 @@
         </p:nvSpPr>
         <p:spPr>
           <a:xfrm>
-            <a:off x="4421271" y="2043658"/>
-            <a:ext cx="2910680" cy="2964086"/>
+            <a:off x="838200" y="2709587"/>
+            <a:ext cx="2289048" cy="1325563"/>
           </a:xfrm>
           <a:prstGeom prst="rect">
             <a:avLst/>
@@ -9477,14 +9318,174 @@
           <a:bodyPr lIns="274320" rIns="274320" rtlCol="0" anchor="ctr"/>
           <a:lstStyle/>
           <a:p>
-            <a:pPr lvl="1" algn="ctr"/>
+            <a:pPr algn="r"/>
             <a:r>
               <a:rPr lang="en-US" dirty="0">
                 <a:solidFill>
                   <a:sysClr val="windowText" lastClr="000000"/>
                 </a:solidFill>
               </a:rPr>
-              <a:t>     </a:t>
+              <a:t>Raw Data </a:t>
+            </a:r>
+          </a:p>
+          <a:p>
+            <a:pPr algn="r"/>
+            <a:r>
+              <a:rPr lang="en-US" dirty="0">
+                <a:solidFill>
+                  <a:sysClr val="windowText" lastClr="000000"/>
+                </a:solidFill>
+              </a:rPr>
+              <a:t>Sources</a:t>
+            </a:r>
+          </a:p>
+        </p:txBody>
+      </p:sp>
+      <p:pic>
+        <p:nvPicPr>
+          <p:cNvPr id="8" name="Picture 2" descr="Raw-Data Icons - Free SVG &amp; PNG Raw-Data Images - Noun Project">
+            <a:extLst>
+              <a:ext uri="{FF2B5EF4-FFF2-40B4-BE49-F238E27FC236}">
+                <a16:creationId xmlns:a16="http://schemas.microsoft.com/office/drawing/2014/main" id="{5E90B285-C1F3-6A3A-8210-53AFCE347910}"/>
+              </a:ext>
+            </a:extLst>
+          </p:cNvPr>
+          <p:cNvPicPr>
+            <a:picLocks noChangeAspect="1" noChangeArrowheads="1"/>
+          </p:cNvPicPr>
+          <p:nvPr/>
+        </p:nvPicPr>
+        <p:blipFill>
+          <a:blip r:embed="rId2">
+            <a:extLst>
+              <a:ext uri="{28A0092B-C50C-407E-A947-70E740481C1C}">
+                <a14:useLocalDpi xmlns:a14="http://schemas.microsoft.com/office/drawing/2010/main" val="0"/>
+              </a:ext>
+            </a:extLst>
+          </a:blip>
+          <a:srcRect/>
+          <a:stretch>
+            <a:fillRect/>
+          </a:stretch>
+        </p:blipFill>
+        <p:spPr bwMode="auto">
+          <a:xfrm>
+            <a:off x="994879" y="2932920"/>
+            <a:ext cx="878896" cy="878896"/>
+          </a:xfrm>
+          <a:prstGeom prst="rect">
+            <a:avLst/>
+          </a:prstGeom>
+          <a:noFill/>
+          <a:extLst>
+            <a:ext uri="{909E8E84-426E-40DD-AFC4-6F175D3DCCD1}">
+              <a14:hiddenFill xmlns:a14="http://schemas.microsoft.com/office/drawing/2010/main">
+                <a:solidFill>
+                  <a:srgbClr val="FFFFFF"/>
+                </a:solidFill>
+              </a14:hiddenFill>
+            </a:ext>
+          </a:extLst>
+        </p:spPr>
+      </p:pic>
+      <p:cxnSp>
+        <p:nvCxnSpPr>
+          <p:cNvPr id="11" name="Straight Arrow Connector 10">
+            <a:extLst>
+              <a:ext uri="{FF2B5EF4-FFF2-40B4-BE49-F238E27FC236}">
+                <a16:creationId xmlns:a16="http://schemas.microsoft.com/office/drawing/2014/main" id="{4E64EFA9-4ED5-0EDB-D0C1-F710F2D95BFE}"/>
+              </a:ext>
+            </a:extLst>
+          </p:cNvPr>
+          <p:cNvCxnSpPr>
+            <a:cxnSpLocks/>
+            <a:stCxn id="7" idx="3"/>
+            <a:endCxn id="15" idx="1"/>
+          </p:cNvCxnSpPr>
+          <p:nvPr/>
+        </p:nvCxnSpPr>
+        <p:spPr>
+          <a:xfrm flipV="1">
+            <a:off x="3127248" y="3372368"/>
+            <a:ext cx="768096" cy="1"/>
+          </a:xfrm>
+          <a:prstGeom prst="straightConnector1">
+            <a:avLst/>
+          </a:prstGeom>
+          <a:ln w="38100">
+            <a:tailEnd type="triangle"/>
+          </a:ln>
+        </p:spPr>
+        <p:style>
+          <a:lnRef idx="2">
+            <a:schemeClr val="accent1"/>
+          </a:lnRef>
+          <a:fillRef idx="0">
+            <a:schemeClr val="accent1"/>
+          </a:fillRef>
+          <a:effectRef idx="1">
+            <a:schemeClr val="accent1"/>
+          </a:effectRef>
+          <a:fontRef idx="minor">
+            <a:schemeClr val="tx1"/>
+          </a:fontRef>
+        </p:style>
+      </p:cxnSp>
+      <p:sp>
+        <p:nvSpPr>
+          <p:cNvPr id="15" name="Rectangle 14">
+            <a:extLst>
+              <a:ext uri="{FF2B5EF4-FFF2-40B4-BE49-F238E27FC236}">
+                <a16:creationId xmlns:a16="http://schemas.microsoft.com/office/drawing/2014/main" id="{35D3A2E0-A62A-0312-A50E-EE9748ECC542}"/>
+              </a:ext>
+            </a:extLst>
+          </p:cNvPr>
+          <p:cNvSpPr/>
+          <p:nvPr/>
+        </p:nvSpPr>
+        <p:spPr>
+          <a:xfrm>
+            <a:off x="3895344" y="2296166"/>
+            <a:ext cx="3511296" cy="2152404"/>
+          </a:xfrm>
+          <a:prstGeom prst="rect">
+            <a:avLst/>
+          </a:prstGeom>
+          <a:noFill/>
+          <a:ln w="28575">
+            <a:solidFill>
+              <a:schemeClr val="tx1"/>
+            </a:solidFill>
+          </a:ln>
+        </p:spPr>
+        <p:style>
+          <a:lnRef idx="2">
+            <a:schemeClr val="accent1">
+              <a:shade val="15000"/>
+            </a:schemeClr>
+          </a:lnRef>
+          <a:fillRef idx="1">
+            <a:schemeClr val="accent1"/>
+          </a:fillRef>
+          <a:effectRef idx="0">
+            <a:schemeClr val="accent1"/>
+          </a:effectRef>
+          <a:fontRef idx="minor">
+            <a:schemeClr val="lt1"/>
+          </a:fontRef>
+        </p:style>
+        <p:txBody>
+          <a:bodyPr lIns="274320" rIns="274320" rtlCol="0" anchor="ctr"/>
+          <a:lstStyle/>
+          <a:p>
+            <a:pPr algn="r"/>
+            <a:r>
+              <a:rPr lang="en-US" dirty="0">
+                <a:solidFill>
+                  <a:sysClr val="windowText" lastClr="000000"/>
+                </a:solidFill>
+              </a:rPr>
+              <a:t>Information Extraction</a:t>
             </a:r>
           </a:p>
           <a:p>
@@ -9523,10 +9524,146 @@
       </p:sp>
       <p:pic>
         <p:nvPicPr>
-          <p:cNvPr id="13" name="Graphic 12" descr="Chat bubble outline">
-            <a:extLst>
-              <a:ext uri="{FF2B5EF4-FFF2-40B4-BE49-F238E27FC236}">
-                <a16:creationId xmlns:a16="http://schemas.microsoft.com/office/drawing/2014/main" id="{C3EA804B-196E-51FA-EACD-4C1103E3995A}"/>
+          <p:cNvPr id="18" name="Picture 17">
+            <a:extLst>
+              <a:ext uri="{FF2B5EF4-FFF2-40B4-BE49-F238E27FC236}">
+                <a16:creationId xmlns:a16="http://schemas.microsoft.com/office/drawing/2014/main" id="{5EC93294-04C4-DAE7-F8DD-07F260F98035}"/>
+              </a:ext>
+            </a:extLst>
+          </p:cNvPr>
+          <p:cNvPicPr>
+            <a:picLocks noChangeAspect="1"/>
+          </p:cNvPicPr>
+          <p:nvPr/>
+        </p:nvPicPr>
+        <p:blipFill>
+          <a:blip r:embed="rId3"/>
+          <a:srcRect l="-762" t="-5651" r="762" b="19524"/>
+          <a:stretch>
+            <a:fillRect/>
+          </a:stretch>
+        </p:blipFill>
+        <p:spPr>
+          <a:xfrm>
+            <a:off x="4123774" y="2376045"/>
+            <a:ext cx="807145" cy="695170"/>
+          </a:xfrm>
+          <a:prstGeom prst="rect">
+            <a:avLst/>
+          </a:prstGeom>
+        </p:spPr>
+      </p:pic>
+      <p:sp>
+        <p:nvSpPr>
+          <p:cNvPr id="24" name="TextBox 23">
+            <a:extLst>
+              <a:ext uri="{FF2B5EF4-FFF2-40B4-BE49-F238E27FC236}">
+                <a16:creationId xmlns:a16="http://schemas.microsoft.com/office/drawing/2014/main" id="{542D9F2B-3AEB-1A49-CF63-9CE2FB95FB64}"/>
+              </a:ext>
+            </a:extLst>
+          </p:cNvPr>
+          <p:cNvSpPr txBox="1"/>
+          <p:nvPr/>
+        </p:nvSpPr>
+        <p:spPr>
+          <a:xfrm>
+            <a:off x="4294462" y="4002226"/>
+            <a:ext cx="887138" cy="369332"/>
+          </a:xfrm>
+          <a:prstGeom prst="rect">
+            <a:avLst/>
+          </a:prstGeom>
+          <a:noFill/>
+        </p:spPr>
+        <p:txBody>
+          <a:bodyPr wrap="square" rtlCol="0">
+            <a:spAutoFit/>
+          </a:bodyPr>
+          <a:lstStyle/>
+          <a:p>
+            <a:r>
+              <a:rPr lang="en-US" dirty="0"/>
+              <a:t>Text</a:t>
+            </a:r>
+          </a:p>
+        </p:txBody>
+      </p:sp>
+      <p:sp>
+        <p:nvSpPr>
+          <p:cNvPr id="25" name="TextBox 24">
+            <a:extLst>
+              <a:ext uri="{FF2B5EF4-FFF2-40B4-BE49-F238E27FC236}">
+                <a16:creationId xmlns:a16="http://schemas.microsoft.com/office/drawing/2014/main" id="{B4D29D72-F9A8-99A0-16F7-B28196DE4BA1}"/>
+              </a:ext>
+            </a:extLst>
+          </p:cNvPr>
+          <p:cNvSpPr txBox="1"/>
+          <p:nvPr/>
+        </p:nvSpPr>
+        <p:spPr>
+          <a:xfrm>
+            <a:off x="5111223" y="4017876"/>
+            <a:ext cx="887138" cy="369332"/>
+          </a:xfrm>
+          <a:prstGeom prst="rect">
+            <a:avLst/>
+          </a:prstGeom>
+          <a:noFill/>
+        </p:spPr>
+        <p:txBody>
+          <a:bodyPr wrap="square" rtlCol="0">
+            <a:spAutoFit/>
+          </a:bodyPr>
+          <a:lstStyle/>
+          <a:p>
+            <a:r>
+              <a:rPr lang="en-US" dirty="0"/>
+              <a:t>Tables</a:t>
+            </a:r>
+          </a:p>
+        </p:txBody>
+      </p:sp>
+      <p:sp>
+        <p:nvSpPr>
+          <p:cNvPr id="26" name="TextBox 25">
+            <a:extLst>
+              <a:ext uri="{FF2B5EF4-FFF2-40B4-BE49-F238E27FC236}">
+                <a16:creationId xmlns:a16="http://schemas.microsoft.com/office/drawing/2014/main" id="{A689BDDB-58B3-16C2-202F-750523854889}"/>
+              </a:ext>
+            </a:extLst>
+          </p:cNvPr>
+          <p:cNvSpPr txBox="1"/>
+          <p:nvPr/>
+        </p:nvSpPr>
+        <p:spPr>
+          <a:xfrm>
+            <a:off x="6096000" y="4017876"/>
+            <a:ext cx="1237281" cy="369332"/>
+          </a:xfrm>
+          <a:prstGeom prst="rect">
+            <a:avLst/>
+          </a:prstGeom>
+          <a:noFill/>
+        </p:spPr>
+        <p:txBody>
+          <a:bodyPr wrap="square" rtlCol="0">
+            <a:spAutoFit/>
+          </a:bodyPr>
+          <a:lstStyle/>
+          <a:p>
+            <a:r>
+              <a:rPr lang="en-US" dirty="0"/>
+              <a:t>Images</a:t>
+            </a:r>
+          </a:p>
+        </p:txBody>
+      </p:sp>
+      <p:pic>
+        <p:nvPicPr>
+          <p:cNvPr id="30" name="Graphic 29" descr="Document outline">
+            <a:extLst>
+              <a:ext uri="{FF2B5EF4-FFF2-40B4-BE49-F238E27FC236}">
+                <a16:creationId xmlns:a16="http://schemas.microsoft.com/office/drawing/2014/main" id="{3A108A4C-C7FA-4AA2-D95D-14224DBBBD30}"/>
               </a:ext>
             </a:extLst>
           </p:cNvPr>
@@ -9549,142 +9686,192 @@
         </p:blipFill>
         <p:spPr>
           <a:xfrm>
-            <a:off x="4565463" y="2200138"/>
-            <a:ext cx="971750" cy="971750"/>
+            <a:off x="4128940" y="3151094"/>
+            <a:ext cx="914400" cy="914400"/>
           </a:xfrm>
           <a:prstGeom prst="rect">
             <a:avLst/>
           </a:prstGeom>
         </p:spPr>
       </p:pic>
-      <p:sp>
-        <p:nvSpPr>
-          <p:cNvPr id="15" name="TextBox 14">
-            <a:extLst>
-              <a:ext uri="{FF2B5EF4-FFF2-40B4-BE49-F238E27FC236}">
-                <a16:creationId xmlns:a16="http://schemas.microsoft.com/office/drawing/2014/main" id="{2290CB44-4B66-1A60-BDA5-288764580DAB}"/>
-              </a:ext>
-            </a:extLst>
-          </p:cNvPr>
-          <p:cNvSpPr txBox="1"/>
-          <p:nvPr/>
-        </p:nvSpPr>
-        <p:spPr>
-          <a:xfrm>
-            <a:off x="5537213" y="2426078"/>
-            <a:ext cx="1604210" cy="369332"/>
-          </a:xfrm>
-          <a:prstGeom prst="rect">
-            <a:avLst/>
-          </a:prstGeom>
-          <a:noFill/>
-        </p:spPr>
-        <p:txBody>
-          <a:bodyPr wrap="square" rtlCol="0">
-            <a:spAutoFit/>
-          </a:bodyPr>
-          <a:lstStyle/>
-          <a:p>
-            <a:r>
-              <a:rPr lang="en-US" dirty="0"/>
-              <a:t>Chunking</a:t>
-            </a:r>
-          </a:p>
-        </p:txBody>
-      </p:sp>
-      <p:sp>
-        <p:nvSpPr>
-          <p:cNvPr id="19" name="TextBox 18">
-            <a:extLst>
-              <a:ext uri="{FF2B5EF4-FFF2-40B4-BE49-F238E27FC236}">
-                <a16:creationId xmlns:a16="http://schemas.microsoft.com/office/drawing/2014/main" id="{5E251F56-CE0E-1DBE-28F6-5E17961F5312}"/>
-              </a:ext>
-            </a:extLst>
-          </p:cNvPr>
-          <p:cNvSpPr txBox="1"/>
-          <p:nvPr/>
-        </p:nvSpPr>
-        <p:spPr>
-          <a:xfrm>
-            <a:off x="4737434" y="3070580"/>
-            <a:ext cx="2566737" cy="1754326"/>
-          </a:xfrm>
-          <a:prstGeom prst="rect">
-            <a:avLst/>
-          </a:prstGeom>
-          <a:noFill/>
-        </p:spPr>
-        <p:txBody>
-          <a:bodyPr wrap="square" rtlCol="0">
-            <a:spAutoFit/>
-          </a:bodyPr>
-          <a:lstStyle/>
-          <a:p>
-            <a:r>
-              <a:rPr lang="en-US" dirty="0"/>
-              <a:t>Break Text down into smaller Chunks by:</a:t>
-            </a:r>
-          </a:p>
-          <a:p>
-            <a:pPr marL="285750" indent="-285750">
-              <a:buFont typeface="Arial" panose="020B0604020202020204" pitchFamily="34" charset="0"/>
-              <a:buChar char="•"/>
-            </a:pPr>
-            <a:r>
-              <a:rPr lang="en-US" dirty="0"/>
-              <a:t>Characters</a:t>
-            </a:r>
-          </a:p>
-          <a:p>
-            <a:pPr marL="285750" indent="-285750">
-              <a:buFont typeface="Arial" panose="020B0604020202020204" pitchFamily="34" charset="0"/>
-              <a:buChar char="•"/>
-            </a:pPr>
-            <a:r>
-              <a:rPr lang="en-US" dirty="0"/>
-              <a:t>Tokens</a:t>
-            </a:r>
-          </a:p>
-          <a:p>
-            <a:pPr marL="285750" indent="-285750">
-              <a:buFont typeface="Arial" panose="020B0604020202020204" pitchFamily="34" charset="0"/>
-              <a:buChar char="•"/>
-            </a:pPr>
-            <a:r>
-              <a:rPr lang="en-US" dirty="0"/>
-              <a:t>Delimiters </a:t>
-            </a:r>
-          </a:p>
-          <a:p>
-            <a:pPr marL="285750" indent="-285750">
-              <a:buFont typeface="Arial" panose="020B0604020202020204" pitchFamily="34" charset="0"/>
-              <a:buChar char="•"/>
-            </a:pPr>
-            <a:r>
-              <a:rPr lang="en-US" dirty="0"/>
-              <a:t>Headings</a:t>
-            </a:r>
-          </a:p>
-        </p:txBody>
-      </p:sp>
+      <p:pic>
+        <p:nvPicPr>
+          <p:cNvPr id="32" name="Graphic 31" descr="Table outline">
+            <a:extLst>
+              <a:ext uri="{FF2B5EF4-FFF2-40B4-BE49-F238E27FC236}">
+                <a16:creationId xmlns:a16="http://schemas.microsoft.com/office/drawing/2014/main" id="{9B79C71E-BD65-CFEF-6D9F-2FEADD142CB8}"/>
+              </a:ext>
+            </a:extLst>
+          </p:cNvPr>
+          <p:cNvPicPr>
+            <a:picLocks noChangeAspect="1"/>
+          </p:cNvPicPr>
+          <p:nvPr/>
+        </p:nvPicPr>
+        <p:blipFill>
+          <a:blip r:embed="rId6">
+            <a:extLst>
+              <a:ext uri="{96DAC541-7B7A-43D3-8B79-37D633B846F1}">
+                <asvg:svgBlip xmlns:asvg="http://schemas.microsoft.com/office/drawing/2016/SVG/main" r:embed="rId7"/>
+              </a:ext>
+            </a:extLst>
+          </a:blip>
+          <a:stretch>
+            <a:fillRect/>
+          </a:stretch>
+        </p:blipFill>
+        <p:spPr>
+          <a:xfrm>
+            <a:off x="5067620" y="3288142"/>
+            <a:ext cx="914400" cy="914400"/>
+          </a:xfrm>
+          <a:prstGeom prst="rect">
+            <a:avLst/>
+          </a:prstGeom>
+        </p:spPr>
+      </p:pic>
+      <p:pic>
+        <p:nvPicPr>
+          <p:cNvPr id="34" name="Graphic 33" descr="Image outline">
+            <a:extLst>
+              <a:ext uri="{FF2B5EF4-FFF2-40B4-BE49-F238E27FC236}">
+                <a16:creationId xmlns:a16="http://schemas.microsoft.com/office/drawing/2014/main" id="{F8AF69EE-D90B-472F-DFAD-7E96C42BE030}"/>
+              </a:ext>
+            </a:extLst>
+          </p:cNvPr>
+          <p:cNvPicPr>
+            <a:picLocks noChangeAspect="1"/>
+          </p:cNvPicPr>
+          <p:nvPr/>
+        </p:nvPicPr>
+        <p:blipFill>
+          <a:blip r:embed="rId8">
+            <a:extLst>
+              <a:ext uri="{96DAC541-7B7A-43D3-8B79-37D633B846F1}">
+                <asvg:svgBlip xmlns:asvg="http://schemas.microsoft.com/office/drawing/2016/SVG/main" r:embed="rId9"/>
+              </a:ext>
+            </a:extLst>
+          </a:blip>
+          <a:stretch>
+            <a:fillRect/>
+          </a:stretch>
+        </p:blipFill>
+        <p:spPr>
+          <a:xfrm>
+            <a:off x="6071720" y="3245387"/>
+            <a:ext cx="914400" cy="914400"/>
+          </a:xfrm>
+          <a:prstGeom prst="rect">
+            <a:avLst/>
+          </a:prstGeom>
+        </p:spPr>
+      </p:pic>
       <p:cxnSp>
         <p:nvCxnSpPr>
-          <p:cNvPr id="24" name="Straight Arrow Connector 23">
-            <a:extLst>
-              <a:ext uri="{FF2B5EF4-FFF2-40B4-BE49-F238E27FC236}">
-                <a16:creationId xmlns:a16="http://schemas.microsoft.com/office/drawing/2014/main" id="{437FF654-079E-F9DE-D32E-3806C9D04F17}"/>
+          <p:cNvPr id="38" name="Straight Arrow Connector 37">
+            <a:extLst>
+              <a:ext uri="{FF2B5EF4-FFF2-40B4-BE49-F238E27FC236}">
+                <a16:creationId xmlns:a16="http://schemas.microsoft.com/office/drawing/2014/main" id="{2BC7DB9B-2F86-D095-7D6F-332A31A7033E}"/>
               </a:ext>
             </a:extLst>
           </p:cNvPr>
           <p:cNvCxnSpPr>
             <a:cxnSpLocks/>
+            <a:stCxn id="15" idx="3"/>
+            <a:endCxn id="55" idx="1"/>
           </p:cNvCxnSpPr>
           <p:nvPr/>
         </p:nvCxnSpPr>
         <p:spPr>
-          <a:xfrm>
-            <a:off x="7331951" y="3433459"/>
-            <a:ext cx="1651628" cy="0"/>
+          <a:xfrm flipV="1">
+            <a:off x="7406640" y="2470416"/>
+            <a:ext cx="1682496" cy="901952"/>
+          </a:xfrm>
+          <a:prstGeom prst="straightConnector1">
+            <a:avLst/>
+          </a:prstGeom>
+          <a:ln w="38100">
+            <a:tailEnd type="triangle"/>
+          </a:ln>
+        </p:spPr>
+        <p:style>
+          <a:lnRef idx="2">
+            <a:schemeClr val="accent1"/>
+          </a:lnRef>
+          <a:fillRef idx="0">
+            <a:schemeClr val="accent1"/>
+          </a:fillRef>
+          <a:effectRef idx="1">
+            <a:schemeClr val="accent1"/>
+          </a:effectRef>
+          <a:fontRef idx="minor">
+            <a:schemeClr val="tx1"/>
+          </a:fontRef>
+        </p:style>
+      </p:cxnSp>
+      <p:cxnSp>
+        <p:nvCxnSpPr>
+          <p:cNvPr id="48" name="Straight Arrow Connector 47">
+            <a:extLst>
+              <a:ext uri="{FF2B5EF4-FFF2-40B4-BE49-F238E27FC236}">
+                <a16:creationId xmlns:a16="http://schemas.microsoft.com/office/drawing/2014/main" id="{CF6BA5AF-FBCE-04C2-F4C8-7E84EA5C8519}"/>
+              </a:ext>
+            </a:extLst>
+          </p:cNvPr>
+          <p:cNvCxnSpPr>
+            <a:cxnSpLocks/>
+            <a:stCxn id="15" idx="3"/>
+            <a:endCxn id="58" idx="1"/>
+          </p:cNvCxnSpPr>
+          <p:nvPr/>
+        </p:nvCxnSpPr>
+        <p:spPr>
+          <a:xfrm>
+            <a:off x="7406640" y="3372368"/>
+            <a:ext cx="1682496" cy="12448"/>
+          </a:xfrm>
+          <a:prstGeom prst="straightConnector1">
+            <a:avLst/>
+          </a:prstGeom>
+          <a:ln w="38100">
+            <a:tailEnd type="triangle"/>
+          </a:ln>
+        </p:spPr>
+        <p:style>
+          <a:lnRef idx="2">
+            <a:schemeClr val="accent1"/>
+          </a:lnRef>
+          <a:fillRef idx="0">
+            <a:schemeClr val="accent1"/>
+          </a:fillRef>
+          <a:effectRef idx="1">
+            <a:schemeClr val="accent1"/>
+          </a:effectRef>
+          <a:fontRef idx="minor">
+            <a:schemeClr val="tx1"/>
+          </a:fontRef>
+        </p:style>
+      </p:cxnSp>
+      <p:cxnSp>
+        <p:nvCxnSpPr>
+          <p:cNvPr id="51" name="Straight Arrow Connector 50">
+            <a:extLst>
+              <a:ext uri="{FF2B5EF4-FFF2-40B4-BE49-F238E27FC236}">
+                <a16:creationId xmlns:a16="http://schemas.microsoft.com/office/drawing/2014/main" id="{1C72BCC8-F4BA-5EE0-240C-8937EFDAC060}"/>
+              </a:ext>
+            </a:extLst>
+          </p:cNvPr>
+          <p:cNvCxnSpPr>
+            <a:cxnSpLocks/>
+            <a:stCxn id="15" idx="3"/>
+            <a:endCxn id="62" idx="1"/>
+          </p:cNvCxnSpPr>
+          <p:nvPr/>
+        </p:nvCxnSpPr>
+        <p:spPr>
+          <a:xfrm>
+            <a:off x="7406640" y="3372368"/>
+            <a:ext cx="1682496" cy="926848"/>
           </a:xfrm>
           <a:prstGeom prst="straightConnector1">
             <a:avLst/>
@@ -9710,10 +9897,10 @@
       </p:cxnSp>
       <p:pic>
         <p:nvPicPr>
-          <p:cNvPr id="29" name="Graphic 28" descr="Document outline">
-            <a:extLst>
-              <a:ext uri="{FF2B5EF4-FFF2-40B4-BE49-F238E27FC236}">
-                <a16:creationId xmlns:a16="http://schemas.microsoft.com/office/drawing/2014/main" id="{F6E1346E-A59D-FCD3-3BA5-E1E95BB8B527}"/>
+          <p:cNvPr id="55" name="Graphic 54" descr="Document outline">
+            <a:extLst>
+              <a:ext uri="{FF2B5EF4-FFF2-40B4-BE49-F238E27FC236}">
+                <a16:creationId xmlns:a16="http://schemas.microsoft.com/office/drawing/2014/main" id="{A0666293-654D-1989-D800-49A150688F9B}"/>
               </a:ext>
             </a:extLst>
           </p:cNvPr>
@@ -9723,10 +9910,10 @@
           <p:nvPr/>
         </p:nvPicPr>
         <p:blipFill>
-          <a:blip r:embed="rId2">
+          <a:blip r:embed="rId4">
             <a:extLst>
               <a:ext uri="{96DAC541-7B7A-43D3-8B79-37D633B846F1}">
-                <asvg:svgBlip xmlns:asvg="http://schemas.microsoft.com/office/drawing/2016/SVG/main" r:embed="rId3"/>
+                <asvg:svgBlip xmlns:asvg="http://schemas.microsoft.com/office/drawing/2016/SVG/main" r:embed="rId5"/>
               </a:ext>
             </a:extLst>
           </a:blip>
@@ -9736,55 +9923,20 @@
         </p:blipFill>
         <p:spPr>
           <a:xfrm>
-            <a:off x="8973361" y="3090716"/>
-            <a:ext cx="694204" cy="694204"/>
+            <a:off x="9089136" y="2013216"/>
+            <a:ext cx="914400" cy="914400"/>
           </a:xfrm>
           <a:prstGeom prst="rect">
             <a:avLst/>
           </a:prstGeom>
         </p:spPr>
       </p:pic>
-      <p:sp>
-        <p:nvSpPr>
-          <p:cNvPr id="35" name="TextBox 34">
-            <a:extLst>
-              <a:ext uri="{FF2B5EF4-FFF2-40B4-BE49-F238E27FC236}">
-                <a16:creationId xmlns:a16="http://schemas.microsoft.com/office/drawing/2014/main" id="{872DDFBC-F442-8C8F-6E48-F40AD2050A28}"/>
-              </a:ext>
-            </a:extLst>
-          </p:cNvPr>
-          <p:cNvSpPr txBox="1"/>
-          <p:nvPr/>
-        </p:nvSpPr>
-        <p:spPr>
-          <a:xfrm>
-            <a:off x="8973361" y="4631734"/>
-            <a:ext cx="2991544" cy="369332"/>
-          </a:xfrm>
-          <a:prstGeom prst="rect">
-            <a:avLst/>
-          </a:prstGeom>
-          <a:noFill/>
-        </p:spPr>
-        <p:txBody>
-          <a:bodyPr wrap="square" rtlCol="0">
-            <a:spAutoFit/>
-          </a:bodyPr>
-          <a:lstStyle/>
-          <a:p>
-            <a:r>
-              <a:rPr lang="en-US" dirty="0"/>
-              <a:t>Text Chunks</a:t>
-            </a:r>
-          </a:p>
-        </p:txBody>
-      </p:sp>
       <p:pic>
         <p:nvPicPr>
-          <p:cNvPr id="36" name="Graphic 35" descr="Document outline">
-            <a:extLst>
-              <a:ext uri="{FF2B5EF4-FFF2-40B4-BE49-F238E27FC236}">
-                <a16:creationId xmlns:a16="http://schemas.microsoft.com/office/drawing/2014/main" id="{5276D375-87C4-9038-9A1D-22B6FCDAC7F8}"/>
+          <p:cNvPr id="58" name="Graphic 57" descr="Table outline">
+            <a:extLst>
+              <a:ext uri="{FF2B5EF4-FFF2-40B4-BE49-F238E27FC236}">
+                <a16:creationId xmlns:a16="http://schemas.microsoft.com/office/drawing/2014/main" id="{40E981D2-63A3-19E6-84B9-99C25A1DD9C9}"/>
               </a:ext>
             </a:extLst>
           </p:cNvPr>
@@ -9794,10 +9946,10 @@
           <p:nvPr/>
         </p:nvPicPr>
         <p:blipFill>
-          <a:blip r:embed="rId2">
+          <a:blip r:embed="rId6">
             <a:extLst>
               <a:ext uri="{96DAC541-7B7A-43D3-8B79-37D633B846F1}">
-                <asvg:svgBlip xmlns:asvg="http://schemas.microsoft.com/office/drawing/2016/SVG/main" r:embed="rId3"/>
+                <asvg:svgBlip xmlns:asvg="http://schemas.microsoft.com/office/drawing/2016/SVG/main" r:embed="rId7"/>
               </a:ext>
             </a:extLst>
           </a:blip>
@@ -9807,8 +9959,8 @@
         </p:blipFill>
         <p:spPr>
           <a:xfrm>
-            <a:off x="8974936" y="2435212"/>
-            <a:ext cx="694204" cy="694204"/>
+            <a:off x="9089136" y="2927616"/>
+            <a:ext cx="914400" cy="914400"/>
           </a:xfrm>
           <a:prstGeom prst="rect">
             <a:avLst/>
@@ -9817,10 +9969,10 @@
       </p:pic>
       <p:pic>
         <p:nvPicPr>
-          <p:cNvPr id="37" name="Graphic 36" descr="Document outline">
-            <a:extLst>
-              <a:ext uri="{FF2B5EF4-FFF2-40B4-BE49-F238E27FC236}">
-                <a16:creationId xmlns:a16="http://schemas.microsoft.com/office/drawing/2014/main" id="{74B15887-5DFB-8CF9-3849-7F9BBAB1BA14}"/>
+          <p:cNvPr id="62" name="Graphic 61" descr="Image outline">
+            <a:extLst>
+              <a:ext uri="{FF2B5EF4-FFF2-40B4-BE49-F238E27FC236}">
+                <a16:creationId xmlns:a16="http://schemas.microsoft.com/office/drawing/2014/main" id="{91EED078-FCB6-20EE-60DC-D1D2A58380B0}"/>
               </a:ext>
             </a:extLst>
           </p:cNvPr>
@@ -9830,10 +9982,10 @@
           <p:nvPr/>
         </p:nvPicPr>
         <p:blipFill>
-          <a:blip r:embed="rId2">
+          <a:blip r:embed="rId8">
             <a:extLst>
               <a:ext uri="{96DAC541-7B7A-43D3-8B79-37D633B846F1}">
-                <asvg:svgBlip xmlns:asvg="http://schemas.microsoft.com/office/drawing/2016/SVG/main" r:embed="rId3"/>
+                <asvg:svgBlip xmlns:asvg="http://schemas.microsoft.com/office/drawing/2016/SVG/main" r:embed="rId9"/>
               </a:ext>
             </a:extLst>
           </a:blip>
@@ -9843,116 +9995,8 @@
         </p:blipFill>
         <p:spPr>
           <a:xfrm>
-            <a:off x="9564101" y="2444601"/>
-            <a:ext cx="694204" cy="694204"/>
-          </a:xfrm>
-          <a:prstGeom prst="rect">
-            <a:avLst/>
-          </a:prstGeom>
-        </p:spPr>
-      </p:pic>
-      <p:pic>
-        <p:nvPicPr>
-          <p:cNvPr id="38" name="Graphic 37" descr="Document outline">
-            <a:extLst>
-              <a:ext uri="{FF2B5EF4-FFF2-40B4-BE49-F238E27FC236}">
-                <a16:creationId xmlns:a16="http://schemas.microsoft.com/office/drawing/2014/main" id="{A348D3E8-0E49-A0CC-C6DE-4B494FEBF501}"/>
-              </a:ext>
-            </a:extLst>
-          </p:cNvPr>
-          <p:cNvPicPr>
-            <a:picLocks noChangeAspect="1"/>
-          </p:cNvPicPr>
-          <p:nvPr/>
-        </p:nvPicPr>
-        <p:blipFill>
-          <a:blip r:embed="rId2">
-            <a:extLst>
-              <a:ext uri="{96DAC541-7B7A-43D3-8B79-37D633B846F1}">
-                <asvg:svgBlip xmlns:asvg="http://schemas.microsoft.com/office/drawing/2016/SVG/main" r:embed="rId3"/>
-              </a:ext>
-            </a:extLst>
-          </a:blip>
-          <a:stretch>
-            <a:fillRect/>
-          </a:stretch>
-        </p:blipFill>
-        <p:spPr>
-          <a:xfrm>
-            <a:off x="8973361" y="3777828"/>
-            <a:ext cx="694204" cy="694204"/>
-          </a:xfrm>
-          <a:prstGeom prst="rect">
-            <a:avLst/>
-          </a:prstGeom>
-        </p:spPr>
-      </p:pic>
-      <p:pic>
-        <p:nvPicPr>
-          <p:cNvPr id="39" name="Graphic 38" descr="Document outline">
-            <a:extLst>
-              <a:ext uri="{FF2B5EF4-FFF2-40B4-BE49-F238E27FC236}">
-                <a16:creationId xmlns:a16="http://schemas.microsoft.com/office/drawing/2014/main" id="{E3B5B338-1FBD-47FE-F33F-DA1D9F3DC8A5}"/>
-              </a:ext>
-            </a:extLst>
-          </p:cNvPr>
-          <p:cNvPicPr>
-            <a:picLocks noChangeAspect="1"/>
-          </p:cNvPicPr>
-          <p:nvPr/>
-        </p:nvPicPr>
-        <p:blipFill>
-          <a:blip r:embed="rId2">
-            <a:extLst>
-              <a:ext uri="{96DAC541-7B7A-43D3-8B79-37D633B846F1}">
-                <asvg:svgBlip xmlns:asvg="http://schemas.microsoft.com/office/drawing/2016/SVG/main" r:embed="rId3"/>
-              </a:ext>
-            </a:extLst>
-          </a:blip>
-          <a:stretch>
-            <a:fillRect/>
-          </a:stretch>
-        </p:blipFill>
-        <p:spPr>
-          <a:xfrm>
-            <a:off x="9572744" y="3090716"/>
-            <a:ext cx="694204" cy="694204"/>
-          </a:xfrm>
-          <a:prstGeom prst="rect">
-            <a:avLst/>
-          </a:prstGeom>
-        </p:spPr>
-      </p:pic>
-      <p:pic>
-        <p:nvPicPr>
-          <p:cNvPr id="40" name="Graphic 39" descr="Document outline">
-            <a:extLst>
-              <a:ext uri="{FF2B5EF4-FFF2-40B4-BE49-F238E27FC236}">
-                <a16:creationId xmlns:a16="http://schemas.microsoft.com/office/drawing/2014/main" id="{0DA8828D-C0D4-8EC6-9C93-C3BC1C962B6F}"/>
-              </a:ext>
-            </a:extLst>
-          </p:cNvPr>
-          <p:cNvPicPr>
-            <a:picLocks noChangeAspect="1"/>
-          </p:cNvPicPr>
-          <p:nvPr/>
-        </p:nvPicPr>
-        <p:blipFill>
-          <a:blip r:embed="rId2">
-            <a:extLst>
-              <a:ext uri="{96DAC541-7B7A-43D3-8B79-37D633B846F1}">
-                <asvg:svgBlip xmlns:asvg="http://schemas.microsoft.com/office/drawing/2016/SVG/main" r:embed="rId3"/>
-              </a:ext>
-            </a:extLst>
-          </a:blip>
-          <a:stretch>
-            <a:fillRect/>
-          </a:stretch>
-        </p:blipFill>
-        <p:spPr>
-          <a:xfrm>
-            <a:off x="9572744" y="3784920"/>
-            <a:ext cx="694204" cy="694204"/>
+            <a:off x="9089136" y="3842016"/>
+            <a:ext cx="914400" cy="914400"/>
           </a:xfrm>
           <a:prstGeom prst="rect">
             <a:avLst/>
@@ -9962,7 +10006,7 @@
     </p:spTree>
     <p:extLst>
       <p:ext uri="{BB962C8B-B14F-4D97-AF65-F5344CB8AC3E}">
-        <p14:creationId xmlns:p14="http://schemas.microsoft.com/office/powerpoint/2010/main" val="494835507"/>
+        <p14:creationId xmlns:p14="http://schemas.microsoft.com/office/powerpoint/2010/main" val="2507382561"/>
       </p:ext>
     </p:extLst>
   </p:cSld>
@@ -9994,7 +10038,7 @@
           <p:cNvPr id="2" name="Title 1">
             <a:extLst>
               <a:ext uri="{FF2B5EF4-FFF2-40B4-BE49-F238E27FC236}">
-                <a16:creationId xmlns:a16="http://schemas.microsoft.com/office/drawing/2014/main" id="{8289D1C0-B13C-EA90-F81A-07209CBE2F75}"/>
+                <a16:creationId xmlns:a16="http://schemas.microsoft.com/office/drawing/2014/main" id="{C876565B-2008-1396-399B-5AE028B1472B}"/>
               </a:ext>
             </a:extLst>
           </p:cNvPr>
@@ -10022,7 +10066,7 @@
           <p:cNvPr id="4" name="Title 1">
             <a:extLst>
               <a:ext uri="{FF2B5EF4-FFF2-40B4-BE49-F238E27FC236}">
-                <a16:creationId xmlns:a16="http://schemas.microsoft.com/office/drawing/2014/main" id="{99AFC147-9EA6-3EC1-4D93-273CE3E8BA3C}"/>
+                <a16:creationId xmlns:a16="http://schemas.microsoft.com/office/drawing/2014/main" id="{E301DBC9-2071-3E79-D94A-137D016265E5}"/>
               </a:ext>
             </a:extLst>
           </p:cNvPr>
@@ -10069,17 +10113,17 @@
           <a:p>
             <a:r>
               <a:rPr lang="en-US" sz="2800" i="1" dirty="0"/>
-              <a:t>Embedding</a:t>
+              <a:t>Chunking</a:t>
             </a:r>
           </a:p>
         </p:txBody>
       </p:sp>
       <p:pic>
         <p:nvPicPr>
-          <p:cNvPr id="5" name="Graphic 4" descr="Document outline">
-            <a:extLst>
-              <a:ext uri="{FF2B5EF4-FFF2-40B4-BE49-F238E27FC236}">
-                <a16:creationId xmlns:a16="http://schemas.microsoft.com/office/drawing/2014/main" id="{C76D9F74-FA66-B7D6-5CDB-5E243A1F4C17}"/>
+          <p:cNvPr id="6" name="Graphic 5" descr="Document outline">
+            <a:extLst>
+              <a:ext uri="{FF2B5EF4-FFF2-40B4-BE49-F238E27FC236}">
+                <a16:creationId xmlns:a16="http://schemas.microsoft.com/office/drawing/2014/main" id="{D97DE07F-8C38-423F-29CE-2D703ABA4908}"/>
               </a:ext>
             </a:extLst>
           </p:cNvPr>
@@ -10102,200 +10146,20 @@
         </p:blipFill>
         <p:spPr>
           <a:xfrm>
-            <a:off x="838200" y="4956876"/>
-            <a:ext cx="694204" cy="694204"/>
+            <a:off x="1743251" y="2795406"/>
+            <a:ext cx="1284823" cy="1284823"/>
           </a:xfrm>
           <a:prstGeom prst="rect">
             <a:avLst/>
           </a:prstGeom>
         </p:spPr>
       </p:pic>
-      <p:pic>
-        <p:nvPicPr>
-          <p:cNvPr id="7" name="Graphic 6" descr="Document outline">
-            <a:extLst>
-              <a:ext uri="{FF2B5EF4-FFF2-40B4-BE49-F238E27FC236}">
-                <a16:creationId xmlns:a16="http://schemas.microsoft.com/office/drawing/2014/main" id="{DDD5E463-58F2-6BC6-9F1B-ADD8C58CFF54}"/>
-              </a:ext>
-            </a:extLst>
-          </p:cNvPr>
-          <p:cNvPicPr>
-            <a:picLocks noChangeAspect="1"/>
-          </p:cNvPicPr>
-          <p:nvPr/>
-        </p:nvPicPr>
-        <p:blipFill>
-          <a:blip r:embed="rId2">
-            <a:extLst>
-              <a:ext uri="{96DAC541-7B7A-43D3-8B79-37D633B846F1}">
-                <asvg:svgBlip xmlns:asvg="http://schemas.microsoft.com/office/drawing/2016/SVG/main" r:embed="rId3"/>
-              </a:ext>
-            </a:extLst>
-          </a:blip>
-          <a:stretch>
-            <a:fillRect/>
-          </a:stretch>
-        </p:blipFill>
-        <p:spPr>
-          <a:xfrm>
-            <a:off x="839775" y="4301372"/>
-            <a:ext cx="694204" cy="694204"/>
-          </a:xfrm>
-          <a:prstGeom prst="rect">
-            <a:avLst/>
-          </a:prstGeom>
-        </p:spPr>
-      </p:pic>
-      <p:pic>
-        <p:nvPicPr>
-          <p:cNvPr id="8" name="Graphic 7" descr="Document outline">
-            <a:extLst>
-              <a:ext uri="{FF2B5EF4-FFF2-40B4-BE49-F238E27FC236}">
-                <a16:creationId xmlns:a16="http://schemas.microsoft.com/office/drawing/2014/main" id="{795C782D-F9E3-6C60-CC78-E2A5E407F88F}"/>
-              </a:ext>
-            </a:extLst>
-          </p:cNvPr>
-          <p:cNvPicPr>
-            <a:picLocks noChangeAspect="1"/>
-          </p:cNvPicPr>
-          <p:nvPr/>
-        </p:nvPicPr>
-        <p:blipFill>
-          <a:blip r:embed="rId2">
-            <a:extLst>
-              <a:ext uri="{96DAC541-7B7A-43D3-8B79-37D633B846F1}">
-                <asvg:svgBlip xmlns:asvg="http://schemas.microsoft.com/office/drawing/2016/SVG/main" r:embed="rId3"/>
-              </a:ext>
-            </a:extLst>
-          </a:blip>
-          <a:stretch>
-            <a:fillRect/>
-          </a:stretch>
-        </p:blipFill>
-        <p:spPr>
-          <a:xfrm>
-            <a:off x="1428940" y="4310761"/>
-            <a:ext cx="694204" cy="694204"/>
-          </a:xfrm>
-          <a:prstGeom prst="rect">
-            <a:avLst/>
-          </a:prstGeom>
-        </p:spPr>
-      </p:pic>
-      <p:pic>
-        <p:nvPicPr>
-          <p:cNvPr id="10" name="Graphic 9" descr="Document outline">
-            <a:extLst>
-              <a:ext uri="{FF2B5EF4-FFF2-40B4-BE49-F238E27FC236}">
-                <a16:creationId xmlns:a16="http://schemas.microsoft.com/office/drawing/2014/main" id="{EA0B3076-2A63-EBD1-2314-56B09625F940}"/>
-              </a:ext>
-            </a:extLst>
-          </p:cNvPr>
-          <p:cNvPicPr>
-            <a:picLocks noChangeAspect="1"/>
-          </p:cNvPicPr>
-          <p:nvPr/>
-        </p:nvPicPr>
-        <p:blipFill>
-          <a:blip r:embed="rId2">
-            <a:extLst>
-              <a:ext uri="{96DAC541-7B7A-43D3-8B79-37D633B846F1}">
-                <asvg:svgBlip xmlns:asvg="http://schemas.microsoft.com/office/drawing/2016/SVG/main" r:embed="rId3"/>
-              </a:ext>
-            </a:extLst>
-          </a:blip>
-          <a:stretch>
-            <a:fillRect/>
-          </a:stretch>
-        </p:blipFill>
-        <p:spPr>
-          <a:xfrm>
-            <a:off x="1437583" y="4956876"/>
-            <a:ext cx="694204" cy="694204"/>
-          </a:xfrm>
-          <a:prstGeom prst="rect">
-            <a:avLst/>
-          </a:prstGeom>
-        </p:spPr>
-      </p:pic>
-      <p:pic>
-        <p:nvPicPr>
-          <p:cNvPr id="12" name="Graphic 11" descr="Table outline">
-            <a:extLst>
-              <a:ext uri="{FF2B5EF4-FFF2-40B4-BE49-F238E27FC236}">
-                <a16:creationId xmlns:a16="http://schemas.microsoft.com/office/drawing/2014/main" id="{3CBE2A02-ECB5-CA7E-A6EC-BCBA5F9D6725}"/>
-              </a:ext>
-            </a:extLst>
-          </p:cNvPr>
-          <p:cNvPicPr>
-            <a:picLocks noChangeAspect="1"/>
-          </p:cNvPicPr>
-          <p:nvPr/>
-        </p:nvPicPr>
-        <p:blipFill>
-          <a:blip r:embed="rId4">
-            <a:extLst>
-              <a:ext uri="{96DAC541-7B7A-43D3-8B79-37D633B846F1}">
-                <asvg:svgBlip xmlns:asvg="http://schemas.microsoft.com/office/drawing/2016/SVG/main" r:embed="rId5"/>
-              </a:ext>
-            </a:extLst>
-          </a:blip>
-          <a:stretch>
-            <a:fillRect/>
-          </a:stretch>
-        </p:blipFill>
-        <p:spPr>
-          <a:xfrm>
-            <a:off x="971740" y="2085353"/>
-            <a:ext cx="914400" cy="914400"/>
-          </a:xfrm>
-          <a:prstGeom prst="rect">
-            <a:avLst/>
-          </a:prstGeom>
-        </p:spPr>
-      </p:pic>
-      <p:pic>
-        <p:nvPicPr>
-          <p:cNvPr id="13" name="Graphic 12" descr="Image outline">
-            <a:extLst>
-              <a:ext uri="{FF2B5EF4-FFF2-40B4-BE49-F238E27FC236}">
-                <a16:creationId xmlns:a16="http://schemas.microsoft.com/office/drawing/2014/main" id="{FAD3F7B4-1F0B-D20D-59C5-4E8729FCA8E6}"/>
-              </a:ext>
-            </a:extLst>
-          </p:cNvPr>
-          <p:cNvPicPr>
-            <a:picLocks noChangeAspect="1"/>
-          </p:cNvPicPr>
-          <p:nvPr/>
-        </p:nvPicPr>
-        <p:blipFill>
-          <a:blip r:embed="rId6">
-            <a:extLst>
-              <a:ext uri="{96DAC541-7B7A-43D3-8B79-37D633B846F1}">
-                <asvg:svgBlip xmlns:asvg="http://schemas.microsoft.com/office/drawing/2016/SVG/main" r:embed="rId7"/>
-              </a:ext>
-            </a:extLst>
-          </a:blip>
-          <a:stretch>
-            <a:fillRect/>
-          </a:stretch>
-        </p:blipFill>
-        <p:spPr>
-          <a:xfrm>
-            <a:off x="980383" y="3188668"/>
-            <a:ext cx="914400" cy="914400"/>
-          </a:xfrm>
-          <a:prstGeom prst="rect">
-            <a:avLst/>
-          </a:prstGeom>
-        </p:spPr>
-      </p:pic>
-      <p:sp>
-        <p:nvSpPr>
-          <p:cNvPr id="14" name="TextBox 13">
-            <a:extLst>
-              <a:ext uri="{FF2B5EF4-FFF2-40B4-BE49-F238E27FC236}">
-                <a16:creationId xmlns:a16="http://schemas.microsoft.com/office/drawing/2014/main" id="{D8EA3828-3C4C-34F8-F060-97E83380BAAB}"/>
+      <p:sp>
+        <p:nvSpPr>
+          <p:cNvPr id="7" name="TextBox 6">
+            <a:extLst>
+              <a:ext uri="{FF2B5EF4-FFF2-40B4-BE49-F238E27FC236}">
+                <a16:creationId xmlns:a16="http://schemas.microsoft.com/office/drawing/2014/main" id="{38F5ECB0-970B-0E97-36FE-CFE360C8D4DD}"/>
               </a:ext>
             </a:extLst>
           </p:cNvPr>
@@ -10304,8 +10168,8 @@
         </p:nvSpPr>
         <p:spPr>
           <a:xfrm>
-            <a:off x="971740" y="2842054"/>
-            <a:ext cx="1413114" cy="369332"/>
+            <a:off x="2023803" y="3988160"/>
+            <a:ext cx="1552074" cy="369332"/>
           </a:xfrm>
           <a:prstGeom prst="rect">
             <a:avLst/>
@@ -10320,87 +10184,59 @@
           <a:p>
             <a:r>
               <a:rPr lang="en-US" dirty="0"/>
-              <a:t>Tables</a:t>
-            </a:r>
-          </a:p>
-        </p:txBody>
-      </p:sp>
-      <p:sp>
-        <p:nvSpPr>
-          <p:cNvPr id="15" name="TextBox 14">
-            <a:extLst>
-              <a:ext uri="{FF2B5EF4-FFF2-40B4-BE49-F238E27FC236}">
-                <a16:creationId xmlns:a16="http://schemas.microsoft.com/office/drawing/2014/main" id="{384B2F79-424E-5F81-20EC-1334298DC01C}"/>
-              </a:ext>
-            </a:extLst>
-          </p:cNvPr>
-          <p:cNvSpPr txBox="1"/>
-          <p:nvPr/>
-        </p:nvSpPr>
-        <p:spPr>
-          <a:xfrm>
-            <a:off x="985623" y="3905073"/>
-            <a:ext cx="909160" cy="369332"/>
-          </a:xfrm>
-          <a:prstGeom prst="rect">
-            <a:avLst/>
-          </a:prstGeom>
-          <a:noFill/>
-        </p:spPr>
-        <p:txBody>
-          <a:bodyPr wrap="none" rtlCol="0">
-            <a:spAutoFit/>
-          </a:bodyPr>
-          <a:lstStyle/>
-          <a:p>
-            <a:r>
-              <a:rPr lang="en-US" dirty="0"/>
-              <a:t>Images</a:t>
-            </a:r>
-          </a:p>
-        </p:txBody>
-      </p:sp>
-      <p:sp>
-        <p:nvSpPr>
-          <p:cNvPr id="16" name="TextBox 15">
-            <a:extLst>
-              <a:ext uri="{FF2B5EF4-FFF2-40B4-BE49-F238E27FC236}">
-                <a16:creationId xmlns:a16="http://schemas.microsoft.com/office/drawing/2014/main" id="{64C973F6-E362-E017-0604-921152C8328E}"/>
-              </a:ext>
-            </a:extLst>
-          </p:cNvPr>
-          <p:cNvSpPr txBox="1"/>
-          <p:nvPr/>
-        </p:nvSpPr>
-        <p:spPr>
-          <a:xfrm>
-            <a:off x="838200" y="5716230"/>
-            <a:ext cx="1546654" cy="369332"/>
-          </a:xfrm>
-          <a:prstGeom prst="rect">
-            <a:avLst/>
-          </a:prstGeom>
-          <a:noFill/>
-        </p:spPr>
-        <p:txBody>
-          <a:bodyPr wrap="square" rtlCol="0">
-            <a:spAutoFit/>
-          </a:bodyPr>
-          <a:lstStyle/>
-          <a:p>
-            <a:r>
-              <a:rPr lang="en-US" dirty="0"/>
-              <a:t>Text Chunks</a:t>
-            </a:r>
-          </a:p>
-        </p:txBody>
-      </p:sp>
-      <p:sp>
-        <p:nvSpPr>
-          <p:cNvPr id="17" name="Rectangle 16">
-            <a:extLst>
-              <a:ext uri="{FF2B5EF4-FFF2-40B4-BE49-F238E27FC236}">
-                <a16:creationId xmlns:a16="http://schemas.microsoft.com/office/drawing/2014/main" id="{EEBFC2DF-06E5-DD1B-E6EC-079505B8CCFF}"/>
+              <a:t>Text</a:t>
+            </a:r>
+          </a:p>
+        </p:txBody>
+      </p:sp>
+      <p:cxnSp>
+        <p:nvCxnSpPr>
+          <p:cNvPr id="8" name="Straight Arrow Connector 7">
+            <a:extLst>
+              <a:ext uri="{FF2B5EF4-FFF2-40B4-BE49-F238E27FC236}">
+                <a16:creationId xmlns:a16="http://schemas.microsoft.com/office/drawing/2014/main" id="{186D6C68-499F-56DE-7DBA-752A042D0130}"/>
+              </a:ext>
+            </a:extLst>
+          </p:cNvPr>
+          <p:cNvCxnSpPr>
+            <a:cxnSpLocks/>
+            <a:endCxn id="11" idx="1"/>
+          </p:cNvCxnSpPr>
+          <p:nvPr/>
+        </p:nvCxnSpPr>
+        <p:spPr>
+          <a:xfrm>
+            <a:off x="2871537" y="3525701"/>
+            <a:ext cx="1549734" cy="0"/>
+          </a:xfrm>
+          <a:prstGeom prst="straightConnector1">
+            <a:avLst/>
+          </a:prstGeom>
+          <a:ln w="38100">
+            <a:tailEnd type="triangle"/>
+          </a:ln>
+        </p:spPr>
+        <p:style>
+          <a:lnRef idx="2">
+            <a:schemeClr val="accent1"/>
+          </a:lnRef>
+          <a:fillRef idx="0">
+            <a:schemeClr val="accent1"/>
+          </a:fillRef>
+          <a:effectRef idx="1">
+            <a:schemeClr val="accent1"/>
+          </a:effectRef>
+          <a:fontRef idx="minor">
+            <a:schemeClr val="tx1"/>
+          </a:fontRef>
+        </p:style>
+      </p:cxnSp>
+      <p:sp>
+        <p:nvSpPr>
+          <p:cNvPr id="11" name="Rectangle 10">
+            <a:extLst>
+              <a:ext uri="{FF2B5EF4-FFF2-40B4-BE49-F238E27FC236}">
+                <a16:creationId xmlns:a16="http://schemas.microsoft.com/office/drawing/2014/main" id="{A4EFCADA-56A2-4B7E-BADE-B5C26C35DE5A}"/>
               </a:ext>
             </a:extLst>
           </p:cNvPr>
@@ -10409,7 +10245,7 @@
         </p:nvSpPr>
         <p:spPr>
           <a:xfrm>
-            <a:off x="4686871" y="2253009"/>
+            <a:off x="4421271" y="2043658"/>
             <a:ext cx="2910680" cy="2964086"/>
           </a:xfrm>
           <a:prstGeom prst="rect">
@@ -10488,10 +10324,10 @@
       </p:sp>
       <p:pic>
         <p:nvPicPr>
-          <p:cNvPr id="19" name="Picture 18">
-            <a:extLst>
-              <a:ext uri="{FF2B5EF4-FFF2-40B4-BE49-F238E27FC236}">
-                <a16:creationId xmlns:a16="http://schemas.microsoft.com/office/drawing/2014/main" id="{F87E9CD3-0EE0-69DE-F7D2-50EFCD0EA66E}"/>
+          <p:cNvPr id="13" name="Graphic 12" descr="Chat bubble outline">
+            <a:extLst>
+              <a:ext uri="{FF2B5EF4-FFF2-40B4-BE49-F238E27FC236}">
+                <a16:creationId xmlns:a16="http://schemas.microsoft.com/office/drawing/2014/main" id="{C3EA804B-196E-51FA-EACD-4C1103E3995A}"/>
               </a:ext>
             </a:extLst>
           </p:cNvPr>
@@ -10501,16 +10337,21 @@
           <p:nvPr/>
         </p:nvPicPr>
         <p:blipFill>
-          <a:blip r:embed="rId8"/>
-          <a:srcRect b="13873"/>
+          <a:blip r:embed="rId4">
+            <a:extLst>
+              <a:ext uri="{96DAC541-7B7A-43D3-8B79-37D633B846F1}">
+                <asvg:svgBlip xmlns:asvg="http://schemas.microsoft.com/office/drawing/2016/SVG/main" r:embed="rId5"/>
+              </a:ext>
+            </a:extLst>
+          </a:blip>
           <a:stretch>
             <a:fillRect/>
           </a:stretch>
         </p:blipFill>
         <p:spPr>
           <a:xfrm>
-            <a:off x="4806706" y="2370190"/>
-            <a:ext cx="702732" cy="605242"/>
+            <a:off x="4565463" y="2200138"/>
+            <a:ext cx="971750" cy="971750"/>
           </a:xfrm>
           <a:prstGeom prst="rect">
             <a:avLst/>
@@ -10519,10 +10360,10 @@
       </p:pic>
       <p:sp>
         <p:nvSpPr>
-          <p:cNvPr id="20" name="TextBox 19">
-            <a:extLst>
-              <a:ext uri="{FF2B5EF4-FFF2-40B4-BE49-F238E27FC236}">
-                <a16:creationId xmlns:a16="http://schemas.microsoft.com/office/drawing/2014/main" id="{6D9C2EC1-9B10-0675-B2E7-D42ECFD12FE4}"/>
+          <p:cNvPr id="15" name="TextBox 14">
+            <a:extLst>
+              <a:ext uri="{FF2B5EF4-FFF2-40B4-BE49-F238E27FC236}">
+                <a16:creationId xmlns:a16="http://schemas.microsoft.com/office/drawing/2014/main" id="{2290CB44-4B66-1A60-BDA5-288764580DAB}"/>
               </a:ext>
             </a:extLst>
           </p:cNvPr>
@@ -10531,8 +10372,8 @@
         </p:nvSpPr>
         <p:spPr>
           <a:xfrm>
-            <a:off x="5629273" y="2485978"/>
-            <a:ext cx="1805611" cy="369332"/>
+            <a:off x="5537213" y="2426078"/>
+            <a:ext cx="1604210" cy="369332"/>
           </a:xfrm>
           <a:prstGeom prst="rect">
             <a:avLst/>
@@ -10547,143 +10388,17 @@
           <a:p>
             <a:r>
               <a:rPr lang="en-US" dirty="0"/>
-              <a:t>Embedding</a:t>
-            </a:r>
-          </a:p>
-        </p:txBody>
-      </p:sp>
-      <p:cxnSp>
-        <p:nvCxnSpPr>
-          <p:cNvPr id="21" name="Straight Arrow Connector 20">
-            <a:extLst>
-              <a:ext uri="{FF2B5EF4-FFF2-40B4-BE49-F238E27FC236}">
-                <a16:creationId xmlns:a16="http://schemas.microsoft.com/office/drawing/2014/main" id="{32075760-E86A-0534-9632-1A901B2DBC4B}"/>
-              </a:ext>
-            </a:extLst>
-          </p:cNvPr>
-          <p:cNvCxnSpPr>
-            <a:cxnSpLocks/>
-            <a:endCxn id="17" idx="1"/>
-          </p:cNvCxnSpPr>
-          <p:nvPr/>
-        </p:nvCxnSpPr>
-        <p:spPr>
-          <a:xfrm>
-            <a:off x="2014618" y="2670644"/>
-            <a:ext cx="2672253" cy="1064408"/>
-          </a:xfrm>
-          <a:prstGeom prst="straightConnector1">
-            <a:avLst/>
-          </a:prstGeom>
-          <a:ln w="38100">
-            <a:tailEnd type="triangle"/>
-          </a:ln>
-        </p:spPr>
-        <p:style>
-          <a:lnRef idx="2">
-            <a:schemeClr val="accent1"/>
-          </a:lnRef>
-          <a:fillRef idx="0">
-            <a:schemeClr val="accent1"/>
-          </a:fillRef>
-          <a:effectRef idx="1">
-            <a:schemeClr val="accent1"/>
-          </a:effectRef>
-          <a:fontRef idx="minor">
-            <a:schemeClr val="tx1"/>
-          </a:fontRef>
-        </p:style>
-      </p:cxnSp>
-      <p:cxnSp>
-        <p:nvCxnSpPr>
-          <p:cNvPr id="23" name="Straight Arrow Connector 22">
-            <a:extLst>
-              <a:ext uri="{FF2B5EF4-FFF2-40B4-BE49-F238E27FC236}">
-                <a16:creationId xmlns:a16="http://schemas.microsoft.com/office/drawing/2014/main" id="{28F2A589-F4E3-B526-A0BA-92F074CC27AD}"/>
-              </a:ext>
-            </a:extLst>
-          </p:cNvPr>
-          <p:cNvCxnSpPr>
-            <a:cxnSpLocks/>
-            <a:endCxn id="17" idx="1"/>
-          </p:cNvCxnSpPr>
-          <p:nvPr/>
-        </p:nvCxnSpPr>
-        <p:spPr>
-          <a:xfrm>
-            <a:off x="1980504" y="3735052"/>
-            <a:ext cx="2706367" cy="0"/>
-          </a:xfrm>
-          <a:prstGeom prst="straightConnector1">
-            <a:avLst/>
-          </a:prstGeom>
-          <a:ln w="38100">
-            <a:tailEnd type="triangle"/>
-          </a:ln>
-        </p:spPr>
-        <p:style>
-          <a:lnRef idx="2">
-            <a:schemeClr val="accent1"/>
-          </a:lnRef>
-          <a:fillRef idx="0">
-            <a:schemeClr val="accent1"/>
-          </a:fillRef>
-          <a:effectRef idx="1">
-            <a:schemeClr val="accent1"/>
-          </a:effectRef>
-          <a:fontRef idx="minor">
-            <a:schemeClr val="tx1"/>
-          </a:fontRef>
-        </p:style>
-      </p:cxnSp>
-      <p:cxnSp>
-        <p:nvCxnSpPr>
-          <p:cNvPr id="28" name="Straight Arrow Connector 27">
-            <a:extLst>
-              <a:ext uri="{FF2B5EF4-FFF2-40B4-BE49-F238E27FC236}">
-                <a16:creationId xmlns:a16="http://schemas.microsoft.com/office/drawing/2014/main" id="{FCCBFD5B-6F66-E1CF-09DA-96C1BCE84ED8}"/>
-              </a:ext>
-            </a:extLst>
-          </p:cNvPr>
-          <p:cNvCxnSpPr>
-            <a:cxnSpLocks/>
-            <a:endCxn id="17" idx="1"/>
-          </p:cNvCxnSpPr>
-          <p:nvPr/>
-        </p:nvCxnSpPr>
-        <p:spPr>
-          <a:xfrm flipV="1">
-            <a:off x="2208865" y="3735052"/>
-            <a:ext cx="2478006" cy="1221824"/>
-          </a:xfrm>
-          <a:prstGeom prst="straightConnector1">
-            <a:avLst/>
-          </a:prstGeom>
-          <a:ln w="38100">
-            <a:tailEnd type="triangle"/>
-          </a:ln>
-        </p:spPr>
-        <p:style>
-          <a:lnRef idx="2">
-            <a:schemeClr val="accent1"/>
-          </a:lnRef>
-          <a:fillRef idx="0">
-            <a:schemeClr val="accent1"/>
-          </a:fillRef>
-          <a:effectRef idx="1">
-            <a:schemeClr val="accent1"/>
-          </a:effectRef>
-          <a:fontRef idx="minor">
-            <a:schemeClr val="tx1"/>
-          </a:fontRef>
-        </p:style>
-      </p:cxnSp>
-      <p:sp>
-        <p:nvSpPr>
-          <p:cNvPr id="33" name="TextBox 32">
-            <a:extLst>
-              <a:ext uri="{FF2B5EF4-FFF2-40B4-BE49-F238E27FC236}">
-                <a16:creationId xmlns:a16="http://schemas.microsoft.com/office/drawing/2014/main" id="{9CBC6437-7408-64C6-4DB4-C5EAB1031AF1}"/>
+              <a:t>Chunking</a:t>
+            </a:r>
+          </a:p>
+        </p:txBody>
+      </p:sp>
+      <p:sp>
+        <p:nvSpPr>
+          <p:cNvPr id="19" name="TextBox 18">
+            <a:extLst>
+              <a:ext uri="{FF2B5EF4-FFF2-40B4-BE49-F238E27FC236}">
+                <a16:creationId xmlns:a16="http://schemas.microsoft.com/office/drawing/2014/main" id="{5E251F56-CE0E-1DBE-28F6-5E17961F5312}"/>
               </a:ext>
             </a:extLst>
           </p:cNvPr>
@@ -10692,8 +10407,8 @@
         </p:nvSpPr>
         <p:spPr>
           <a:xfrm>
-            <a:off x="4806705" y="3211386"/>
-            <a:ext cx="2706367" cy="1754326"/>
+            <a:off x="4737434" y="3070580"/>
+            <a:ext cx="2566737" cy="1754326"/>
           </a:xfrm>
           <a:prstGeom prst="rect">
             <a:avLst/>
@@ -10706,13 +10421,19 @@
           </a:bodyPr>
           <a:lstStyle/>
           <a:p>
+            <a:r>
+              <a:rPr lang="en-US" dirty="0"/>
+              <a:t>Break Text down into smaller Chunks by:</a:t>
+            </a:r>
+          </a:p>
+          <a:p>
             <a:pPr marL="285750" indent="-285750">
               <a:buFont typeface="Arial" panose="020B0604020202020204" pitchFamily="34" charset="0"/>
               <a:buChar char="•"/>
             </a:pPr>
             <a:r>
               <a:rPr lang="en-US" dirty="0"/>
-              <a:t>Encodes Tables, Chunks Images into Vectors in same Space</a:t>
+              <a:t>Characters</a:t>
             </a:r>
           </a:p>
           <a:p>
@@ -10722,30 +10443,49 @@
             </a:pPr>
             <a:r>
               <a:rPr lang="en-US" dirty="0"/>
-              <a:t>Can be used to compare different blocks with each other</a:t>
+              <a:t>Tokens</a:t>
+            </a:r>
+          </a:p>
+          <a:p>
+            <a:pPr marL="285750" indent="-285750">
+              <a:buFont typeface="Arial" panose="020B0604020202020204" pitchFamily="34" charset="0"/>
+              <a:buChar char="•"/>
+            </a:pPr>
+            <a:r>
+              <a:rPr lang="en-US" dirty="0"/>
+              <a:t>Delimiters </a:t>
+            </a:r>
+          </a:p>
+          <a:p>
+            <a:pPr marL="285750" indent="-285750">
+              <a:buFont typeface="Arial" panose="020B0604020202020204" pitchFamily="34" charset="0"/>
+              <a:buChar char="•"/>
+            </a:pPr>
+            <a:r>
+              <a:rPr lang="en-US" dirty="0"/>
+              <a:t>Headings</a:t>
             </a:r>
           </a:p>
         </p:txBody>
       </p:sp>
       <p:cxnSp>
         <p:nvCxnSpPr>
-          <p:cNvPr id="36" name="Straight Arrow Connector 35">
-            <a:extLst>
-              <a:ext uri="{FF2B5EF4-FFF2-40B4-BE49-F238E27FC236}">
-                <a16:creationId xmlns:a16="http://schemas.microsoft.com/office/drawing/2014/main" id="{A0055E1F-854C-7827-9D24-CE9BA65ED939}"/>
+          <p:cNvPr id="24" name="Straight Arrow Connector 23">
+            <a:extLst>
+              <a:ext uri="{FF2B5EF4-FFF2-40B4-BE49-F238E27FC236}">
+                <a16:creationId xmlns:a16="http://schemas.microsoft.com/office/drawing/2014/main" id="{437FF654-079E-F9DE-D32E-3806C9D04F17}"/>
               </a:ext>
             </a:extLst>
           </p:cNvPr>
           <p:cNvCxnSpPr>
             <a:cxnSpLocks/>
-            <a:stCxn id="17" idx="3"/>
           </p:cNvCxnSpPr>
           <p:nvPr/>
         </p:nvCxnSpPr>
         <p:spPr>
           <a:xfrm>
-            <a:off x="7597551" y="3735052"/>
-            <a:ext cx="1089249" cy="0"/>
+            <a:off x="7331951" y="3433459"/>
+            <a:ext cx="1651628" cy="0"/>
           </a:xfrm>
           <a:prstGeom prst="straightConnector1">
             <a:avLst/>
@@ -10771,10 +10511,10 @@
       </p:cxnSp>
       <p:pic>
         <p:nvPicPr>
-          <p:cNvPr id="41" name="Graphic 40">
-            <a:extLst>
-              <a:ext uri="{FF2B5EF4-FFF2-40B4-BE49-F238E27FC236}">
-                <a16:creationId xmlns:a16="http://schemas.microsoft.com/office/drawing/2014/main" id="{C1610A02-E523-8D1B-40B4-2F11904CE22B}"/>
+          <p:cNvPr id="29" name="Graphic 28" descr="Document outline">
+            <a:extLst>
+              <a:ext uri="{FF2B5EF4-FFF2-40B4-BE49-F238E27FC236}">
+                <a16:creationId xmlns:a16="http://schemas.microsoft.com/office/drawing/2014/main" id="{F6E1346E-A59D-FCD3-3BA5-E1E95BB8B527}"/>
               </a:ext>
             </a:extLst>
           </p:cNvPr>
@@ -10784,10 +10524,10 @@
           <p:nvPr/>
         </p:nvPicPr>
         <p:blipFill>
-          <a:blip r:embed="rId9">
+          <a:blip r:embed="rId2">
             <a:extLst>
               <a:ext uri="{96DAC541-7B7A-43D3-8B79-37D633B846F1}">
-                <asvg:svgBlip xmlns:asvg="http://schemas.microsoft.com/office/drawing/2016/SVG/main" r:embed="rId10"/>
+                <asvg:svgBlip xmlns:asvg="http://schemas.microsoft.com/office/drawing/2016/SVG/main" r:embed="rId3"/>
               </a:ext>
             </a:extLst>
           </a:blip>
@@ -10797,8 +10537,8 @@
         </p:blipFill>
         <p:spPr>
           <a:xfrm>
-            <a:off x="8771279" y="2582561"/>
-            <a:ext cx="2757373" cy="2353855"/>
+            <a:off x="8973361" y="3090716"/>
+            <a:ext cx="694204" cy="694204"/>
           </a:xfrm>
           <a:prstGeom prst="rect">
             <a:avLst/>
@@ -10807,10 +10547,10 @@
       </p:pic>
       <p:sp>
         <p:nvSpPr>
-          <p:cNvPr id="42" name="TextBox 41">
-            <a:extLst>
-              <a:ext uri="{FF2B5EF4-FFF2-40B4-BE49-F238E27FC236}">
-                <a16:creationId xmlns:a16="http://schemas.microsoft.com/office/drawing/2014/main" id="{E3C4B346-5B35-2862-84C7-890F3C3B5152}"/>
+          <p:cNvPr id="35" name="TextBox 34">
+            <a:extLst>
+              <a:ext uri="{FF2B5EF4-FFF2-40B4-BE49-F238E27FC236}">
+                <a16:creationId xmlns:a16="http://schemas.microsoft.com/office/drawing/2014/main" id="{872DDFBC-F442-8C8F-6E48-F40AD2050A28}"/>
               </a:ext>
             </a:extLst>
           </p:cNvPr>
@@ -10819,8 +10559,8 @@
         </p:nvSpPr>
         <p:spPr>
           <a:xfrm>
-            <a:off x="8441240" y="5057229"/>
-            <a:ext cx="2912560" cy="523220"/>
+            <a:off x="8973361" y="4631734"/>
+            <a:ext cx="2991544" cy="369332"/>
           </a:xfrm>
           <a:prstGeom prst="rect">
             <a:avLst/>
@@ -10833,18 +10573,197 @@
           </a:bodyPr>
           <a:lstStyle/>
           <a:p>
-            <a:pPr algn="ctr"/>
-            <a:r>
-              <a:rPr lang="en-US" sz="1400" i="1" dirty="0"/>
-              <a:t>An Embedding Vector could look like this</a:t>
-            </a:r>
-          </a:p>
-        </p:txBody>
-      </p:sp>
+            <a:r>
+              <a:rPr lang="en-US" dirty="0"/>
+              <a:t>Text Chunks</a:t>
+            </a:r>
+          </a:p>
+        </p:txBody>
+      </p:sp>
+      <p:pic>
+        <p:nvPicPr>
+          <p:cNvPr id="36" name="Graphic 35" descr="Document outline">
+            <a:extLst>
+              <a:ext uri="{FF2B5EF4-FFF2-40B4-BE49-F238E27FC236}">
+                <a16:creationId xmlns:a16="http://schemas.microsoft.com/office/drawing/2014/main" id="{5276D375-87C4-9038-9A1D-22B6FCDAC7F8}"/>
+              </a:ext>
+            </a:extLst>
+          </p:cNvPr>
+          <p:cNvPicPr>
+            <a:picLocks noChangeAspect="1"/>
+          </p:cNvPicPr>
+          <p:nvPr/>
+        </p:nvPicPr>
+        <p:blipFill>
+          <a:blip r:embed="rId2">
+            <a:extLst>
+              <a:ext uri="{96DAC541-7B7A-43D3-8B79-37D633B846F1}">
+                <asvg:svgBlip xmlns:asvg="http://schemas.microsoft.com/office/drawing/2016/SVG/main" r:embed="rId3"/>
+              </a:ext>
+            </a:extLst>
+          </a:blip>
+          <a:stretch>
+            <a:fillRect/>
+          </a:stretch>
+        </p:blipFill>
+        <p:spPr>
+          <a:xfrm>
+            <a:off x="8974936" y="2435212"/>
+            <a:ext cx="694204" cy="694204"/>
+          </a:xfrm>
+          <a:prstGeom prst="rect">
+            <a:avLst/>
+          </a:prstGeom>
+        </p:spPr>
+      </p:pic>
+      <p:pic>
+        <p:nvPicPr>
+          <p:cNvPr id="37" name="Graphic 36" descr="Document outline">
+            <a:extLst>
+              <a:ext uri="{FF2B5EF4-FFF2-40B4-BE49-F238E27FC236}">
+                <a16:creationId xmlns:a16="http://schemas.microsoft.com/office/drawing/2014/main" id="{74B15887-5DFB-8CF9-3849-7F9BBAB1BA14}"/>
+              </a:ext>
+            </a:extLst>
+          </p:cNvPr>
+          <p:cNvPicPr>
+            <a:picLocks noChangeAspect="1"/>
+          </p:cNvPicPr>
+          <p:nvPr/>
+        </p:nvPicPr>
+        <p:blipFill>
+          <a:blip r:embed="rId2">
+            <a:extLst>
+              <a:ext uri="{96DAC541-7B7A-43D3-8B79-37D633B846F1}">
+                <asvg:svgBlip xmlns:asvg="http://schemas.microsoft.com/office/drawing/2016/SVG/main" r:embed="rId3"/>
+              </a:ext>
+            </a:extLst>
+          </a:blip>
+          <a:stretch>
+            <a:fillRect/>
+          </a:stretch>
+        </p:blipFill>
+        <p:spPr>
+          <a:xfrm>
+            <a:off x="9564101" y="2444601"/>
+            <a:ext cx="694204" cy="694204"/>
+          </a:xfrm>
+          <a:prstGeom prst="rect">
+            <a:avLst/>
+          </a:prstGeom>
+        </p:spPr>
+      </p:pic>
+      <p:pic>
+        <p:nvPicPr>
+          <p:cNvPr id="38" name="Graphic 37" descr="Document outline">
+            <a:extLst>
+              <a:ext uri="{FF2B5EF4-FFF2-40B4-BE49-F238E27FC236}">
+                <a16:creationId xmlns:a16="http://schemas.microsoft.com/office/drawing/2014/main" id="{A348D3E8-0E49-A0CC-C6DE-4B494FEBF501}"/>
+              </a:ext>
+            </a:extLst>
+          </p:cNvPr>
+          <p:cNvPicPr>
+            <a:picLocks noChangeAspect="1"/>
+          </p:cNvPicPr>
+          <p:nvPr/>
+        </p:nvPicPr>
+        <p:blipFill>
+          <a:blip r:embed="rId2">
+            <a:extLst>
+              <a:ext uri="{96DAC541-7B7A-43D3-8B79-37D633B846F1}">
+                <asvg:svgBlip xmlns:asvg="http://schemas.microsoft.com/office/drawing/2016/SVG/main" r:embed="rId3"/>
+              </a:ext>
+            </a:extLst>
+          </a:blip>
+          <a:stretch>
+            <a:fillRect/>
+          </a:stretch>
+        </p:blipFill>
+        <p:spPr>
+          <a:xfrm>
+            <a:off x="8973361" y="3777828"/>
+            <a:ext cx="694204" cy="694204"/>
+          </a:xfrm>
+          <a:prstGeom prst="rect">
+            <a:avLst/>
+          </a:prstGeom>
+        </p:spPr>
+      </p:pic>
+      <p:pic>
+        <p:nvPicPr>
+          <p:cNvPr id="39" name="Graphic 38" descr="Document outline">
+            <a:extLst>
+              <a:ext uri="{FF2B5EF4-FFF2-40B4-BE49-F238E27FC236}">
+                <a16:creationId xmlns:a16="http://schemas.microsoft.com/office/drawing/2014/main" id="{E3B5B338-1FBD-47FE-F33F-DA1D9F3DC8A5}"/>
+              </a:ext>
+            </a:extLst>
+          </p:cNvPr>
+          <p:cNvPicPr>
+            <a:picLocks noChangeAspect="1"/>
+          </p:cNvPicPr>
+          <p:nvPr/>
+        </p:nvPicPr>
+        <p:blipFill>
+          <a:blip r:embed="rId2">
+            <a:extLst>
+              <a:ext uri="{96DAC541-7B7A-43D3-8B79-37D633B846F1}">
+                <asvg:svgBlip xmlns:asvg="http://schemas.microsoft.com/office/drawing/2016/SVG/main" r:embed="rId3"/>
+              </a:ext>
+            </a:extLst>
+          </a:blip>
+          <a:stretch>
+            <a:fillRect/>
+          </a:stretch>
+        </p:blipFill>
+        <p:spPr>
+          <a:xfrm>
+            <a:off x="9572744" y="3090716"/>
+            <a:ext cx="694204" cy="694204"/>
+          </a:xfrm>
+          <a:prstGeom prst="rect">
+            <a:avLst/>
+          </a:prstGeom>
+        </p:spPr>
+      </p:pic>
+      <p:pic>
+        <p:nvPicPr>
+          <p:cNvPr id="40" name="Graphic 39" descr="Document outline">
+            <a:extLst>
+              <a:ext uri="{FF2B5EF4-FFF2-40B4-BE49-F238E27FC236}">
+                <a16:creationId xmlns:a16="http://schemas.microsoft.com/office/drawing/2014/main" id="{0DA8828D-C0D4-8EC6-9C93-C3BC1C962B6F}"/>
+              </a:ext>
+            </a:extLst>
+          </p:cNvPr>
+          <p:cNvPicPr>
+            <a:picLocks noChangeAspect="1"/>
+          </p:cNvPicPr>
+          <p:nvPr/>
+        </p:nvPicPr>
+        <p:blipFill>
+          <a:blip r:embed="rId2">
+            <a:extLst>
+              <a:ext uri="{96DAC541-7B7A-43D3-8B79-37D633B846F1}">
+                <asvg:svgBlip xmlns:asvg="http://schemas.microsoft.com/office/drawing/2016/SVG/main" r:embed="rId3"/>
+              </a:ext>
+            </a:extLst>
+          </a:blip>
+          <a:stretch>
+            <a:fillRect/>
+          </a:stretch>
+        </p:blipFill>
+        <p:spPr>
+          <a:xfrm>
+            <a:off x="9572744" y="3784920"/>
+            <a:ext cx="694204" cy="694204"/>
+          </a:xfrm>
+          <a:prstGeom prst="rect">
+            <a:avLst/>
+          </a:prstGeom>
+        </p:spPr>
+      </p:pic>
     </p:spTree>
     <p:extLst>
       <p:ext uri="{BB962C8B-B14F-4D97-AF65-F5344CB8AC3E}">
-        <p14:creationId xmlns:p14="http://schemas.microsoft.com/office/powerpoint/2010/main" val="2284938492"/>
+        <p14:creationId xmlns:p14="http://schemas.microsoft.com/office/powerpoint/2010/main" val="494835507"/>
       </p:ext>
     </p:extLst>
   </p:cSld>
@@ -10876,7 +10795,7 @@
           <p:cNvPr id="2" name="Title 1">
             <a:extLst>
               <a:ext uri="{FF2B5EF4-FFF2-40B4-BE49-F238E27FC236}">
-                <a16:creationId xmlns:a16="http://schemas.microsoft.com/office/drawing/2014/main" id="{E58283A6-E586-C914-D037-267EF326983E}"/>
+                <a16:creationId xmlns:a16="http://schemas.microsoft.com/office/drawing/2014/main" id="{8289D1C0-B13C-EA90-F81A-07209CBE2F75}"/>
               </a:ext>
             </a:extLst>
           </p:cNvPr>
@@ -10904,7 +10823,7 @@
           <p:cNvPr id="4" name="Title 1">
             <a:extLst>
               <a:ext uri="{FF2B5EF4-FFF2-40B4-BE49-F238E27FC236}">
-                <a16:creationId xmlns:a16="http://schemas.microsoft.com/office/drawing/2014/main" id="{CA56A5F5-0F8C-3D24-9D35-74828C8593D0}"/>
+                <a16:creationId xmlns:a16="http://schemas.microsoft.com/office/drawing/2014/main" id="{99AFC147-9EA6-3EC1-4D93-273CE3E8BA3C}"/>
               </a:ext>
             </a:extLst>
           </p:cNvPr>
@@ -10951,17 +10870,17 @@
           <a:p>
             <a:r>
               <a:rPr lang="en-US" sz="2800" i="1" dirty="0"/>
-              <a:t>Vector Store</a:t>
+              <a:t>Embedding</a:t>
             </a:r>
           </a:p>
         </p:txBody>
       </p:sp>
       <p:pic>
         <p:nvPicPr>
-          <p:cNvPr id="6" name="Graphic 5">
-            <a:extLst>
-              <a:ext uri="{FF2B5EF4-FFF2-40B4-BE49-F238E27FC236}">
-                <a16:creationId xmlns:a16="http://schemas.microsoft.com/office/drawing/2014/main" id="{CFA3D0FE-856B-6EC8-9883-905A52DE11D4}"/>
+          <p:cNvPr id="5" name="Graphic 4" descr="Document outline">
+            <a:extLst>
+              <a:ext uri="{FF2B5EF4-FFF2-40B4-BE49-F238E27FC236}">
+                <a16:creationId xmlns:a16="http://schemas.microsoft.com/office/drawing/2014/main" id="{C76D9F74-FA66-B7D6-5CDB-5E243A1F4C17}"/>
               </a:ext>
             </a:extLst>
           </p:cNvPr>
@@ -10984,8 +10903,8 @@
         </p:blipFill>
         <p:spPr>
           <a:xfrm>
-            <a:off x="1060622" y="2144528"/>
-            <a:ext cx="1071155" cy="914400"/>
+            <a:off x="838200" y="4956876"/>
+            <a:ext cx="694204" cy="694204"/>
           </a:xfrm>
           <a:prstGeom prst="rect">
             <a:avLst/>
@@ -10994,10 +10913,10 @@
       </p:pic>
       <p:pic>
         <p:nvPicPr>
-          <p:cNvPr id="7" name="Graphic 6" descr="Image outline">
-            <a:extLst>
-              <a:ext uri="{FF2B5EF4-FFF2-40B4-BE49-F238E27FC236}">
-                <a16:creationId xmlns:a16="http://schemas.microsoft.com/office/drawing/2014/main" id="{B35E60F2-6A35-49FA-C51B-30BFC3C391A7}"/>
+          <p:cNvPr id="7" name="Graphic 6" descr="Document outline">
+            <a:extLst>
+              <a:ext uri="{FF2B5EF4-FFF2-40B4-BE49-F238E27FC236}">
+                <a16:creationId xmlns:a16="http://schemas.microsoft.com/office/drawing/2014/main" id="{DDD5E463-58F2-6BC6-9F1B-ADD8C58CFF54}"/>
               </a:ext>
             </a:extLst>
           </p:cNvPr>
@@ -11007,10 +10926,10 @@
           <p:nvPr/>
         </p:nvPicPr>
         <p:blipFill>
-          <a:blip r:embed="rId4">
+          <a:blip r:embed="rId2">
             <a:extLst>
               <a:ext uri="{96DAC541-7B7A-43D3-8B79-37D633B846F1}">
-                <asvg:svgBlip xmlns:asvg="http://schemas.microsoft.com/office/drawing/2016/SVG/main" r:embed="rId5"/>
+                <asvg:svgBlip xmlns:asvg="http://schemas.microsoft.com/office/drawing/2016/SVG/main" r:embed="rId3"/>
               </a:ext>
             </a:extLst>
           </a:blip>
@@ -11020,8 +10939,8 @@
         </p:blipFill>
         <p:spPr>
           <a:xfrm>
-            <a:off x="2158614" y="2170881"/>
-            <a:ext cx="814451" cy="814451"/>
+            <a:off x="839775" y="4301372"/>
+            <a:ext cx="694204" cy="694204"/>
           </a:xfrm>
           <a:prstGeom prst="rect">
             <a:avLst/>
@@ -11030,10 +10949,10 @@
       </p:pic>
       <p:pic>
         <p:nvPicPr>
-          <p:cNvPr id="8" name="Graphic 7">
-            <a:extLst>
-              <a:ext uri="{FF2B5EF4-FFF2-40B4-BE49-F238E27FC236}">
-                <a16:creationId xmlns:a16="http://schemas.microsoft.com/office/drawing/2014/main" id="{7F6249D2-458B-3982-F012-9F84A172BCB6}"/>
+          <p:cNvPr id="8" name="Graphic 7" descr="Document outline">
+            <a:extLst>
+              <a:ext uri="{FF2B5EF4-FFF2-40B4-BE49-F238E27FC236}">
+                <a16:creationId xmlns:a16="http://schemas.microsoft.com/office/drawing/2014/main" id="{795C782D-F9E3-6C60-CC78-E2A5E407F88F}"/>
               </a:ext>
             </a:extLst>
           </p:cNvPr>
@@ -11056,8 +10975,8 @@
         </p:blipFill>
         <p:spPr>
           <a:xfrm>
-            <a:off x="1060621" y="3341873"/>
-            <a:ext cx="1071155" cy="914400"/>
+            <a:off x="1428940" y="4310761"/>
+            <a:ext cx="694204" cy="694204"/>
           </a:xfrm>
           <a:prstGeom prst="rect">
             <a:avLst/>
@@ -11066,10 +10985,10 @@
       </p:pic>
       <p:pic>
         <p:nvPicPr>
-          <p:cNvPr id="9" name="Graphic 8" descr="Document outline">
-            <a:extLst>
-              <a:ext uri="{FF2B5EF4-FFF2-40B4-BE49-F238E27FC236}">
-                <a16:creationId xmlns:a16="http://schemas.microsoft.com/office/drawing/2014/main" id="{4DCBA162-F3DF-2850-91B6-1A6024445917}"/>
+          <p:cNvPr id="10" name="Graphic 9" descr="Document outline">
+            <a:extLst>
+              <a:ext uri="{FF2B5EF4-FFF2-40B4-BE49-F238E27FC236}">
+                <a16:creationId xmlns:a16="http://schemas.microsoft.com/office/drawing/2014/main" id="{EA0B3076-2A63-EBD1-2314-56B09625F940}"/>
               </a:ext>
             </a:extLst>
           </p:cNvPr>
@@ -11079,10 +10998,10 @@
           <p:nvPr/>
         </p:nvPicPr>
         <p:blipFill>
-          <a:blip r:embed="rId6">
+          <a:blip r:embed="rId2">
             <a:extLst>
               <a:ext uri="{96DAC541-7B7A-43D3-8B79-37D633B846F1}">
-                <asvg:svgBlip xmlns:asvg="http://schemas.microsoft.com/office/drawing/2016/SVG/main" r:embed="rId7"/>
+                <asvg:svgBlip xmlns:asvg="http://schemas.microsoft.com/office/drawing/2016/SVG/main" r:embed="rId3"/>
               </a:ext>
             </a:extLst>
           </a:blip>
@@ -11092,7 +11011,7 @@
         </p:blipFill>
         <p:spPr>
           <a:xfrm>
-            <a:off x="2241875" y="3434549"/>
+            <a:off x="1437583" y="4956876"/>
             <a:ext cx="694204" cy="694204"/>
           </a:xfrm>
           <a:prstGeom prst="rect">
@@ -11102,10 +11021,10 @@
       </p:pic>
       <p:pic>
         <p:nvPicPr>
-          <p:cNvPr id="10" name="Graphic 9">
-            <a:extLst>
-              <a:ext uri="{FF2B5EF4-FFF2-40B4-BE49-F238E27FC236}">
-                <a16:creationId xmlns:a16="http://schemas.microsoft.com/office/drawing/2014/main" id="{A205A68F-245C-A48A-3947-DE7F1C10CFDA}"/>
+          <p:cNvPr id="12" name="Graphic 11" descr="Table outline">
+            <a:extLst>
+              <a:ext uri="{FF2B5EF4-FFF2-40B4-BE49-F238E27FC236}">
+                <a16:creationId xmlns:a16="http://schemas.microsoft.com/office/drawing/2014/main" id="{3CBE2A02-ECB5-CA7E-A6EC-BCBA5F9D6725}"/>
               </a:ext>
             </a:extLst>
           </p:cNvPr>
@@ -11115,10 +11034,10 @@
           <p:nvPr/>
         </p:nvPicPr>
         <p:blipFill>
-          <a:blip r:embed="rId2">
+          <a:blip r:embed="rId4">
             <a:extLst>
               <a:ext uri="{96DAC541-7B7A-43D3-8B79-37D633B846F1}">
-                <asvg:svgBlip xmlns:asvg="http://schemas.microsoft.com/office/drawing/2016/SVG/main" r:embed="rId3"/>
+                <asvg:svgBlip xmlns:asvg="http://schemas.microsoft.com/office/drawing/2016/SVG/main" r:embed="rId5"/>
               </a:ext>
             </a:extLst>
           </a:blip>
@@ -11128,8 +11047,8 @@
         </p:blipFill>
         <p:spPr>
           <a:xfrm>
-            <a:off x="1060620" y="4644712"/>
-            <a:ext cx="1071155" cy="914400"/>
+            <a:off x="971740" y="2085353"/>
+            <a:ext cx="914400" cy="914400"/>
           </a:xfrm>
           <a:prstGeom prst="rect">
             <a:avLst/>
@@ -11138,10 +11057,10 @@
       </p:pic>
       <p:pic>
         <p:nvPicPr>
-          <p:cNvPr id="11" name="Graphic 10" descr="Table outline">
-            <a:extLst>
-              <a:ext uri="{FF2B5EF4-FFF2-40B4-BE49-F238E27FC236}">
-                <a16:creationId xmlns:a16="http://schemas.microsoft.com/office/drawing/2014/main" id="{EE9D0FA8-3BE9-44E5-D9C4-5E5BFF1F456C}"/>
+          <p:cNvPr id="13" name="Graphic 12" descr="Image outline">
+            <a:extLst>
+              <a:ext uri="{FF2B5EF4-FFF2-40B4-BE49-F238E27FC236}">
+                <a16:creationId xmlns:a16="http://schemas.microsoft.com/office/drawing/2014/main" id="{FAD3F7B4-1F0B-D20D-59C5-4E8729FCA8E6}"/>
               </a:ext>
             </a:extLst>
           </p:cNvPr>
@@ -11151,10 +11070,10 @@
           <p:nvPr/>
         </p:nvPicPr>
         <p:blipFill>
-          <a:blip r:embed="rId8">
+          <a:blip r:embed="rId6">
             <a:extLst>
               <a:ext uri="{96DAC541-7B7A-43D3-8B79-37D633B846F1}">
-                <asvg:svgBlip xmlns:asvg="http://schemas.microsoft.com/office/drawing/2016/SVG/main" r:embed="rId9"/>
+                <asvg:svgBlip xmlns:asvg="http://schemas.microsoft.com/office/drawing/2016/SVG/main" r:embed="rId7"/>
               </a:ext>
             </a:extLst>
           </a:blip>
@@ -11164,8 +11083,8 @@
         </p:blipFill>
         <p:spPr>
           <a:xfrm>
-            <a:off x="2158614" y="4657863"/>
-            <a:ext cx="842711" cy="842711"/>
+            <a:off x="980383" y="3188668"/>
+            <a:ext cx="914400" cy="914400"/>
           </a:xfrm>
           <a:prstGeom prst="rect">
             <a:avLst/>
@@ -11174,10 +11093,115 @@
       </p:pic>
       <p:sp>
         <p:nvSpPr>
-          <p:cNvPr id="12" name="Rectangle 11">
-            <a:extLst>
-              <a:ext uri="{FF2B5EF4-FFF2-40B4-BE49-F238E27FC236}">
-                <a16:creationId xmlns:a16="http://schemas.microsoft.com/office/drawing/2014/main" id="{FA68802D-1051-AEFE-CE14-87D9A47AD38D}"/>
+          <p:cNvPr id="14" name="TextBox 13">
+            <a:extLst>
+              <a:ext uri="{FF2B5EF4-FFF2-40B4-BE49-F238E27FC236}">
+                <a16:creationId xmlns:a16="http://schemas.microsoft.com/office/drawing/2014/main" id="{D8EA3828-3C4C-34F8-F060-97E83380BAAB}"/>
+              </a:ext>
+            </a:extLst>
+          </p:cNvPr>
+          <p:cNvSpPr txBox="1"/>
+          <p:nvPr/>
+        </p:nvSpPr>
+        <p:spPr>
+          <a:xfrm>
+            <a:off x="971740" y="2842054"/>
+            <a:ext cx="1413114" cy="369332"/>
+          </a:xfrm>
+          <a:prstGeom prst="rect">
+            <a:avLst/>
+          </a:prstGeom>
+          <a:noFill/>
+        </p:spPr>
+        <p:txBody>
+          <a:bodyPr wrap="square" rtlCol="0">
+            <a:spAutoFit/>
+          </a:bodyPr>
+          <a:lstStyle/>
+          <a:p>
+            <a:r>
+              <a:rPr lang="en-US" dirty="0"/>
+              <a:t>Tables</a:t>
+            </a:r>
+          </a:p>
+        </p:txBody>
+      </p:sp>
+      <p:sp>
+        <p:nvSpPr>
+          <p:cNvPr id="15" name="TextBox 14">
+            <a:extLst>
+              <a:ext uri="{FF2B5EF4-FFF2-40B4-BE49-F238E27FC236}">
+                <a16:creationId xmlns:a16="http://schemas.microsoft.com/office/drawing/2014/main" id="{384B2F79-424E-5F81-20EC-1334298DC01C}"/>
+              </a:ext>
+            </a:extLst>
+          </p:cNvPr>
+          <p:cNvSpPr txBox="1"/>
+          <p:nvPr/>
+        </p:nvSpPr>
+        <p:spPr>
+          <a:xfrm>
+            <a:off x="985623" y="3905073"/>
+            <a:ext cx="909160" cy="369332"/>
+          </a:xfrm>
+          <a:prstGeom prst="rect">
+            <a:avLst/>
+          </a:prstGeom>
+          <a:noFill/>
+        </p:spPr>
+        <p:txBody>
+          <a:bodyPr wrap="none" rtlCol="0">
+            <a:spAutoFit/>
+          </a:bodyPr>
+          <a:lstStyle/>
+          <a:p>
+            <a:r>
+              <a:rPr lang="en-US" dirty="0"/>
+              <a:t>Images</a:t>
+            </a:r>
+          </a:p>
+        </p:txBody>
+      </p:sp>
+      <p:sp>
+        <p:nvSpPr>
+          <p:cNvPr id="16" name="TextBox 15">
+            <a:extLst>
+              <a:ext uri="{FF2B5EF4-FFF2-40B4-BE49-F238E27FC236}">
+                <a16:creationId xmlns:a16="http://schemas.microsoft.com/office/drawing/2014/main" id="{64C973F6-E362-E017-0604-921152C8328E}"/>
+              </a:ext>
+            </a:extLst>
+          </p:cNvPr>
+          <p:cNvSpPr txBox="1"/>
+          <p:nvPr/>
+        </p:nvSpPr>
+        <p:spPr>
+          <a:xfrm>
+            <a:off x="838200" y="5716230"/>
+            <a:ext cx="1546654" cy="369332"/>
+          </a:xfrm>
+          <a:prstGeom prst="rect">
+            <a:avLst/>
+          </a:prstGeom>
+          <a:noFill/>
+        </p:spPr>
+        <p:txBody>
+          <a:bodyPr wrap="square" rtlCol="0">
+            <a:spAutoFit/>
+          </a:bodyPr>
+          <a:lstStyle/>
+          <a:p>
+            <a:r>
+              <a:rPr lang="en-US" dirty="0"/>
+              <a:t>Text Chunks</a:t>
+            </a:r>
+          </a:p>
+        </p:txBody>
+      </p:sp>
+      <p:sp>
+        <p:nvSpPr>
+          <p:cNvPr id="17" name="Rectangle 16">
+            <a:extLst>
+              <a:ext uri="{FF2B5EF4-FFF2-40B4-BE49-F238E27FC236}">
+                <a16:creationId xmlns:a16="http://schemas.microsoft.com/office/drawing/2014/main" id="{EEBFC2DF-06E5-DD1B-E6EC-079505B8CCFF}"/>
               </a:ext>
             </a:extLst>
           </p:cNvPr>
@@ -11186,8 +11210,8 @@
         </p:nvSpPr>
         <p:spPr>
           <a:xfrm>
-            <a:off x="4579240" y="2107399"/>
-            <a:ext cx="3390868" cy="3348504"/>
+            <a:off x="4686871" y="2253009"/>
+            <a:ext cx="2910680" cy="2964086"/>
           </a:xfrm>
           <a:prstGeom prst="rect">
             <a:avLst/>
@@ -11216,24 +11240,59 @@
           </a:fontRef>
         </p:style>
         <p:txBody>
-          <a:bodyPr rtlCol="0" anchor="ctr"/>
+          <a:bodyPr lIns="274320" rIns="274320" rtlCol="0" anchor="ctr"/>
           <a:lstStyle/>
+          <a:p>
+            <a:pPr lvl="1" algn="ctr"/>
+            <a:r>
+              <a:rPr lang="en-US" dirty="0">
+                <a:solidFill>
+                  <a:sysClr val="windowText" lastClr="000000"/>
+                </a:solidFill>
+              </a:rPr>
+              <a:t>     </a:t>
+            </a:r>
+          </a:p>
           <a:p>
             <a:pPr algn="r"/>
             <a:endParaRPr lang="en-US" dirty="0">
               <a:solidFill>
-                <a:schemeClr val="tx1"/>
+                <a:sysClr val="windowText" lastClr="000000"/>
               </a:solidFill>
             </a:endParaRPr>
           </a:p>
+          <a:p>
+            <a:pPr algn="r"/>
+            <a:endParaRPr lang="en-US" dirty="0">
+              <a:solidFill>
+                <a:sysClr val="windowText" lastClr="000000"/>
+              </a:solidFill>
+            </a:endParaRPr>
+          </a:p>
+          <a:p>
+            <a:pPr algn="r"/>
+            <a:endParaRPr lang="en-US" dirty="0">
+              <a:solidFill>
+                <a:sysClr val="windowText" lastClr="000000"/>
+              </a:solidFill>
+            </a:endParaRPr>
+          </a:p>
+          <a:p>
+            <a:pPr algn="r"/>
+            <a:endParaRPr lang="en-US" dirty="0">
+              <a:solidFill>
+                <a:sysClr val="windowText" lastClr="000000"/>
+              </a:solidFill>
+            </a:endParaRPr>
+          </a:p>
         </p:txBody>
       </p:sp>
       <p:pic>
         <p:nvPicPr>
-          <p:cNvPr id="13" name="Picture 12">
-            <a:extLst>
-              <a:ext uri="{FF2B5EF4-FFF2-40B4-BE49-F238E27FC236}">
-                <a16:creationId xmlns:a16="http://schemas.microsoft.com/office/drawing/2014/main" id="{FA7CF11A-B0C0-2831-639D-B8CB79F6BAEB}"/>
+          <p:cNvPr id="19" name="Picture 18">
+            <a:extLst>
+              <a:ext uri="{FF2B5EF4-FFF2-40B4-BE49-F238E27FC236}">
+                <a16:creationId xmlns:a16="http://schemas.microsoft.com/office/drawing/2014/main" id="{F87E9CD3-0EE0-69DE-F7D2-50EFCD0EA66E}"/>
               </a:ext>
             </a:extLst>
           </p:cNvPr>
@@ -11243,40 +11302,76 @@
           <p:nvPr/>
         </p:nvPicPr>
         <p:blipFill>
-          <a:blip r:embed="rId10"/>
-          <a:srcRect b="12576"/>
+          <a:blip r:embed="rId8"/>
+          <a:srcRect b="13873"/>
           <a:stretch>
             <a:fillRect/>
           </a:stretch>
         </p:blipFill>
         <p:spPr>
           <a:xfrm>
-            <a:off x="4737470" y="2279527"/>
-            <a:ext cx="683058" cy="597158"/>
+            <a:off x="4806706" y="2370190"/>
+            <a:ext cx="702732" cy="605242"/>
           </a:xfrm>
           <a:prstGeom prst="rect">
             <a:avLst/>
           </a:prstGeom>
         </p:spPr>
       </p:pic>
+      <p:sp>
+        <p:nvSpPr>
+          <p:cNvPr id="20" name="TextBox 19">
+            <a:extLst>
+              <a:ext uri="{FF2B5EF4-FFF2-40B4-BE49-F238E27FC236}">
+                <a16:creationId xmlns:a16="http://schemas.microsoft.com/office/drawing/2014/main" id="{6D9C2EC1-9B10-0675-B2E7-D42ECFD12FE4}"/>
+              </a:ext>
+            </a:extLst>
+          </p:cNvPr>
+          <p:cNvSpPr txBox="1"/>
+          <p:nvPr/>
+        </p:nvSpPr>
+        <p:spPr>
+          <a:xfrm>
+            <a:off x="5629273" y="2485978"/>
+            <a:ext cx="1805611" cy="369332"/>
+          </a:xfrm>
+          <a:prstGeom prst="rect">
+            <a:avLst/>
+          </a:prstGeom>
+          <a:noFill/>
+        </p:spPr>
+        <p:txBody>
+          <a:bodyPr wrap="square" rtlCol="0">
+            <a:spAutoFit/>
+          </a:bodyPr>
+          <a:lstStyle/>
+          <a:p>
+            <a:r>
+              <a:rPr lang="en-US" dirty="0"/>
+              <a:t>Embedding</a:t>
+            </a:r>
+          </a:p>
+        </p:txBody>
+      </p:sp>
       <p:cxnSp>
         <p:nvCxnSpPr>
-          <p:cNvPr id="14" name="Straight Arrow Connector 13">
-            <a:extLst>
-              <a:ext uri="{FF2B5EF4-FFF2-40B4-BE49-F238E27FC236}">
-                <a16:creationId xmlns:a16="http://schemas.microsoft.com/office/drawing/2014/main" id="{59D35FC8-304D-7422-57DA-01C838487DBD}"/>
+          <p:cNvPr id="21" name="Straight Arrow Connector 20">
+            <a:extLst>
+              <a:ext uri="{FF2B5EF4-FFF2-40B4-BE49-F238E27FC236}">
+                <a16:creationId xmlns:a16="http://schemas.microsoft.com/office/drawing/2014/main" id="{32075760-E86A-0534-9632-1A901B2DBC4B}"/>
               </a:ext>
             </a:extLst>
           </p:cNvPr>
           <p:cNvCxnSpPr>
             <a:cxnSpLocks/>
+            <a:endCxn id="17" idx="1"/>
           </p:cNvCxnSpPr>
           <p:nvPr/>
         </p:nvCxnSpPr>
         <p:spPr>
           <a:xfrm>
-            <a:off x="2991077" y="2582562"/>
-            <a:ext cx="1588163" cy="0"/>
+            <a:off x="2014618" y="2670644"/>
+            <a:ext cx="2672253" cy="1064408"/>
           </a:xfrm>
           <a:prstGeom prst="straightConnector1">
             <a:avLst/>
@@ -11302,22 +11397,23 @@
       </p:cxnSp>
       <p:cxnSp>
         <p:nvCxnSpPr>
-          <p:cNvPr id="19" name="Straight Arrow Connector 18">
-            <a:extLst>
-              <a:ext uri="{FF2B5EF4-FFF2-40B4-BE49-F238E27FC236}">
-                <a16:creationId xmlns:a16="http://schemas.microsoft.com/office/drawing/2014/main" id="{338F00EA-8FB9-8C9F-9DED-D6DA39F898B2}"/>
+          <p:cNvPr id="23" name="Straight Arrow Connector 22">
+            <a:extLst>
+              <a:ext uri="{FF2B5EF4-FFF2-40B4-BE49-F238E27FC236}">
+                <a16:creationId xmlns:a16="http://schemas.microsoft.com/office/drawing/2014/main" id="{28F2A589-F4E3-B526-A0BA-92F074CC27AD}"/>
               </a:ext>
             </a:extLst>
           </p:cNvPr>
           <p:cNvCxnSpPr>
             <a:cxnSpLocks/>
+            <a:endCxn id="17" idx="1"/>
           </p:cNvCxnSpPr>
           <p:nvPr/>
         </p:nvCxnSpPr>
         <p:spPr>
           <a:xfrm>
-            <a:off x="2991077" y="3797643"/>
-            <a:ext cx="1588163" cy="0"/>
+            <a:off x="1980504" y="3735052"/>
+            <a:ext cx="2706367" cy="0"/>
           </a:xfrm>
           <a:prstGeom prst="straightConnector1">
             <a:avLst/>
@@ -11343,22 +11439,23 @@
       </p:cxnSp>
       <p:cxnSp>
         <p:nvCxnSpPr>
-          <p:cNvPr id="20" name="Straight Arrow Connector 19">
-            <a:extLst>
-              <a:ext uri="{FF2B5EF4-FFF2-40B4-BE49-F238E27FC236}">
-                <a16:creationId xmlns:a16="http://schemas.microsoft.com/office/drawing/2014/main" id="{E2A104A2-0754-CC3A-9B1E-317749407ABE}"/>
+          <p:cNvPr id="28" name="Straight Arrow Connector 27">
+            <a:extLst>
+              <a:ext uri="{FF2B5EF4-FFF2-40B4-BE49-F238E27FC236}">
+                <a16:creationId xmlns:a16="http://schemas.microsoft.com/office/drawing/2014/main" id="{FCCBFD5B-6F66-E1CF-09DA-96C1BCE84ED8}"/>
               </a:ext>
             </a:extLst>
           </p:cNvPr>
           <p:cNvCxnSpPr>
             <a:cxnSpLocks/>
+            <a:endCxn id="17" idx="1"/>
           </p:cNvCxnSpPr>
           <p:nvPr/>
         </p:nvCxnSpPr>
         <p:spPr>
-          <a:xfrm>
-            <a:off x="2991077" y="5070389"/>
-            <a:ext cx="1588163" cy="0"/>
+          <a:xfrm flipV="1">
+            <a:off x="2208865" y="3735052"/>
+            <a:ext cx="2478006" cy="1221824"/>
           </a:xfrm>
           <a:prstGeom prst="straightConnector1">
             <a:avLst/>
@@ -11384,10 +11481,10 @@
       </p:cxnSp>
       <p:sp>
         <p:nvSpPr>
-          <p:cNvPr id="21" name="TextBox 20">
-            <a:extLst>
-              <a:ext uri="{FF2B5EF4-FFF2-40B4-BE49-F238E27FC236}">
-                <a16:creationId xmlns:a16="http://schemas.microsoft.com/office/drawing/2014/main" id="{DD2FAA2C-7A02-42F9-3FAF-2196553023B7}"/>
+          <p:cNvPr id="33" name="TextBox 32">
+            <a:extLst>
+              <a:ext uri="{FF2B5EF4-FFF2-40B4-BE49-F238E27FC236}">
+                <a16:creationId xmlns:a16="http://schemas.microsoft.com/office/drawing/2014/main" id="{9CBC6437-7408-64C6-4DB4-C5EAB1031AF1}"/>
               </a:ext>
             </a:extLst>
           </p:cNvPr>
@@ -11396,8 +11493,8 @@
         </p:nvSpPr>
         <p:spPr>
           <a:xfrm>
-            <a:off x="5420528" y="2358977"/>
-            <a:ext cx="1881466" cy="369332"/>
+            <a:off x="4806705" y="3211386"/>
+            <a:ext cx="2706367" cy="1754326"/>
           </a:xfrm>
           <a:prstGeom prst="rect">
             <a:avLst/>
@@ -11410,48 +11507,13 @@
           </a:bodyPr>
           <a:lstStyle/>
           <a:p>
-            <a:r>
-              <a:rPr lang="en-US" dirty="0"/>
-              <a:t>Vector Store</a:t>
-            </a:r>
-          </a:p>
-        </p:txBody>
-      </p:sp>
-      <p:sp>
-        <p:nvSpPr>
-          <p:cNvPr id="22" name="TextBox 21">
-            <a:extLst>
-              <a:ext uri="{FF2B5EF4-FFF2-40B4-BE49-F238E27FC236}">
-                <a16:creationId xmlns:a16="http://schemas.microsoft.com/office/drawing/2014/main" id="{811A20ED-E927-AC66-4CBA-4C38694E1E5B}"/>
-              </a:ext>
-            </a:extLst>
-          </p:cNvPr>
-          <p:cNvSpPr txBox="1"/>
-          <p:nvPr/>
-        </p:nvSpPr>
-        <p:spPr>
-          <a:xfrm>
-            <a:off x="4737470" y="3058928"/>
-            <a:ext cx="3232638" cy="1754326"/>
-          </a:xfrm>
-          <a:prstGeom prst="rect">
-            <a:avLst/>
-          </a:prstGeom>
-          <a:noFill/>
-        </p:spPr>
-        <p:txBody>
-          <a:bodyPr wrap="square" rtlCol="0">
-            <a:spAutoFit/>
-          </a:bodyPr>
-          <a:lstStyle/>
-          <a:p>
             <a:pPr marL="285750" indent="-285750">
               <a:buFont typeface="Arial" panose="020B0604020202020204" pitchFamily="34" charset="0"/>
               <a:buChar char="•"/>
             </a:pPr>
             <a:r>
               <a:rPr lang="en-US" dirty="0"/>
-              <a:t>Stores vectors with corresponding content in database</a:t>
+              <a:t>Encodes Tables, Chunks Images into Vectors in same Space</a:t>
             </a:r>
           </a:p>
           <a:p>
@@ -11461,29 +11523,30 @@
             </a:pPr>
             <a:r>
               <a:rPr lang="en-US" dirty="0"/>
-              <a:t>Allows for Efficient Similarity Search (looks for closest neighbors) </a:t>
+              <a:t>Can be used to compare different blocks with each other</a:t>
             </a:r>
           </a:p>
         </p:txBody>
       </p:sp>
       <p:cxnSp>
         <p:nvCxnSpPr>
-          <p:cNvPr id="25" name="Straight Arrow Connector 24">
-            <a:extLst>
-              <a:ext uri="{FF2B5EF4-FFF2-40B4-BE49-F238E27FC236}">
-                <a16:creationId xmlns:a16="http://schemas.microsoft.com/office/drawing/2014/main" id="{6FA5399D-1482-1D6B-3194-21B6AACCFD49}"/>
+          <p:cNvPr id="36" name="Straight Arrow Connector 35">
+            <a:extLst>
+              <a:ext uri="{FF2B5EF4-FFF2-40B4-BE49-F238E27FC236}">
+                <a16:creationId xmlns:a16="http://schemas.microsoft.com/office/drawing/2014/main" id="{A0055E1F-854C-7827-9D24-CE9BA65ED939}"/>
               </a:ext>
             </a:extLst>
           </p:cNvPr>
           <p:cNvCxnSpPr>
             <a:cxnSpLocks/>
+            <a:stCxn id="17" idx="3"/>
           </p:cNvCxnSpPr>
           <p:nvPr/>
         </p:nvCxnSpPr>
         <p:spPr>
           <a:xfrm>
-            <a:off x="7970108" y="3768810"/>
-            <a:ext cx="1588163" cy="0"/>
+            <a:off x="7597551" y="3735052"/>
+            <a:ext cx="1089249" cy="0"/>
           </a:xfrm>
           <a:prstGeom prst="straightConnector1">
             <a:avLst/>
@@ -11507,12 +11570,48 @@
           </a:fontRef>
         </p:style>
       </p:cxnSp>
-      <p:sp>
-        <p:nvSpPr>
-          <p:cNvPr id="26" name="TextBox 25">
-            <a:extLst>
-              <a:ext uri="{FF2B5EF4-FFF2-40B4-BE49-F238E27FC236}">
-                <a16:creationId xmlns:a16="http://schemas.microsoft.com/office/drawing/2014/main" id="{B511F4C6-27B0-149D-0D17-6E0F59F59505}"/>
+      <p:pic>
+        <p:nvPicPr>
+          <p:cNvPr id="41" name="Graphic 40">
+            <a:extLst>
+              <a:ext uri="{FF2B5EF4-FFF2-40B4-BE49-F238E27FC236}">
+                <a16:creationId xmlns:a16="http://schemas.microsoft.com/office/drawing/2014/main" id="{C1610A02-E523-8D1B-40B4-2F11904CE22B}"/>
+              </a:ext>
+            </a:extLst>
+          </p:cNvPr>
+          <p:cNvPicPr>
+            <a:picLocks noChangeAspect="1"/>
+          </p:cNvPicPr>
+          <p:nvPr/>
+        </p:nvPicPr>
+        <p:blipFill>
+          <a:blip r:embed="rId9">
+            <a:extLst>
+              <a:ext uri="{96DAC541-7B7A-43D3-8B79-37D633B846F1}">
+                <asvg:svgBlip xmlns:asvg="http://schemas.microsoft.com/office/drawing/2016/SVG/main" r:embed="rId10"/>
+              </a:ext>
+            </a:extLst>
+          </a:blip>
+          <a:stretch>
+            <a:fillRect/>
+          </a:stretch>
+        </p:blipFill>
+        <p:spPr>
+          <a:xfrm>
+            <a:off x="8771279" y="2582561"/>
+            <a:ext cx="2757373" cy="2353855"/>
+          </a:xfrm>
+          <a:prstGeom prst="rect">
+            <a:avLst/>
+          </a:prstGeom>
+        </p:spPr>
+      </p:pic>
+      <p:sp>
+        <p:nvSpPr>
+          <p:cNvPr id="42" name="TextBox 41">
+            <a:extLst>
+              <a:ext uri="{FF2B5EF4-FFF2-40B4-BE49-F238E27FC236}">
+                <a16:creationId xmlns:a16="http://schemas.microsoft.com/office/drawing/2014/main" id="{E3C4B346-5B35-2862-84C7-890F3C3B5152}"/>
               </a:ext>
             </a:extLst>
           </p:cNvPr>
@@ -11521,8 +11620,8 @@
         </p:nvSpPr>
         <p:spPr>
           <a:xfrm>
-            <a:off x="9613269" y="3341873"/>
-            <a:ext cx="2582563" cy="830997"/>
+            <a:off x="8441240" y="5057229"/>
+            <a:ext cx="2912560" cy="523220"/>
           </a:xfrm>
           <a:prstGeom prst="rect">
             <a:avLst/>
@@ -11535,9 +11634,10 @@
           </a:bodyPr>
           <a:lstStyle/>
           <a:p>
-            <a:r>
-              <a:rPr lang="en-US" sz="2400" dirty="0"/>
-              <a:t>Data preparation complete!</a:t>
+            <a:pPr algn="ctr"/>
+            <a:r>
+              <a:rPr lang="en-US" sz="1400" i="1" dirty="0"/>
+              <a:t>An Embedding Vector could look like this</a:t>
             </a:r>
           </a:p>
         </p:txBody>
@@ -11545,7 +11645,7 @@
     </p:spTree>
     <p:extLst>
       <p:ext uri="{BB962C8B-B14F-4D97-AF65-F5344CB8AC3E}">
-        <p14:creationId xmlns:p14="http://schemas.microsoft.com/office/powerpoint/2010/main" val="285337273"/>
+        <p14:creationId xmlns:p14="http://schemas.microsoft.com/office/powerpoint/2010/main" val="2284938492"/>
       </p:ext>
     </p:extLst>
   </p:cSld>

--- a/docs/LLM presentation.pptx
+++ b/docs/LLM presentation.pptx
@@ -234,7 +234,7 @@
           <a:p>
             <a:fld id="{755C9F4E-E920-4D44-949A-A478FAE3130F}" type="datetimeFigureOut">
               <a:rPr lang="en-US" smtClean="0"/>
-              <a:t>7/6/25</a:t>
+              <a:t>7/8/25</a:t>
             </a:fld>
             <a:endParaRPr lang="en-US"/>
           </a:p>
@@ -648,7 +648,7 @@
           <a:p>
             <a:fld id="{F1275B78-02F6-4B47-B918-CE7AA020551C}" type="datetimeFigureOut">
               <a:rPr lang="en-US" smtClean="0"/>
-              <a:t>7/6/25</a:t>
+              <a:t>7/8/25</a:t>
             </a:fld>
             <a:endParaRPr lang="en-US"/>
           </a:p>
@@ -846,7 +846,7 @@
           <a:p>
             <a:fld id="{F1275B78-02F6-4B47-B918-CE7AA020551C}" type="datetimeFigureOut">
               <a:rPr lang="en-US" smtClean="0"/>
-              <a:t>7/6/25</a:t>
+              <a:t>7/8/25</a:t>
             </a:fld>
             <a:endParaRPr lang="en-US"/>
           </a:p>
@@ -1054,7 +1054,7 @@
           <a:p>
             <a:fld id="{F1275B78-02F6-4B47-B918-CE7AA020551C}" type="datetimeFigureOut">
               <a:rPr lang="en-US" smtClean="0"/>
-              <a:t>7/6/25</a:t>
+              <a:t>7/8/25</a:t>
             </a:fld>
             <a:endParaRPr lang="en-US"/>
           </a:p>
@@ -1252,7 +1252,7 @@
           <a:p>
             <a:fld id="{F1275B78-02F6-4B47-B918-CE7AA020551C}" type="datetimeFigureOut">
               <a:rPr lang="en-US" smtClean="0"/>
-              <a:t>7/6/25</a:t>
+              <a:t>7/8/25</a:t>
             </a:fld>
             <a:endParaRPr lang="en-US"/>
           </a:p>
@@ -1527,7 +1527,7 @@
           <a:p>
             <a:fld id="{F1275B78-02F6-4B47-B918-CE7AA020551C}" type="datetimeFigureOut">
               <a:rPr lang="en-US" smtClean="0"/>
-              <a:t>7/6/25</a:t>
+              <a:t>7/8/25</a:t>
             </a:fld>
             <a:endParaRPr lang="en-US"/>
           </a:p>
@@ -1792,7 +1792,7 @@
           <a:p>
             <a:fld id="{F1275B78-02F6-4B47-B918-CE7AA020551C}" type="datetimeFigureOut">
               <a:rPr lang="en-US" smtClean="0"/>
-              <a:t>7/6/25</a:t>
+              <a:t>7/8/25</a:t>
             </a:fld>
             <a:endParaRPr lang="en-US"/>
           </a:p>
@@ -2204,7 +2204,7 @@
           <a:p>
             <a:fld id="{F1275B78-02F6-4B47-B918-CE7AA020551C}" type="datetimeFigureOut">
               <a:rPr lang="en-US" smtClean="0"/>
-              <a:t>7/6/25</a:t>
+              <a:t>7/8/25</a:t>
             </a:fld>
             <a:endParaRPr lang="en-US"/>
           </a:p>
@@ -2345,7 +2345,7 @@
           <a:p>
             <a:fld id="{F1275B78-02F6-4B47-B918-CE7AA020551C}" type="datetimeFigureOut">
               <a:rPr lang="en-US" smtClean="0"/>
-              <a:t>7/6/25</a:t>
+              <a:t>7/8/25</a:t>
             </a:fld>
             <a:endParaRPr lang="en-US"/>
           </a:p>
@@ -2458,7 +2458,7 @@
           <a:p>
             <a:fld id="{F1275B78-02F6-4B47-B918-CE7AA020551C}" type="datetimeFigureOut">
               <a:rPr lang="en-US" smtClean="0"/>
-              <a:t>7/6/25</a:t>
+              <a:t>7/8/25</a:t>
             </a:fld>
             <a:endParaRPr lang="en-US"/>
           </a:p>
@@ -2769,7 +2769,7 @@
           <a:p>
             <a:fld id="{F1275B78-02F6-4B47-B918-CE7AA020551C}" type="datetimeFigureOut">
               <a:rPr lang="en-US" smtClean="0"/>
-              <a:t>7/6/25</a:t>
+              <a:t>7/8/25</a:t>
             </a:fld>
             <a:endParaRPr lang="en-US"/>
           </a:p>
@@ -3057,7 +3057,7 @@
           <a:p>
             <a:fld id="{F1275B78-02F6-4B47-B918-CE7AA020551C}" type="datetimeFigureOut">
               <a:rPr lang="en-US" smtClean="0"/>
-              <a:t>7/6/25</a:t>
+              <a:t>7/8/25</a:t>
             </a:fld>
             <a:endParaRPr lang="en-US"/>
           </a:p>
@@ -3298,7 +3298,7 @@
           <a:p>
             <a:fld id="{F1275B78-02F6-4B47-B918-CE7AA020551C}" type="datetimeFigureOut">
               <a:rPr lang="en-US" smtClean="0"/>
-              <a:t>7/6/25</a:t>
+              <a:t>7/8/25</a:t>
             </a:fld>
             <a:endParaRPr lang="en-US"/>
           </a:p>
@@ -3731,13 +3731,20 @@
             <p:ph type="ctrTitle"/>
           </p:nvPr>
         </p:nvSpPr>
-        <p:spPr/>
-        <p:txBody>
-          <a:bodyPr/>
+        <p:spPr>
+          <a:xfrm>
+            <a:off x="55037" y="1041400"/>
+            <a:ext cx="9144000" cy="2387600"/>
+          </a:xfrm>
+        </p:spPr>
+        <p:txBody>
+          <a:bodyPr>
+            <a:normAutofit/>
+          </a:bodyPr>
           <a:lstStyle/>
           <a:p>
             <a:r>
-              <a:rPr lang="en-US" dirty="0"/>
+              <a:rPr lang="en-US" sz="6600" dirty="0"/>
               <a:t>Introduction to RAG</a:t>
             </a:r>
           </a:p>
@@ -3759,26 +3766,138 @@
             <p:ph type="subTitle" idx="1"/>
           </p:nvPr>
         </p:nvSpPr>
-        <p:spPr/>
+        <p:spPr>
+          <a:xfrm>
+            <a:off x="-2246812" y="3429000"/>
+            <a:ext cx="9144000" cy="1655762"/>
+          </a:xfrm>
+        </p:spPr>
         <p:txBody>
           <a:bodyPr/>
           <a:lstStyle/>
           <a:p>
             <a:r>
               <a:rPr lang="en-US" dirty="0"/>
-              <a:t>By Carlo Teufel </a:t>
-            </a:r>
+              <a:t>By Carlo Teufel</a:t>
+            </a:r>
+            <a:endParaRPr lang="en-US" i="1" dirty="0"/>
+          </a:p>
+        </p:txBody>
+      </p:sp>
+      <p:pic>
+        <p:nvPicPr>
+          <p:cNvPr id="4" name="Picture 2" descr="Carlo Teufel">
+            <a:extLst>
+              <a:ext uri="{FF2B5EF4-FFF2-40B4-BE49-F238E27FC236}">
+                <a16:creationId xmlns:a16="http://schemas.microsoft.com/office/drawing/2014/main" id="{D2C39F23-3028-9105-AC88-7A8833B3690E}"/>
+              </a:ext>
+            </a:extLst>
+          </p:cNvPr>
+          <p:cNvPicPr>
+            <a:picLocks noChangeAspect="1" noChangeArrowheads="1"/>
+          </p:cNvPicPr>
+          <p:nvPr/>
+        </p:nvPicPr>
+        <p:blipFill>
+          <a:blip r:embed="rId2">
+            <a:extLst>
+              <a:ext uri="{28A0092B-C50C-407E-A947-70E740481C1C}">
+                <a14:useLocalDpi xmlns:a14="http://schemas.microsoft.com/office/drawing/2010/main" val="0"/>
+              </a:ext>
+            </a:extLst>
+          </a:blip>
+          <a:srcRect/>
+          <a:stretch>
+            <a:fillRect/>
+          </a:stretch>
+        </p:blipFill>
+        <p:spPr bwMode="auto">
+          <a:xfrm>
+            <a:off x="8872466" y="1828133"/>
+            <a:ext cx="2334054" cy="2334054"/>
+          </a:xfrm>
+          <a:prstGeom prst="rect">
+            <a:avLst/>
+          </a:prstGeom>
+          <a:noFill/>
+          <a:effectLst>
+            <a:softEdge rad="63500"/>
+          </a:effectLst>
+          <a:extLst>
+            <a:ext uri="{909E8E84-426E-40DD-AFC4-6F175D3DCCD1}">
+              <a14:hiddenFill xmlns:a14="http://schemas.microsoft.com/office/drawing/2010/main">
+                <a:solidFill>
+                  <a:srgbClr val="FFFFFF"/>
+                </a:solidFill>
+              </a14:hiddenFill>
+            </a:ext>
+          </a:extLst>
+        </p:spPr>
+      </p:pic>
+      <p:sp>
+        <p:nvSpPr>
+          <p:cNvPr id="6" name="TextBox 5">
+            <a:extLst>
+              <a:ext uri="{FF2B5EF4-FFF2-40B4-BE49-F238E27FC236}">
+                <a16:creationId xmlns:a16="http://schemas.microsoft.com/office/drawing/2014/main" id="{DA0A6308-B1CB-50C7-941D-E2DDFD0DF203}"/>
+              </a:ext>
+            </a:extLst>
+          </p:cNvPr>
+          <p:cNvSpPr txBox="1"/>
+          <p:nvPr/>
+        </p:nvSpPr>
+        <p:spPr>
+          <a:xfrm>
+            <a:off x="8872466" y="4187803"/>
+            <a:ext cx="6104238" cy="1200329"/>
+          </a:xfrm>
+          <a:prstGeom prst="rect">
+            <a:avLst/>
+          </a:prstGeom>
+          <a:noFill/>
+        </p:spPr>
+        <p:txBody>
+          <a:bodyPr wrap="square">
+            <a:spAutoFit/>
+          </a:bodyPr>
+          <a:lstStyle/>
+          <a:p>
+            <a:r>
+              <a:rPr lang="en-US" dirty="0"/>
+              <a:t>Carlo Teufel </a:t>
+            </a:r>
+          </a:p>
+          <a:p>
             <a:r>
               <a:rPr lang="en-US" i="1" dirty="0"/>
-              <a:t>(</a:t>
-            </a:r>
-            <a:r>
-              <a:rPr lang="en-US" i="1" dirty="0" err="1"/>
+              <a:t>Research Assistant</a:t>
+            </a:r>
+          </a:p>
+          <a:p>
+            <a:r>
+              <a:rPr lang="en-US" i="1" dirty="0"/>
+              <a:t>Email</a:t>
+            </a:r>
+            <a:r>
+              <a:rPr lang="en-US" dirty="0"/>
+              <a:t>: </a:t>
+            </a:r>
+            <a:r>
+              <a:rPr lang="en-US" dirty="0">
+                <a:hlinkClick r:id="rId3"/>
+              </a:rPr>
               <a:t>cteufel@ethz.ch</a:t>
             </a:r>
+            <a:endParaRPr lang="en-US" dirty="0"/>
+          </a:p>
+          <a:p>
             <a:r>
               <a:rPr lang="en-US" i="1" dirty="0"/>
-              <a:t>)</a:t>
+              <a:t>Phone</a:t>
+            </a:r>
+            <a:r>
+              <a:rPr lang="en-US" dirty="0"/>
+              <a:t>: +41 79 477 6068</a:t>
             </a:r>
           </a:p>
         </p:txBody>
